--- a/python-course-ppt/逐节课件/Python讲授课件-单元12.pptx
+++ b/python-course-ppt/逐节课件/Python讲授课件-单元12.pptx
@@ -335,6 +335,86 @@
           </a:p>
         </p:txBody>
       </p:sp>
+      <p:sp>
+        <p:nvSpPr>
+          <p:cNvPr id="2" name="讲课提示"/>
+          <p:cNvSpPr txBox="1"/>
+          <p:nvPr/>
+        </p:nvSpPr>
+        <p:spPr>
+          <a:xfrm>
+            <a:off x="457200" y="457200"/>
+            <a:ext cx="6858000" cy="4800600"/>
+          </a:xfrm>
+          <a:prstGeom prst="rect">
+            <a:avLst/>
+          </a:prstGeom>
+        </p:spPr>
+        <p:txBody>
+          <a:bodyPr wrap="square"/>
+          <a:lstStyle/>
+          <a:p>
+            <a:r>
+              <a:rPr lang="zh-CN" dirty="0"/>
+              <a:t>单元 12 · 单元 12 · Pygame 起步与飞船驾驶</a:t>
+            </a:r>
+          </a:p>
+          <a:p>
+            <a:r>
+              <a:rPr lang="zh-CN" dirty="0"/>
+              <a:t/>
+            </a:r>
+          </a:p>
+          <a:p>
+            <a:r>
+              <a:rPr lang="zh-CN" dirty="0"/>
+              <a:t>本单元包含以下课节：</a:t>
+            </a:r>
+          </a:p>
+          <a:p>
+            <a:r>
+              <a:rPr lang="zh-CN" dirty="0"/>
+              <a:t>· 第 65 节 项目规划与安装 Pygame</a:t>
+            </a:r>
+          </a:p>
+          <a:p>
+            <a:r>
+              <a:rPr lang="zh-CN" dirty="0"/>
+              <a:t>· 第 66 节 主循环、帧率与事件驱动</a:t>
+            </a:r>
+          </a:p>
+          <a:p>
+            <a:r>
+              <a:rPr lang="zh-CN" dirty="0"/>
+              <a:t>· 第 67 节 Settings 类与屏幕矩形</a:t>
+            </a:r>
+          </a:p>
+          <a:p>
+            <a:r>
+              <a:rPr lang="zh-CN" dirty="0"/>
+              <a:t>· 第 68 节 驾驶飞船：标志位与边界</a:t>
+            </a:r>
+          </a:p>
+          <a:p>
+            <a:r>
+              <a:rPr lang="zh-CN" dirty="0"/>
+              <a:t>· 第 69 节 重构、错误自查与验收</a:t>
+            </a:r>
+          </a:p>
+          <a:p>
+            <a:r>
+              <a:rPr lang="zh-CN" dirty="0"/>
+              <a:t/>
+            </a:r>
+          </a:p>
+          <a:p>
+            <a:r>
+              <a:rPr lang="zh-CN" dirty="0"/>
+              <a:t>开场用 3 分钟讲清：这个单元学完能做出什么，最后会被关卡怎么验。</a:t>
+            </a:r>
+          </a:p>
+        </p:txBody>
+      </p:sp>
     </p:spTree>
   </p:cSld>
   <p:clrMapOvr>
@@ -458,6 +538,104 @@
           </a:p>
         </p:txBody>
       </p:sp>
+      <p:sp>
+        <p:nvSpPr>
+          <p:cNvPr id="2" name="讲课提示"/>
+          <p:cNvSpPr txBox="1"/>
+          <p:nvPr/>
+        </p:nvSpPr>
+        <p:spPr>
+          <a:xfrm>
+            <a:off x="457200" y="457200"/>
+            <a:ext cx="6858000" cy="4800600"/>
+          </a:xfrm>
+          <a:prstGeom prst="rect">
+            <a:avLst/>
+          </a:prstGeom>
+        </p:spPr>
+        <p:txBody>
+          <a:bodyPr wrap="square"/>
+          <a:lstStyle/>
+          <a:p>
+            <a:r>
+              <a:rPr lang="zh-CN" dirty="0"/>
+              <a:t>第 69 节 · 重构、错误自查与验收</a:t>
+            </a:r>
+          </a:p>
+          <a:p>
+            <a:r>
+              <a:rPr lang="zh-CN" dirty="0"/>
+              <a:t>单元 12 · Pygame 起步与飞船驾驶 · W15</a:t>
+            </a:r>
+          </a:p>
+          <a:p>
+            <a:r>
+              <a:rPr lang="zh-CN" dirty="0"/>
+              <a:t/>
+            </a:r>
+          </a:p>
+          <a:p>
+            <a:r>
+              <a:rPr lang="zh-CN" dirty="0"/>
+              <a:t>学习目标：把主循环里的逻辑下沉到 `_check_events()` / `_update_screen()`；逐条自查常见错误</a:t>
+            </a:r>
+          </a:p>
+          <a:p>
+            <a:r>
+              <a:rPr lang="zh-CN" dirty="0"/>
+              <a:t/>
+            </a:r>
+          </a:p>
+          <a:p>
+            <a:r>
+              <a:rPr lang="zh-CN" dirty="0"/>
+              <a:t>课堂实操（40 分钟，不看答案）：</a:t>
+            </a:r>
+          </a:p>
+          <a:p>
+            <a:r>
+              <a:rPr lang="zh-CN" dirty="0"/>
+              <a:t>· 把主循环拆成两个方法</a:t>
+            </a:r>
+          </a:p>
+          <a:p>
+            <a:r>
+              <a:rPr lang="zh-CN" dirty="0"/>
+              <a:t>· 逐条演示六、里的每个错误并修复</a:t>
+            </a:r>
+          </a:p>
+          <a:p>
+            <a:r>
+              <a:rPr lang="zh-CN" dirty="0"/>
+              <a:t/>
+            </a:r>
+          </a:p>
+          <a:p>
+            <a:r>
+              <a:rPr lang="zh-CN" dirty="0"/>
+              <a:t>课后作业：</a:t>
+            </a:r>
+          </a:p>
+          <a:p>
+            <a:r>
+              <a:rPr lang="zh-CN" dirty="0"/>
+              <a:t>· ★ 产出：能驾驶、能退出的 alien_invasion 雏形</a:t>
+            </a:r>
+          </a:p>
+          <a:p>
+            <a:r>
+              <a:rPr lang="zh-CN" dirty="0"/>
+              <a:t/>
+            </a:r>
+          </a:p>
+          <a:p>
+            <a:r>
+              <a:rPr lang="zh-CN" dirty="0"/>
+              <a:t>节奏：讲 20 分钟 → 学员自己敲 40 分钟（不看答案）→ 对讲评自查 20 分钟 → 写作业 10 分钟。</a:t>
+            </a:r>
+          </a:p>
+        </p:txBody>
+      </p:sp>
     </p:spTree>
   </p:cSld>
   <p:clrMapOvr>
@@ -551,6 +729,74 @@
           </a:p>
         </p:txBody>
       </p:sp>
+      <p:sp>
+        <p:nvSpPr>
+          <p:cNvPr id="2" name="讲课提示"/>
+          <p:cNvSpPr txBox="1"/>
+          <p:nvPr/>
+        </p:nvSpPr>
+        <p:spPr>
+          <a:xfrm>
+            <a:off x="457200" y="457200"/>
+            <a:ext cx="6858000" cy="4800600"/>
+          </a:xfrm>
+          <a:prstGeom prst="rect">
+            <a:avLst/>
+          </a:prstGeom>
+        </p:spPr>
+        <p:txBody>
+          <a:bodyPr wrap="square"/>
+          <a:lstStyle/>
+          <a:p>
+            <a:r>
+              <a:rPr lang="zh-CN" dirty="0"/>
+              <a:t>第 69 节 · 核心知识点：重构、错误自查与验收</a:t>
+            </a:r>
+          </a:p>
+          <a:p>
+            <a:r>
+              <a:rPr lang="zh-CN" dirty="0"/>
+              <a:t/>
+            </a:r>
+          </a:p>
+          <a:p>
+            <a:r>
+              <a:rPr lang="zh-CN" dirty="0"/>
+              <a:t>讲这一页时：先让学生说出上节课的结论，再逐块讲要点。</a:t>
+            </a:r>
+          </a:p>
+          <a:p>
+            <a:r>
+              <a:rPr lang="zh-CN" dirty="0"/>
+              <a:t>每讲完一块，问一句「这一步如果写错了，报错会长什么样？」——把错误提前讲。</a:t>
+            </a:r>
+          </a:p>
+          <a:p>
+            <a:r>
+              <a:rPr lang="zh-CN" dirty="0"/>
+              <a:t/>
+            </a:r>
+          </a:p>
+          <a:p>
+            <a:r>
+              <a:rPr lang="zh-CN" dirty="0"/>
+              <a:t>本节目标：把主循环里的逻辑下沉到 `_check_events()` / `_update_screen()`；逐条自查常见错误</a:t>
+            </a:r>
+          </a:p>
+          <a:p>
+            <a:r>
+              <a:rPr lang="zh-CN" dirty="0"/>
+              <a:t/>
+            </a:r>
+          </a:p>
+          <a:p>
+            <a:r>
+              <a:rPr lang="zh-CN" dirty="0"/>
+              <a:t>看不到懂的地方，回讲义对应小节读一遍，再回来对着这页复述一次——能讲出来才算真懂。</a:t>
+            </a:r>
+          </a:p>
+        </p:txBody>
+      </p:sp>
     </p:spTree>
   </p:cSld>
   <p:clrMapOvr>
@@ -620,6 +866,50 @@
           </a:p>
         </p:txBody>
       </p:sp>
+      <p:sp>
+        <p:nvSpPr>
+          <p:cNvPr id="2" name="讲课提示"/>
+          <p:cNvSpPr txBox="1"/>
+          <p:nvPr/>
+        </p:nvSpPr>
+        <p:spPr>
+          <a:xfrm>
+            <a:off x="457200" y="457200"/>
+            <a:ext cx="6858000" cy="4800600"/>
+          </a:xfrm>
+          <a:prstGeom prst="rect">
+            <a:avLst/>
+          </a:prstGeom>
+        </p:spPr>
+        <p:txBody>
+          <a:bodyPr wrap="square"/>
+          <a:lstStyle/>
+          <a:p>
+            <a:r>
+              <a:rPr lang="zh-CN" dirty="0"/>
+              <a:t>单元 12 小结 · 单元 12 · 小结</a:t>
+            </a:r>
+          </a:p>
+          <a:p>
+            <a:r>
+              <a:rPr lang="zh-CN" dirty="0"/>
+              <a:t/>
+            </a:r>
+          </a:p>
+          <a:p>
+            <a:r>
+              <a:rPr lang="zh-CN" dirty="0"/>
+              <a:t>收尾动作：让学生合上讲义，口述本单元三个最重要的结论；说不出来的，回对应课节。</a:t>
+            </a:r>
+          </a:p>
+          <a:p>
+            <a:r>
+              <a:rPr lang="zh-CN" dirty="0"/>
+              <a:t>然后当场勾一遍本单元课节的「已完成」，没打勾的进下一单元前补掉。</a:t>
+            </a:r>
+          </a:p>
+        </p:txBody>
+      </p:sp>
     </p:spTree>
   </p:cSld>
   <p:clrMapOvr>
@@ -755,6 +1045,116 @@
           </a:p>
         </p:txBody>
       </p:sp>
+      <p:sp>
+        <p:nvSpPr>
+          <p:cNvPr id="2" name="讲课提示"/>
+          <p:cNvSpPr txBox="1"/>
+          <p:nvPr/>
+        </p:nvSpPr>
+        <p:spPr>
+          <a:xfrm>
+            <a:off x="457200" y="457200"/>
+            <a:ext cx="6858000" cy="4800600"/>
+          </a:xfrm>
+          <a:prstGeom prst="rect">
+            <a:avLst/>
+          </a:prstGeom>
+        </p:spPr>
+        <p:txBody>
+          <a:bodyPr wrap="square"/>
+          <a:lstStyle/>
+          <a:p>
+            <a:r>
+              <a:rPr lang="zh-CN" dirty="0"/>
+              <a:t>第 65 节 · 项目规划与安装 Pygame</a:t>
+            </a:r>
+          </a:p>
+          <a:p>
+            <a:r>
+              <a:rPr lang="zh-CN" dirty="0"/>
+              <a:t>单元 12 · Pygame 起步与飞船驾驶 · W14</a:t>
+            </a:r>
+          </a:p>
+          <a:p>
+            <a:r>
+              <a:rPr lang="zh-CN" dirty="0"/>
+              <a:t/>
+            </a:r>
+          </a:p>
+          <a:p>
+            <a:r>
+              <a:rPr lang="zh-CN" dirty="0"/>
+              <a:t>学习目标：知道为什么一个游戏要拆成三个文件；装好 Pygame 并跑出第一个窗口</a:t>
+            </a:r>
+          </a:p>
+          <a:p>
+            <a:r>
+              <a:rPr lang="zh-CN" dirty="0"/>
+              <a:t/>
+            </a:r>
+          </a:p>
+          <a:p>
+            <a:r>
+              <a:rPr lang="zh-CN" dirty="0"/>
+              <a:t>课堂实操（40 分钟，不看答案）：</a:t>
+            </a:r>
+          </a:p>
+          <a:p>
+            <a:r>
+              <a:rPr lang="zh-CN" dirty="0"/>
+              <a:t>· 跑通 SDL_VIDEODRIVER=dummy 验证环境</a:t>
+            </a:r>
+          </a:p>
+          <a:p>
+            <a:r>
+              <a:rPr lang="zh-CN" dirty="0"/>
+              <a:t>· 画出自己项目的三个文件结构</a:t>
+            </a:r>
+          </a:p>
+          <a:p>
+            <a:r>
+              <a:rPr lang="zh-CN" dirty="0"/>
+              <a:t>· 把 hello_world 改成自己的项目骨架</a:t>
+            </a:r>
+          </a:p>
+          <a:p>
+            <a:r>
+              <a:rPr lang="zh-CN" dirty="0"/>
+              <a:t/>
+            </a:r>
+          </a:p>
+          <a:p>
+            <a:r>
+              <a:rPr lang="zh-CN" dirty="0"/>
+              <a:t>课后作业：</a:t>
+            </a:r>
+          </a:p>
+          <a:p>
+            <a:r>
+              <a:rPr lang="zh-CN" dirty="0"/>
+              <a:t>· 建立 alien_invasion 仓库并首次 commit</a:t>
+            </a:r>
+          </a:p>
+          <a:p>
+            <a:r>
+              <a:rPr lang="zh-CN" dirty="0"/>
+              <a:t>· 产出：能弹出窗口的空项目</a:t>
+            </a:r>
+          </a:p>
+          <a:p>
+            <a:r>
+              <a:rPr lang="zh-CN" dirty="0"/>
+              <a:t/>
+            </a:r>
+          </a:p>
+          <a:p>
+            <a:r>
+              <a:rPr lang="zh-CN" dirty="0"/>
+              <a:t>节奏：讲 20 分钟 → 学员自己敲 40 分钟（不看答案）→ 对讲评自查 20 分钟 → 写作业 10 分钟。</a:t>
+            </a:r>
+          </a:p>
+        </p:txBody>
+      </p:sp>
     </p:spTree>
   </p:cSld>
   <p:clrMapOvr>
@@ -848,6 +1248,74 @@
           </a:p>
         </p:txBody>
       </p:sp>
+      <p:sp>
+        <p:nvSpPr>
+          <p:cNvPr id="2" name="讲课提示"/>
+          <p:cNvSpPr txBox="1"/>
+          <p:nvPr/>
+        </p:nvSpPr>
+        <p:spPr>
+          <a:xfrm>
+            <a:off x="457200" y="457200"/>
+            <a:ext cx="6858000" cy="4800600"/>
+          </a:xfrm>
+          <a:prstGeom prst="rect">
+            <a:avLst/>
+          </a:prstGeom>
+        </p:spPr>
+        <p:txBody>
+          <a:bodyPr wrap="square"/>
+          <a:lstStyle/>
+          <a:p>
+            <a:r>
+              <a:rPr lang="zh-CN" dirty="0"/>
+              <a:t>第 65 节 · 核心知识点：项目规划与安装 Pygame</a:t>
+            </a:r>
+          </a:p>
+          <a:p>
+            <a:r>
+              <a:rPr lang="zh-CN" dirty="0"/>
+              <a:t/>
+            </a:r>
+          </a:p>
+          <a:p>
+            <a:r>
+              <a:rPr lang="zh-CN" dirty="0"/>
+              <a:t>讲这一页时：先让学生说出上节课的结论，再逐块讲要点。</a:t>
+            </a:r>
+          </a:p>
+          <a:p>
+            <a:r>
+              <a:rPr lang="zh-CN" dirty="0"/>
+              <a:t>每讲完一块，问一句「这一步如果写错了，报错会长什么样？」——把错误提前讲。</a:t>
+            </a:r>
+          </a:p>
+          <a:p>
+            <a:r>
+              <a:rPr lang="zh-CN" dirty="0"/>
+              <a:t/>
+            </a:r>
+          </a:p>
+          <a:p>
+            <a:r>
+              <a:rPr lang="zh-CN" dirty="0"/>
+              <a:t>本节目标：知道为什么一个游戏要拆成三个文件；装好 Pygame 并跑出第一个窗口</a:t>
+            </a:r>
+          </a:p>
+          <a:p>
+            <a:r>
+              <a:rPr lang="zh-CN" dirty="0"/>
+              <a:t/>
+            </a:r>
+          </a:p>
+          <a:p>
+            <a:r>
+              <a:rPr lang="zh-CN" dirty="0"/>
+              <a:t>看不到懂的地方，回讲义对应小节读一遍，再回来对着这页复述一次——能讲出来才算真懂。</a:t>
+            </a:r>
+          </a:p>
+        </p:txBody>
+      </p:sp>
     </p:spTree>
   </p:cSld>
   <p:clrMapOvr>
@@ -977,6 +1445,110 @@
           </a:p>
         </p:txBody>
       </p:sp>
+      <p:sp>
+        <p:nvSpPr>
+          <p:cNvPr id="2" name="讲课提示"/>
+          <p:cNvSpPr txBox="1"/>
+          <p:nvPr/>
+        </p:nvSpPr>
+        <p:spPr>
+          <a:xfrm>
+            <a:off x="457200" y="457200"/>
+            <a:ext cx="6858000" cy="4800600"/>
+          </a:xfrm>
+          <a:prstGeom prst="rect">
+            <a:avLst/>
+          </a:prstGeom>
+        </p:spPr>
+        <p:txBody>
+          <a:bodyPr wrap="square"/>
+          <a:lstStyle/>
+          <a:p>
+            <a:r>
+              <a:rPr lang="zh-CN" dirty="0"/>
+              <a:t>第 66 节 · 主循环、帧率与事件驱动</a:t>
+            </a:r>
+          </a:p>
+          <a:p>
+            <a:r>
+              <a:rPr lang="zh-CN" dirty="0"/>
+              <a:t>单元 12 · Pygame 起步与飞船驾驶 · W14</a:t>
+            </a:r>
+          </a:p>
+          <a:p>
+            <a:r>
+              <a:rPr lang="zh-CN" dirty="0"/>
+              <a:t/>
+            </a:r>
+          </a:p>
+          <a:p>
+            <a:r>
+              <a:rPr lang="zh-CN" dirty="0"/>
+              <a:t>学习目标：理解 `while True` 主循环的四步；知道帧率为什么必须锁；看懂事件驱动模型</a:t>
+            </a:r>
+          </a:p>
+          <a:p>
+            <a:r>
+              <a:rPr lang="zh-CN" dirty="0"/>
+              <a:t/>
+            </a:r>
+          </a:p>
+          <a:p>
+            <a:r>
+              <a:rPr lang="zh-CN" dirty="0"/>
+              <a:t>课堂实操（40 分钟，不看答案）：</a:t>
+            </a:r>
+          </a:p>
+          <a:p>
+            <a:r>
+              <a:rPr lang="zh-CN" dirty="0"/>
+              <a:t>· 手画主循环四步并对照代码</a:t>
+            </a:r>
+          </a:p>
+          <a:p>
+            <a:r>
+              <a:rPr lang="zh-CN" dirty="0"/>
+              <a:t>· 把 tick(60) 改成 tick(5)，观察游戏变慢</a:t>
+            </a:r>
+          </a:p>
+          <a:p>
+            <a:r>
+              <a:rPr lang="zh-CN" dirty="0"/>
+              <a:t>· 故意让程序不处理退出事件，试着关不掉窗口</a:t>
+            </a:r>
+          </a:p>
+          <a:p>
+            <a:r>
+              <a:rPr lang="zh-CN" dirty="0"/>
+              <a:t/>
+            </a:r>
+          </a:p>
+          <a:p>
+            <a:r>
+              <a:rPr lang="zh-CN" dirty="0"/>
+              <a:t>课后作业：</a:t>
+            </a:r>
+          </a:p>
+          <a:p>
+            <a:r>
+              <a:rPr lang="zh-CN" dirty="0"/>
+              <a:t>· 产出：一个会响应按键和退出的窗口</a:t>
+            </a:r>
+          </a:p>
+          <a:p>
+            <a:r>
+              <a:rPr lang="zh-CN" dirty="0"/>
+              <a:t/>
+            </a:r>
+          </a:p>
+          <a:p>
+            <a:r>
+              <a:rPr lang="zh-CN" dirty="0"/>
+              <a:t>节奏：讲 20 分钟 → 学员自己敲 40 分钟（不看答案）→ 对讲评自查 20 分钟 → 写作业 10 分钟。</a:t>
+            </a:r>
+          </a:p>
+        </p:txBody>
+      </p:sp>
     </p:spTree>
   </p:cSld>
   <p:clrMapOvr>
@@ -1070,6 +1642,74 @@
           </a:p>
         </p:txBody>
       </p:sp>
+      <p:sp>
+        <p:nvSpPr>
+          <p:cNvPr id="2" name="讲课提示"/>
+          <p:cNvSpPr txBox="1"/>
+          <p:nvPr/>
+        </p:nvSpPr>
+        <p:spPr>
+          <a:xfrm>
+            <a:off x="457200" y="457200"/>
+            <a:ext cx="6858000" cy="4800600"/>
+          </a:xfrm>
+          <a:prstGeom prst="rect">
+            <a:avLst/>
+          </a:prstGeom>
+        </p:spPr>
+        <p:txBody>
+          <a:bodyPr wrap="square"/>
+          <a:lstStyle/>
+          <a:p>
+            <a:r>
+              <a:rPr lang="zh-CN" dirty="0"/>
+              <a:t>第 66 节 · 核心知识点：主循环、帧率与事件驱动</a:t>
+            </a:r>
+          </a:p>
+          <a:p>
+            <a:r>
+              <a:rPr lang="zh-CN" dirty="0"/>
+              <a:t/>
+            </a:r>
+          </a:p>
+          <a:p>
+            <a:r>
+              <a:rPr lang="zh-CN" dirty="0"/>
+              <a:t>讲这一页时：先让学生说出上节课的结论，再逐块讲要点。</a:t>
+            </a:r>
+          </a:p>
+          <a:p>
+            <a:r>
+              <a:rPr lang="zh-CN" dirty="0"/>
+              <a:t>每讲完一块，问一句「这一步如果写错了，报错会长什么样？」——把错误提前讲。</a:t>
+            </a:r>
+          </a:p>
+          <a:p>
+            <a:r>
+              <a:rPr lang="zh-CN" dirty="0"/>
+              <a:t/>
+            </a:r>
+          </a:p>
+          <a:p>
+            <a:r>
+              <a:rPr lang="zh-CN" dirty="0"/>
+              <a:t>本节目标：理解 `while True` 主循环的四步；知道帧率为什么必须锁；看懂事件驱动模型</a:t>
+            </a:r>
+          </a:p>
+          <a:p>
+            <a:r>
+              <a:rPr lang="zh-CN" dirty="0"/>
+              <a:t/>
+            </a:r>
+          </a:p>
+          <a:p>
+            <a:r>
+              <a:rPr lang="zh-CN" dirty="0"/>
+              <a:t>看不到懂的地方，回讲义对应小节读一遍，再回来对着这页复述一次——能讲出来才算真懂。</a:t>
+            </a:r>
+          </a:p>
+        </p:txBody>
+      </p:sp>
     </p:spTree>
   </p:cSld>
   <p:clrMapOvr>
@@ -1199,6 +1839,110 @@
           </a:p>
         </p:txBody>
       </p:sp>
+      <p:sp>
+        <p:nvSpPr>
+          <p:cNvPr id="2" name="讲课提示"/>
+          <p:cNvSpPr txBox="1"/>
+          <p:nvPr/>
+        </p:nvSpPr>
+        <p:spPr>
+          <a:xfrm>
+            <a:off x="457200" y="457200"/>
+            <a:ext cx="6858000" cy="4800600"/>
+          </a:xfrm>
+          <a:prstGeom prst="rect">
+            <a:avLst/>
+          </a:prstGeom>
+        </p:spPr>
+        <p:txBody>
+          <a:bodyPr wrap="square"/>
+          <a:lstStyle/>
+          <a:p>
+            <a:r>
+              <a:rPr lang="zh-CN" dirty="0"/>
+              <a:t>第 67 节 · Settings 类与屏幕矩形</a:t>
+            </a:r>
+          </a:p>
+          <a:p>
+            <a:r>
+              <a:rPr lang="zh-CN" dirty="0"/>
+              <a:t>单元 12 · Pygame 起步与飞船驾驶 · W14</a:t>
+            </a:r>
+          </a:p>
+          <a:p>
+            <a:r>
+              <a:rPr lang="zh-CN" dirty="0"/>
+              <a:t/>
+            </a:r>
+          </a:p>
+          <a:p>
+            <a:r>
+              <a:rPr lang="zh-CN" dirty="0"/>
+              <a:t>学习目标：把所有会变的数值集中到 Settings；理解 screen_rect 的作用</a:t>
+            </a:r>
+          </a:p>
+          <a:p>
+            <a:r>
+              <a:rPr lang="zh-CN" dirty="0"/>
+              <a:t/>
+            </a:r>
+          </a:p>
+          <a:p>
+            <a:r>
+              <a:rPr lang="zh-CN" dirty="0"/>
+              <a:t>课堂实操（40 分钟，不看答案）：</a:t>
+            </a:r>
+          </a:p>
+          <a:p>
+            <a:r>
+              <a:rPr lang="zh-CN" dirty="0"/>
+              <a:t>· 把散落各处的数字全搬进 Settings</a:t>
+            </a:r>
+          </a:p>
+          <a:p>
+            <a:r>
+              <a:rPr lang="zh-CN" dirty="0"/>
+              <a:t>· 打印 screen_rect 四个属性</a:t>
+            </a:r>
+          </a:p>
+          <a:p>
+            <a:r>
+              <a:rPr lang="zh-CN" dirty="0"/>
+              <a:t>· 故意改错屏幕宽高，观察窗口变形</a:t>
+            </a:r>
+          </a:p>
+          <a:p>
+            <a:r>
+              <a:rPr lang="zh-CN" dirty="0"/>
+              <a:t/>
+            </a:r>
+          </a:p>
+          <a:p>
+            <a:r>
+              <a:rPr lang="zh-CN" dirty="0"/>
+              <a:t>课后作业：</a:t>
+            </a:r>
+          </a:p>
+          <a:p>
+            <a:r>
+              <a:rPr lang="zh-CN" dirty="0"/>
+              <a:t>· 产出：settings.py 定稿</a:t>
+            </a:r>
+          </a:p>
+          <a:p>
+            <a:r>
+              <a:rPr lang="zh-CN" dirty="0"/>
+              <a:t/>
+            </a:r>
+          </a:p>
+          <a:p>
+            <a:r>
+              <a:rPr lang="zh-CN" dirty="0"/>
+              <a:t>节奏：讲 20 分钟 → 学员自己敲 40 分钟（不看答案）→ 对讲评自查 20 分钟 → 写作业 10 分钟。</a:t>
+            </a:r>
+          </a:p>
+        </p:txBody>
+      </p:sp>
     </p:spTree>
   </p:cSld>
   <p:clrMapOvr>
@@ -1292,6 +2036,74 @@
           </a:p>
         </p:txBody>
       </p:sp>
+      <p:sp>
+        <p:nvSpPr>
+          <p:cNvPr id="2" name="讲课提示"/>
+          <p:cNvSpPr txBox="1"/>
+          <p:nvPr/>
+        </p:nvSpPr>
+        <p:spPr>
+          <a:xfrm>
+            <a:off x="457200" y="457200"/>
+            <a:ext cx="6858000" cy="4800600"/>
+          </a:xfrm>
+          <a:prstGeom prst="rect">
+            <a:avLst/>
+          </a:prstGeom>
+        </p:spPr>
+        <p:txBody>
+          <a:bodyPr wrap="square"/>
+          <a:lstStyle/>
+          <a:p>
+            <a:r>
+              <a:rPr lang="zh-CN" dirty="0"/>
+              <a:t>第 67 节 · 核心知识点：Settings 类与屏幕矩形</a:t>
+            </a:r>
+          </a:p>
+          <a:p>
+            <a:r>
+              <a:rPr lang="zh-CN" dirty="0"/>
+              <a:t/>
+            </a:r>
+          </a:p>
+          <a:p>
+            <a:r>
+              <a:rPr lang="zh-CN" dirty="0"/>
+              <a:t>讲这一页时：先让学生说出上节课的结论，再逐块讲要点。</a:t>
+            </a:r>
+          </a:p>
+          <a:p>
+            <a:r>
+              <a:rPr lang="zh-CN" dirty="0"/>
+              <a:t>每讲完一块，问一句「这一步如果写错了，报错会长什么样？」——把错误提前讲。</a:t>
+            </a:r>
+          </a:p>
+          <a:p>
+            <a:r>
+              <a:rPr lang="zh-CN" dirty="0"/>
+              <a:t/>
+            </a:r>
+          </a:p>
+          <a:p>
+            <a:r>
+              <a:rPr lang="zh-CN" dirty="0"/>
+              <a:t>本节目标：把所有会变的数值集中到 Settings；理解 screen_rect 的作用</a:t>
+            </a:r>
+          </a:p>
+          <a:p>
+            <a:r>
+              <a:rPr lang="zh-CN" dirty="0"/>
+              <a:t/>
+            </a:r>
+          </a:p>
+          <a:p>
+            <a:r>
+              <a:rPr lang="zh-CN" dirty="0"/>
+              <a:t>看不到懂的地方，回讲义对应小节读一遍，再回来对着这页复述一次——能讲出来才算真懂。</a:t>
+            </a:r>
+          </a:p>
+        </p:txBody>
+      </p:sp>
     </p:spTree>
   </p:cSld>
   <p:clrMapOvr>
@@ -1421,6 +2233,110 @@
           </a:p>
         </p:txBody>
       </p:sp>
+      <p:sp>
+        <p:nvSpPr>
+          <p:cNvPr id="2" name="讲课提示"/>
+          <p:cNvSpPr txBox="1"/>
+          <p:nvPr/>
+        </p:nvSpPr>
+        <p:spPr>
+          <a:xfrm>
+            <a:off x="457200" y="457200"/>
+            <a:ext cx="6858000" cy="4800600"/>
+          </a:xfrm>
+          <a:prstGeom prst="rect">
+            <a:avLst/>
+          </a:prstGeom>
+        </p:spPr>
+        <p:txBody>
+          <a:bodyPr wrap="square"/>
+          <a:lstStyle/>
+          <a:p>
+            <a:r>
+              <a:rPr lang="zh-CN" dirty="0"/>
+              <a:t>第 68 节 · 驾驶飞船：标志位与边界</a:t>
+            </a:r>
+          </a:p>
+          <a:p>
+            <a:r>
+              <a:rPr lang="zh-CN" dirty="0"/>
+              <a:t>单元 12 · Pygame 起步与飞船驾驶 · W14–W15</a:t>
+            </a:r>
+          </a:p>
+          <a:p>
+            <a:r>
+              <a:rPr lang="zh-CN" dirty="0"/>
+              <a:t/>
+            </a:r>
+          </a:p>
+          <a:p>
+            <a:r>
+              <a:rPr lang="zh-CN" dirty="0"/>
+              <a:t>学习目标：用 moving_right 标志位实现持续移动；用 screen_rect 限制活动范围</a:t>
+            </a:r>
+          </a:p>
+          <a:p>
+            <a:r>
+              <a:rPr lang="zh-CN" dirty="0"/>
+              <a:t/>
+            </a:r>
+          </a:p>
+          <a:p>
+            <a:r>
+              <a:rPr lang="zh-CN" dirty="0"/>
+              <a:t>课堂实操（40 分钟，不看答案）：</a:t>
+            </a:r>
+          </a:p>
+          <a:p>
+            <a:r>
+              <a:rPr lang="zh-CN" dirty="0"/>
+              <a:t>· 现场实现左右移动（不许看答案）</a:t>
+            </a:r>
+          </a:p>
+          <a:p>
+            <a:r>
+              <a:rPr lang="zh-CN" dirty="0"/>
+              <a:t>· 故意删掉边界判断，看飞船飞出屏幕</a:t>
+            </a:r>
+          </a:p>
+          <a:p>
+            <a:r>
+              <a:rPr lang="zh-CN" dirty="0"/>
+              <a:t>· 把飞船速度改成 3，观察手感变化</a:t>
+            </a:r>
+          </a:p>
+          <a:p>
+            <a:r>
+              <a:rPr lang="zh-CN" dirty="0"/>
+              <a:t/>
+            </a:r>
+          </a:p>
+          <a:p>
+            <a:r>
+              <a:rPr lang="zh-CN" dirty="0"/>
+              <a:t>课后作业：</a:t>
+            </a:r>
+          </a:p>
+          <a:p>
+            <a:r>
+              <a:rPr lang="zh-CN" dirty="0"/>
+              <a:t>· 完成教材 12.6 全部动手练</a:t>
+            </a:r>
+          </a:p>
+          <a:p>
+            <a:r>
+              <a:rPr lang="zh-CN" dirty="0"/>
+              <a:t/>
+            </a:r>
+          </a:p>
+          <a:p>
+            <a:r>
+              <a:rPr lang="zh-CN" dirty="0"/>
+              <a:t>节奏：讲 20 分钟 → 学员自己敲 40 分钟（不看答案）→ 对讲评自查 20 分钟 → 写作业 10 分钟。</a:t>
+            </a:r>
+          </a:p>
+        </p:txBody>
+      </p:sp>
     </p:spTree>
   </p:cSld>
   <p:clrMapOvr>
@@ -1446,6 +2362,74 @@
           <a:chExt cx="0" cy="0"/>
         </a:xfrm>
       </p:grpSpPr>
+      <p:sp>
+        <p:nvSpPr>
+          <p:cNvPr id="2" name="讲课提示"/>
+          <p:cNvSpPr txBox="1"/>
+          <p:nvPr/>
+        </p:nvSpPr>
+        <p:spPr>
+          <a:xfrm>
+            <a:off x="457200" y="457200"/>
+            <a:ext cx="6858000" cy="4800600"/>
+          </a:xfrm>
+          <a:prstGeom prst="rect">
+            <a:avLst/>
+          </a:prstGeom>
+        </p:spPr>
+        <p:txBody>
+          <a:bodyPr wrap="square"/>
+          <a:lstStyle/>
+          <a:p>
+            <a:r>
+              <a:rPr lang="zh-CN" dirty="0"/>
+              <a:t>第 68 节 · 核心知识点：驾驶飞船：标志位与边界</a:t>
+            </a:r>
+          </a:p>
+          <a:p>
+            <a:r>
+              <a:rPr lang="zh-CN" dirty="0"/>
+              <a:t/>
+            </a:r>
+          </a:p>
+          <a:p>
+            <a:r>
+              <a:rPr lang="zh-CN" dirty="0"/>
+              <a:t>讲这一页时：先让学生说出上节课的结论，再逐块讲要点。</a:t>
+            </a:r>
+          </a:p>
+          <a:p>
+            <a:r>
+              <a:rPr lang="zh-CN" dirty="0"/>
+              <a:t>每讲完一块，问一句「这一步如果写错了，报错会长什么样？」——把错误提前讲。</a:t>
+            </a:r>
+          </a:p>
+          <a:p>
+            <a:r>
+              <a:rPr lang="zh-CN" dirty="0"/>
+              <a:t/>
+            </a:r>
+          </a:p>
+          <a:p>
+            <a:r>
+              <a:rPr lang="zh-CN" dirty="0"/>
+              <a:t>本节目标：用 moving_right 标志位实现持续移动；用 screen_rect 限制活动范围</a:t>
+            </a:r>
+          </a:p>
+          <a:p>
+            <a:r>
+              <a:rPr lang="zh-CN" dirty="0"/>
+              <a:t/>
+            </a:r>
+          </a:p>
+          <a:p>
+            <a:r>
+              <a:rPr lang="zh-CN" dirty="0"/>
+              <a:t>看不到懂的地方，回讲义对应小节读一遍，再回来对着这页复述一次——能讲出来才算真懂。</a:t>
+            </a:r>
+          </a:p>
+        </p:txBody>
+      </p:sp>
       <p:sp>
         <p:nvSpPr>
           <p:cNvPr id="2" name="讲课提示"/>

--- a/python-course-ppt/逐节课件/Python讲授课件-单元12.pptx
+++ b/python-course-ppt/逐节课件/Python讲授课件-单元12.pptx
@@ -238,2274 +238,6 @@
 </p:notesMaster>
 </file>
 
-<file path=ppt/notesSlides/notesSlide1.xml><?xml version="1.0" encoding="utf-8"?>
-<p:notes xmlns:a="http://schemas.openxmlformats.org/drawingml/2006/main" xmlns:p="http://schemas.openxmlformats.org/presentationml/2006/main" xmlns:r="http://schemas.openxmlformats.org/officeDocument/2006/relationships">
-  <p:cSld>
-    <p:spTree>
-      <p:nvGrpSpPr>
-        <p:cNvPr id="1" name=""/>
-        <p:cNvGrpSpPr/>
-        <p:nvPr/>
-      </p:nvGrpSpPr>
-      <p:grpSpPr>
-        <a:xfrm>
-          <a:off x="0" y="0"/>
-          <a:ext cx="0" cy="0"/>
-          <a:chOff x="0" y="0"/>
-          <a:chExt cx="0" cy="0"/>
-        </a:xfrm>
-      </p:grpSpPr>
-      <p:sp>
-        <p:nvSpPr>
-          <p:cNvPr id="2" name="讲课提示"/>
-          <p:cNvSpPr txBox="1"/>
-          <p:nvPr/>
-        </p:nvSpPr>
-        <p:spPr>
-          <a:xfrm>
-            <a:off x="457200" y="457200"/>
-            <a:ext cx="6858000" cy="4800600"/>
-          </a:xfrm>
-          <a:prstGeom prst="rect">
-            <a:avLst/>
-          </a:prstGeom>
-        </p:spPr>
-        <p:txBody>
-          <a:bodyPr wrap="square"/>
-          <a:lstStyle/>
-          <a:p>
-            <a:r>
-              <a:rPr lang="zh-CN" dirty="0"/>
-              <a:t>单元 12 · 单元 12 · Pygame 起步与飞船驾驶</a:t>
-            </a:r>
-          </a:p>
-          <a:p>
-            <a:r>
-              <a:rPr lang="zh-CN" dirty="0"/>
-              <a:t/>
-            </a:r>
-          </a:p>
-          <a:p>
-            <a:r>
-              <a:rPr lang="zh-CN" dirty="0"/>
-              <a:t>本单元包含以下课节：</a:t>
-            </a:r>
-          </a:p>
-          <a:p>
-            <a:r>
-              <a:rPr lang="zh-CN" dirty="0"/>
-              <a:t>· 第 65 节 项目规划与安装 Pygame</a:t>
-            </a:r>
-          </a:p>
-          <a:p>
-            <a:r>
-              <a:rPr lang="zh-CN" dirty="0"/>
-              <a:t>· 第 66 节 主循环、帧率与事件驱动</a:t>
-            </a:r>
-          </a:p>
-          <a:p>
-            <a:r>
-              <a:rPr lang="zh-CN" dirty="0"/>
-              <a:t>· 第 67 节 Settings 类与屏幕矩形</a:t>
-            </a:r>
-          </a:p>
-          <a:p>
-            <a:r>
-              <a:rPr lang="zh-CN" dirty="0"/>
-              <a:t>· 第 68 节 驾驶飞船：标志位与边界</a:t>
-            </a:r>
-          </a:p>
-          <a:p>
-            <a:r>
-              <a:rPr lang="zh-CN" dirty="0"/>
-              <a:t>· 第 69 节 重构、错误自查与验收</a:t>
-            </a:r>
-          </a:p>
-          <a:p>
-            <a:r>
-              <a:rPr lang="zh-CN" dirty="0"/>
-              <a:t/>
-            </a:r>
-          </a:p>
-          <a:p>
-            <a:r>
-              <a:rPr lang="zh-CN" dirty="0"/>
-              <a:t>开场用 3 分钟讲清：这个单元学完能做出什么，最后会被关卡怎么验。</a:t>
-            </a:r>
-          </a:p>
-        </p:txBody>
-      </p:sp>
-      <p:sp>
-        <p:nvSpPr>
-          <p:cNvPr id="2" name="讲课提示"/>
-          <p:cNvSpPr txBox="1"/>
-          <p:nvPr/>
-        </p:nvSpPr>
-        <p:spPr>
-          <a:xfrm>
-            <a:off x="457200" y="457200"/>
-            <a:ext cx="6858000" cy="4800600"/>
-          </a:xfrm>
-          <a:prstGeom prst="rect">
-            <a:avLst/>
-          </a:prstGeom>
-        </p:spPr>
-        <p:txBody>
-          <a:bodyPr wrap="square"/>
-          <a:lstStyle/>
-          <a:p>
-            <a:r>
-              <a:rPr lang="zh-CN" dirty="0"/>
-              <a:t>单元 12 · 单元 12 · Pygame 起步与飞船驾驶</a:t>
-            </a:r>
-          </a:p>
-          <a:p>
-            <a:r>
-              <a:rPr lang="zh-CN" dirty="0"/>
-              <a:t/>
-            </a:r>
-          </a:p>
-          <a:p>
-            <a:r>
-              <a:rPr lang="zh-CN" dirty="0"/>
-              <a:t>本单元包含以下课节：</a:t>
-            </a:r>
-          </a:p>
-          <a:p>
-            <a:r>
-              <a:rPr lang="zh-CN" dirty="0"/>
-              <a:t>· 第 65 节 项目规划与安装 Pygame</a:t>
-            </a:r>
-          </a:p>
-          <a:p>
-            <a:r>
-              <a:rPr lang="zh-CN" dirty="0"/>
-              <a:t>· 第 66 节 主循环、帧率与事件驱动</a:t>
-            </a:r>
-          </a:p>
-          <a:p>
-            <a:r>
-              <a:rPr lang="zh-CN" dirty="0"/>
-              <a:t>· 第 67 节 Settings 类与屏幕矩形</a:t>
-            </a:r>
-          </a:p>
-          <a:p>
-            <a:r>
-              <a:rPr lang="zh-CN" dirty="0"/>
-              <a:t>· 第 68 节 驾驶飞船：标志位与边界</a:t>
-            </a:r>
-          </a:p>
-          <a:p>
-            <a:r>
-              <a:rPr lang="zh-CN" dirty="0"/>
-              <a:t>· 第 69 节 重构、错误自查与验收</a:t>
-            </a:r>
-          </a:p>
-          <a:p>
-            <a:r>
-              <a:rPr lang="zh-CN" dirty="0"/>
-              <a:t/>
-            </a:r>
-          </a:p>
-          <a:p>
-            <a:r>
-              <a:rPr lang="zh-CN" dirty="0"/>
-              <a:t>开场用 3 分钟讲清：这个单元学完能做出什么，最后会被关卡怎么验。</a:t>
-            </a:r>
-          </a:p>
-        </p:txBody>
-      </p:sp>
-    </p:spTree>
-  </p:cSld>
-  <p:clrMapOvr>
-    <a:masterClrMapping/>
-  </p:clrMapOvr>
-</p:notes>
-</file>
-
-<file path=ppt/notesSlides/notesSlide10.xml><?xml version="1.0" encoding="utf-8"?>
-<p:notes xmlns:a="http://schemas.openxmlformats.org/drawingml/2006/main" xmlns:p="http://schemas.openxmlformats.org/presentationml/2006/main" xmlns:r="http://schemas.openxmlformats.org/officeDocument/2006/relationships">
-  <p:cSld>
-    <p:spTree>
-      <p:nvGrpSpPr>
-        <p:cNvPr id="1" name=""/>
-        <p:cNvGrpSpPr/>
-        <p:nvPr/>
-      </p:nvGrpSpPr>
-      <p:grpSpPr>
-        <a:xfrm>
-          <a:off x="0" y="0"/>
-          <a:ext cx="0" cy="0"/>
-          <a:chOff x="0" y="0"/>
-          <a:chExt cx="0" cy="0"/>
-        </a:xfrm>
-      </p:grpSpPr>
-      <p:sp>
-        <p:nvSpPr>
-          <p:cNvPr id="2" name="讲课提示"/>
-          <p:cNvSpPr txBox="1"/>
-          <p:nvPr/>
-        </p:nvSpPr>
-        <p:spPr>
-          <a:xfrm>
-            <a:off x="457200" y="457200"/>
-            <a:ext cx="6858000" cy="4800600"/>
-          </a:xfrm>
-          <a:prstGeom prst="rect">
-            <a:avLst/>
-          </a:prstGeom>
-        </p:spPr>
-        <p:txBody>
-          <a:bodyPr wrap="square"/>
-          <a:lstStyle/>
-          <a:p>
-            <a:r>
-              <a:rPr lang="zh-CN" dirty="0"/>
-              <a:t>第 69 节 · 重构、错误自查与验收</a:t>
-            </a:r>
-          </a:p>
-          <a:p>
-            <a:r>
-              <a:rPr lang="zh-CN" dirty="0"/>
-              <a:t>单元 12 · Pygame 起步与飞船驾驶 · W15</a:t>
-            </a:r>
-          </a:p>
-          <a:p>
-            <a:r>
-              <a:rPr lang="zh-CN" dirty="0"/>
-              <a:t/>
-            </a:r>
-          </a:p>
-          <a:p>
-            <a:r>
-              <a:rPr lang="zh-CN" dirty="0"/>
-              <a:t>学习目标：把主循环里的逻辑下沉到 `_check_events()` / `_update_screen()`；逐条自查常见错误</a:t>
-            </a:r>
-          </a:p>
-          <a:p>
-            <a:r>
-              <a:rPr lang="zh-CN" dirty="0"/>
-              <a:t/>
-            </a:r>
-          </a:p>
-          <a:p>
-            <a:r>
-              <a:rPr lang="zh-CN" dirty="0"/>
-              <a:t>课堂实操（40 分钟，不看答案）：</a:t>
-            </a:r>
-          </a:p>
-          <a:p>
-            <a:r>
-              <a:rPr lang="zh-CN" dirty="0"/>
-              <a:t>· 把主循环拆成两个方法</a:t>
-            </a:r>
-          </a:p>
-          <a:p>
-            <a:r>
-              <a:rPr lang="zh-CN" dirty="0"/>
-              <a:t>· 逐条演示六、里的每个错误并修复</a:t>
-            </a:r>
-          </a:p>
-          <a:p>
-            <a:r>
-              <a:rPr lang="zh-CN" dirty="0"/>
-              <a:t/>
-            </a:r>
-          </a:p>
-          <a:p>
-            <a:r>
-              <a:rPr lang="zh-CN" dirty="0"/>
-              <a:t>课后作业：</a:t>
-            </a:r>
-          </a:p>
-          <a:p>
-            <a:r>
-              <a:rPr lang="zh-CN" dirty="0"/>
-              <a:t>· ★ 产出：能驾驶、能退出的 alien_invasion 雏形</a:t>
-            </a:r>
-          </a:p>
-          <a:p>
-            <a:r>
-              <a:rPr lang="zh-CN" dirty="0"/>
-              <a:t/>
-            </a:r>
-          </a:p>
-          <a:p>
-            <a:r>
-              <a:rPr lang="zh-CN" dirty="0"/>
-              <a:t>节奏：讲 20 分钟 → 学员自己敲 40 分钟（不看答案）→ 对讲评自查 20 分钟 → 写作业 10 分钟。</a:t>
-            </a:r>
-          </a:p>
-        </p:txBody>
-      </p:sp>
-      <p:sp>
-        <p:nvSpPr>
-          <p:cNvPr id="2" name="讲课提示"/>
-          <p:cNvSpPr txBox="1"/>
-          <p:nvPr/>
-        </p:nvSpPr>
-        <p:spPr>
-          <a:xfrm>
-            <a:off x="457200" y="457200"/>
-            <a:ext cx="6858000" cy="4800600"/>
-          </a:xfrm>
-          <a:prstGeom prst="rect">
-            <a:avLst/>
-          </a:prstGeom>
-        </p:spPr>
-        <p:txBody>
-          <a:bodyPr wrap="square"/>
-          <a:lstStyle/>
-          <a:p>
-            <a:r>
-              <a:rPr lang="zh-CN" dirty="0"/>
-              <a:t>第 69 节 · 重构、错误自查与验收</a:t>
-            </a:r>
-          </a:p>
-          <a:p>
-            <a:r>
-              <a:rPr lang="zh-CN" dirty="0"/>
-              <a:t>单元 12 · Pygame 起步与飞船驾驶 · W15</a:t>
-            </a:r>
-          </a:p>
-          <a:p>
-            <a:r>
-              <a:rPr lang="zh-CN" dirty="0"/>
-              <a:t/>
-            </a:r>
-          </a:p>
-          <a:p>
-            <a:r>
-              <a:rPr lang="zh-CN" dirty="0"/>
-              <a:t>学习目标：把主循环里的逻辑下沉到 `_check_events()` / `_update_screen()`；逐条自查常见错误</a:t>
-            </a:r>
-          </a:p>
-          <a:p>
-            <a:r>
-              <a:rPr lang="zh-CN" dirty="0"/>
-              <a:t/>
-            </a:r>
-          </a:p>
-          <a:p>
-            <a:r>
-              <a:rPr lang="zh-CN" dirty="0"/>
-              <a:t>课堂实操（40 分钟，不看答案）：</a:t>
-            </a:r>
-          </a:p>
-          <a:p>
-            <a:r>
-              <a:rPr lang="zh-CN" dirty="0"/>
-              <a:t>· 把主循环拆成两个方法</a:t>
-            </a:r>
-          </a:p>
-          <a:p>
-            <a:r>
-              <a:rPr lang="zh-CN" dirty="0"/>
-              <a:t>· 逐条演示六、里的每个错误并修复</a:t>
-            </a:r>
-          </a:p>
-          <a:p>
-            <a:r>
-              <a:rPr lang="zh-CN" dirty="0"/>
-              <a:t/>
-            </a:r>
-          </a:p>
-          <a:p>
-            <a:r>
-              <a:rPr lang="zh-CN" dirty="0"/>
-              <a:t>课后作业：</a:t>
-            </a:r>
-          </a:p>
-          <a:p>
-            <a:r>
-              <a:rPr lang="zh-CN" dirty="0"/>
-              <a:t>· ★ 产出：能驾驶、能退出的 alien_invasion 雏形</a:t>
-            </a:r>
-          </a:p>
-          <a:p>
-            <a:r>
-              <a:rPr lang="zh-CN" dirty="0"/>
-              <a:t/>
-            </a:r>
-          </a:p>
-          <a:p>
-            <a:r>
-              <a:rPr lang="zh-CN" dirty="0"/>
-              <a:t>节奏：讲 20 分钟 → 学员自己敲 40 分钟（不看答案）→ 对讲评自查 20 分钟 → 写作业 10 分钟。</a:t>
-            </a:r>
-          </a:p>
-        </p:txBody>
-      </p:sp>
-    </p:spTree>
-  </p:cSld>
-  <p:clrMapOvr>
-    <a:masterClrMapping/>
-  </p:clrMapOvr>
-</p:notes>
-</file>
-
-<file path=ppt/notesSlides/notesSlide11.xml><?xml version="1.0" encoding="utf-8"?>
-<p:notes xmlns:a="http://schemas.openxmlformats.org/drawingml/2006/main" xmlns:p="http://schemas.openxmlformats.org/presentationml/2006/main" xmlns:r="http://schemas.openxmlformats.org/officeDocument/2006/relationships">
-  <p:cSld>
-    <p:spTree>
-      <p:nvGrpSpPr>
-        <p:cNvPr id="1" name=""/>
-        <p:cNvGrpSpPr/>
-        <p:nvPr/>
-      </p:nvGrpSpPr>
-      <p:grpSpPr>
-        <a:xfrm>
-          <a:off x="0" y="0"/>
-          <a:ext cx="0" cy="0"/>
-          <a:chOff x="0" y="0"/>
-          <a:chExt cx="0" cy="0"/>
-        </a:xfrm>
-      </p:grpSpPr>
-      <p:sp>
-        <p:nvSpPr>
-          <p:cNvPr id="2" name="讲课提示"/>
-          <p:cNvSpPr txBox="1"/>
-          <p:nvPr/>
-        </p:nvSpPr>
-        <p:spPr>
-          <a:xfrm>
-            <a:off x="457200" y="457200"/>
-            <a:ext cx="6858000" cy="4800600"/>
-          </a:xfrm>
-          <a:prstGeom prst="rect">
-            <a:avLst/>
-          </a:prstGeom>
-        </p:spPr>
-        <p:txBody>
-          <a:bodyPr wrap="square"/>
-          <a:lstStyle/>
-          <a:p>
-            <a:r>
-              <a:rPr lang="zh-CN" dirty="0"/>
-              <a:t>第 69 节 · 核心知识点：重构、错误自查与验收</a:t>
-            </a:r>
-          </a:p>
-          <a:p>
-            <a:r>
-              <a:rPr lang="zh-CN" dirty="0"/>
-              <a:t/>
-            </a:r>
-          </a:p>
-          <a:p>
-            <a:r>
-              <a:rPr lang="zh-CN" dirty="0"/>
-              <a:t>讲这一页时：先让学生说出上节课的结论，再逐块讲要点。</a:t>
-            </a:r>
-          </a:p>
-          <a:p>
-            <a:r>
-              <a:rPr lang="zh-CN" dirty="0"/>
-              <a:t>每讲完一块，问一句「这一步如果写错了，报错会长什么样？」——把错误提前讲。</a:t>
-            </a:r>
-          </a:p>
-          <a:p>
-            <a:r>
-              <a:rPr lang="zh-CN" dirty="0"/>
-              <a:t/>
-            </a:r>
-          </a:p>
-          <a:p>
-            <a:r>
-              <a:rPr lang="zh-CN" dirty="0"/>
-              <a:t>本节目标：把主循环里的逻辑下沉到 `_check_events()` / `_update_screen()`；逐条自查常见错误</a:t>
-            </a:r>
-          </a:p>
-          <a:p>
-            <a:r>
-              <a:rPr lang="zh-CN" dirty="0"/>
-              <a:t/>
-            </a:r>
-          </a:p>
-          <a:p>
-            <a:r>
-              <a:rPr lang="zh-CN" dirty="0"/>
-              <a:t>看不到懂的地方，回讲义对应小节读一遍，再回来对着这页复述一次——能讲出来才算真懂。</a:t>
-            </a:r>
-          </a:p>
-        </p:txBody>
-      </p:sp>
-      <p:sp>
-        <p:nvSpPr>
-          <p:cNvPr id="2" name="讲课提示"/>
-          <p:cNvSpPr txBox="1"/>
-          <p:nvPr/>
-        </p:nvSpPr>
-        <p:spPr>
-          <a:xfrm>
-            <a:off x="457200" y="457200"/>
-            <a:ext cx="6858000" cy="4800600"/>
-          </a:xfrm>
-          <a:prstGeom prst="rect">
-            <a:avLst/>
-          </a:prstGeom>
-        </p:spPr>
-        <p:txBody>
-          <a:bodyPr wrap="square"/>
-          <a:lstStyle/>
-          <a:p>
-            <a:r>
-              <a:rPr lang="zh-CN" dirty="0"/>
-              <a:t>第 69 节 · 核心知识点：重构、错误自查与验收</a:t>
-            </a:r>
-          </a:p>
-          <a:p>
-            <a:r>
-              <a:rPr lang="zh-CN" dirty="0"/>
-              <a:t/>
-            </a:r>
-          </a:p>
-          <a:p>
-            <a:r>
-              <a:rPr lang="zh-CN" dirty="0"/>
-              <a:t>讲这一页时：先让学生说出上节课的结论，再逐块讲要点。</a:t>
-            </a:r>
-          </a:p>
-          <a:p>
-            <a:r>
-              <a:rPr lang="zh-CN" dirty="0"/>
-              <a:t>每讲完一块，问一句「这一步如果写错了，报错会长什么样？」——把错误提前讲。</a:t>
-            </a:r>
-          </a:p>
-          <a:p>
-            <a:r>
-              <a:rPr lang="zh-CN" dirty="0"/>
-              <a:t/>
-            </a:r>
-          </a:p>
-          <a:p>
-            <a:r>
-              <a:rPr lang="zh-CN" dirty="0"/>
-              <a:t>本节目标：把主循环里的逻辑下沉到 `_check_events()` / `_update_screen()`；逐条自查常见错误</a:t>
-            </a:r>
-          </a:p>
-          <a:p>
-            <a:r>
-              <a:rPr lang="zh-CN" dirty="0"/>
-              <a:t/>
-            </a:r>
-          </a:p>
-          <a:p>
-            <a:r>
-              <a:rPr lang="zh-CN" dirty="0"/>
-              <a:t>看不到懂的地方，回讲义对应小节读一遍，再回来对着这页复述一次——能讲出来才算真懂。</a:t>
-            </a:r>
-          </a:p>
-        </p:txBody>
-      </p:sp>
-    </p:spTree>
-  </p:cSld>
-  <p:clrMapOvr>
-    <a:masterClrMapping/>
-  </p:clrMapOvr>
-</p:notes>
-</file>
-
-<file path=ppt/notesSlides/notesSlide12.xml><?xml version="1.0" encoding="utf-8"?>
-<p:notes xmlns:a="http://schemas.openxmlformats.org/drawingml/2006/main" xmlns:p="http://schemas.openxmlformats.org/presentationml/2006/main" xmlns:r="http://schemas.openxmlformats.org/officeDocument/2006/relationships">
-  <p:cSld>
-    <p:spTree>
-      <p:nvGrpSpPr>
-        <p:cNvPr id="1" name=""/>
-        <p:cNvGrpSpPr/>
-        <p:nvPr/>
-      </p:nvGrpSpPr>
-      <p:grpSpPr>
-        <a:xfrm>
-          <a:off x="0" y="0"/>
-          <a:ext cx="0" cy="0"/>
-          <a:chOff x="0" y="0"/>
-          <a:chExt cx="0" cy="0"/>
-        </a:xfrm>
-      </p:grpSpPr>
-      <p:sp>
-        <p:nvSpPr>
-          <p:cNvPr id="2" name="讲课提示"/>
-          <p:cNvSpPr txBox="1"/>
-          <p:nvPr/>
-        </p:nvSpPr>
-        <p:spPr>
-          <a:xfrm>
-            <a:off x="457200" y="457200"/>
-            <a:ext cx="6858000" cy="4800600"/>
-          </a:xfrm>
-          <a:prstGeom prst="rect">
-            <a:avLst/>
-          </a:prstGeom>
-        </p:spPr>
-        <p:txBody>
-          <a:bodyPr wrap="square"/>
-          <a:lstStyle/>
-          <a:p>
-            <a:r>
-              <a:rPr lang="zh-CN" dirty="0"/>
-              <a:t>单元 12 小结 · 单元 12 · 小结</a:t>
-            </a:r>
-          </a:p>
-          <a:p>
-            <a:r>
-              <a:rPr lang="zh-CN" dirty="0"/>
-              <a:t/>
-            </a:r>
-          </a:p>
-          <a:p>
-            <a:r>
-              <a:rPr lang="zh-CN" dirty="0"/>
-              <a:t>收尾动作：让学生合上讲义，口述本单元三个最重要的结论；说不出来的，回对应课节。</a:t>
-            </a:r>
-          </a:p>
-          <a:p>
-            <a:r>
-              <a:rPr lang="zh-CN" dirty="0"/>
-              <a:t>然后当场勾一遍本单元课节的「已完成」，没打勾的进下一单元前补掉。</a:t>
-            </a:r>
-          </a:p>
-        </p:txBody>
-      </p:sp>
-      <p:sp>
-        <p:nvSpPr>
-          <p:cNvPr id="2" name="讲课提示"/>
-          <p:cNvSpPr txBox="1"/>
-          <p:nvPr/>
-        </p:nvSpPr>
-        <p:spPr>
-          <a:xfrm>
-            <a:off x="457200" y="457200"/>
-            <a:ext cx="6858000" cy="4800600"/>
-          </a:xfrm>
-          <a:prstGeom prst="rect">
-            <a:avLst/>
-          </a:prstGeom>
-        </p:spPr>
-        <p:txBody>
-          <a:bodyPr wrap="square"/>
-          <a:lstStyle/>
-          <a:p>
-            <a:r>
-              <a:rPr lang="zh-CN" dirty="0"/>
-              <a:t>单元 12 小结 · 单元 12 · 小结</a:t>
-            </a:r>
-          </a:p>
-          <a:p>
-            <a:r>
-              <a:rPr lang="zh-CN" dirty="0"/>
-              <a:t/>
-            </a:r>
-          </a:p>
-          <a:p>
-            <a:r>
-              <a:rPr lang="zh-CN" dirty="0"/>
-              <a:t>收尾动作：让学生合上讲义，口述本单元三个最重要的结论；说不出来的，回对应课节。</a:t>
-            </a:r>
-          </a:p>
-          <a:p>
-            <a:r>
-              <a:rPr lang="zh-CN" dirty="0"/>
-              <a:t>然后当场勾一遍本单元课节的「已完成」，没打勾的进下一单元前补掉。</a:t>
-            </a:r>
-          </a:p>
-        </p:txBody>
-      </p:sp>
-    </p:spTree>
-  </p:cSld>
-  <p:clrMapOvr>
-    <a:masterClrMapping/>
-  </p:clrMapOvr>
-</p:notes>
-</file>
-
-<file path=ppt/notesSlides/notesSlide2.xml><?xml version="1.0" encoding="utf-8"?>
-<p:notes xmlns:a="http://schemas.openxmlformats.org/drawingml/2006/main" xmlns:p="http://schemas.openxmlformats.org/presentationml/2006/main" xmlns:r="http://schemas.openxmlformats.org/officeDocument/2006/relationships">
-  <p:cSld>
-    <p:spTree>
-      <p:nvGrpSpPr>
-        <p:cNvPr id="1" name=""/>
-        <p:cNvGrpSpPr/>
-        <p:nvPr/>
-      </p:nvGrpSpPr>
-      <p:grpSpPr>
-        <a:xfrm>
-          <a:off x="0" y="0"/>
-          <a:ext cx="0" cy="0"/>
-          <a:chOff x="0" y="0"/>
-          <a:chExt cx="0" cy="0"/>
-        </a:xfrm>
-      </p:grpSpPr>
-      <p:sp>
-        <p:nvSpPr>
-          <p:cNvPr id="2" name="讲课提示"/>
-          <p:cNvSpPr txBox="1"/>
-          <p:nvPr/>
-        </p:nvSpPr>
-        <p:spPr>
-          <a:xfrm>
-            <a:off x="457200" y="457200"/>
-            <a:ext cx="6858000" cy="4800600"/>
-          </a:xfrm>
-          <a:prstGeom prst="rect">
-            <a:avLst/>
-          </a:prstGeom>
-        </p:spPr>
-        <p:txBody>
-          <a:bodyPr wrap="square"/>
-          <a:lstStyle/>
-          <a:p>
-            <a:r>
-              <a:rPr lang="zh-CN" dirty="0"/>
-              <a:t>第 65 节 · 项目规划与安装 Pygame</a:t>
-            </a:r>
-          </a:p>
-          <a:p>
-            <a:r>
-              <a:rPr lang="zh-CN" dirty="0"/>
-              <a:t>单元 12 · Pygame 起步与飞船驾驶 · W14</a:t>
-            </a:r>
-          </a:p>
-          <a:p>
-            <a:r>
-              <a:rPr lang="zh-CN" dirty="0"/>
-              <a:t/>
-            </a:r>
-          </a:p>
-          <a:p>
-            <a:r>
-              <a:rPr lang="zh-CN" dirty="0"/>
-              <a:t>学习目标：知道为什么一个游戏要拆成三个文件；装好 Pygame 并跑出第一个窗口</a:t>
-            </a:r>
-          </a:p>
-          <a:p>
-            <a:r>
-              <a:rPr lang="zh-CN" dirty="0"/>
-              <a:t/>
-            </a:r>
-          </a:p>
-          <a:p>
-            <a:r>
-              <a:rPr lang="zh-CN" dirty="0"/>
-              <a:t>课堂实操（40 分钟，不看答案）：</a:t>
-            </a:r>
-          </a:p>
-          <a:p>
-            <a:r>
-              <a:rPr lang="zh-CN" dirty="0"/>
-              <a:t>· 跑通 SDL_VIDEODRIVER=dummy 验证环境</a:t>
-            </a:r>
-          </a:p>
-          <a:p>
-            <a:r>
-              <a:rPr lang="zh-CN" dirty="0"/>
-              <a:t>· 画出自己项目的三个文件结构</a:t>
-            </a:r>
-          </a:p>
-          <a:p>
-            <a:r>
-              <a:rPr lang="zh-CN" dirty="0"/>
-              <a:t>· 把 hello_world 改成自己的项目骨架</a:t>
-            </a:r>
-          </a:p>
-          <a:p>
-            <a:r>
-              <a:rPr lang="zh-CN" dirty="0"/>
-              <a:t/>
-            </a:r>
-          </a:p>
-          <a:p>
-            <a:r>
-              <a:rPr lang="zh-CN" dirty="0"/>
-              <a:t>课后作业：</a:t>
-            </a:r>
-          </a:p>
-          <a:p>
-            <a:r>
-              <a:rPr lang="zh-CN" dirty="0"/>
-              <a:t>· 建立 alien_invasion 仓库并首次 commit</a:t>
-            </a:r>
-          </a:p>
-          <a:p>
-            <a:r>
-              <a:rPr lang="zh-CN" dirty="0"/>
-              <a:t>· 产出：能弹出窗口的空项目</a:t>
-            </a:r>
-          </a:p>
-          <a:p>
-            <a:r>
-              <a:rPr lang="zh-CN" dirty="0"/>
-              <a:t/>
-            </a:r>
-          </a:p>
-          <a:p>
-            <a:r>
-              <a:rPr lang="zh-CN" dirty="0"/>
-              <a:t>节奏：讲 20 分钟 → 学员自己敲 40 分钟（不看答案）→ 对讲评自查 20 分钟 → 写作业 10 分钟。</a:t>
-            </a:r>
-          </a:p>
-        </p:txBody>
-      </p:sp>
-      <p:sp>
-        <p:nvSpPr>
-          <p:cNvPr id="2" name="讲课提示"/>
-          <p:cNvSpPr txBox="1"/>
-          <p:nvPr/>
-        </p:nvSpPr>
-        <p:spPr>
-          <a:xfrm>
-            <a:off x="457200" y="457200"/>
-            <a:ext cx="6858000" cy="4800600"/>
-          </a:xfrm>
-          <a:prstGeom prst="rect">
-            <a:avLst/>
-          </a:prstGeom>
-        </p:spPr>
-        <p:txBody>
-          <a:bodyPr wrap="square"/>
-          <a:lstStyle/>
-          <a:p>
-            <a:r>
-              <a:rPr lang="zh-CN" dirty="0"/>
-              <a:t>第 65 节 · 项目规划与安装 Pygame</a:t>
-            </a:r>
-          </a:p>
-          <a:p>
-            <a:r>
-              <a:rPr lang="zh-CN" dirty="0"/>
-              <a:t>单元 12 · Pygame 起步与飞船驾驶 · W14</a:t>
-            </a:r>
-          </a:p>
-          <a:p>
-            <a:r>
-              <a:rPr lang="zh-CN" dirty="0"/>
-              <a:t/>
-            </a:r>
-          </a:p>
-          <a:p>
-            <a:r>
-              <a:rPr lang="zh-CN" dirty="0"/>
-              <a:t>学习目标：知道为什么一个游戏要拆成三个文件；装好 Pygame 并跑出第一个窗口</a:t>
-            </a:r>
-          </a:p>
-          <a:p>
-            <a:r>
-              <a:rPr lang="zh-CN" dirty="0"/>
-              <a:t/>
-            </a:r>
-          </a:p>
-          <a:p>
-            <a:r>
-              <a:rPr lang="zh-CN" dirty="0"/>
-              <a:t>课堂实操（40 分钟，不看答案）：</a:t>
-            </a:r>
-          </a:p>
-          <a:p>
-            <a:r>
-              <a:rPr lang="zh-CN" dirty="0"/>
-              <a:t>· 跑通 SDL_VIDEODRIVER=dummy 验证环境</a:t>
-            </a:r>
-          </a:p>
-          <a:p>
-            <a:r>
-              <a:rPr lang="zh-CN" dirty="0"/>
-              <a:t>· 画出自己项目的三个文件结构</a:t>
-            </a:r>
-          </a:p>
-          <a:p>
-            <a:r>
-              <a:rPr lang="zh-CN" dirty="0"/>
-              <a:t>· 把 hello_world 改成自己的项目骨架</a:t>
-            </a:r>
-          </a:p>
-          <a:p>
-            <a:r>
-              <a:rPr lang="zh-CN" dirty="0"/>
-              <a:t/>
-            </a:r>
-          </a:p>
-          <a:p>
-            <a:r>
-              <a:rPr lang="zh-CN" dirty="0"/>
-              <a:t>课后作业：</a:t>
-            </a:r>
-          </a:p>
-          <a:p>
-            <a:r>
-              <a:rPr lang="zh-CN" dirty="0"/>
-              <a:t>· 建立 alien_invasion 仓库并首次 commit</a:t>
-            </a:r>
-          </a:p>
-          <a:p>
-            <a:r>
-              <a:rPr lang="zh-CN" dirty="0"/>
-              <a:t>· 产出：能弹出窗口的空项目</a:t>
-            </a:r>
-          </a:p>
-          <a:p>
-            <a:r>
-              <a:rPr lang="zh-CN" dirty="0"/>
-              <a:t/>
-            </a:r>
-          </a:p>
-          <a:p>
-            <a:r>
-              <a:rPr lang="zh-CN" dirty="0"/>
-              <a:t>节奏：讲 20 分钟 → 学员自己敲 40 分钟（不看答案）→ 对讲评自查 20 分钟 → 写作业 10 分钟。</a:t>
-            </a:r>
-          </a:p>
-        </p:txBody>
-      </p:sp>
-    </p:spTree>
-  </p:cSld>
-  <p:clrMapOvr>
-    <a:masterClrMapping/>
-  </p:clrMapOvr>
-</p:notes>
-</file>
-
-<file path=ppt/notesSlides/notesSlide3.xml><?xml version="1.0" encoding="utf-8"?>
-<p:notes xmlns:a="http://schemas.openxmlformats.org/drawingml/2006/main" xmlns:p="http://schemas.openxmlformats.org/presentationml/2006/main" xmlns:r="http://schemas.openxmlformats.org/officeDocument/2006/relationships">
-  <p:cSld>
-    <p:spTree>
-      <p:nvGrpSpPr>
-        <p:cNvPr id="1" name=""/>
-        <p:cNvGrpSpPr/>
-        <p:nvPr/>
-      </p:nvGrpSpPr>
-      <p:grpSpPr>
-        <a:xfrm>
-          <a:off x="0" y="0"/>
-          <a:ext cx="0" cy="0"/>
-          <a:chOff x="0" y="0"/>
-          <a:chExt cx="0" cy="0"/>
-        </a:xfrm>
-      </p:grpSpPr>
-      <p:sp>
-        <p:nvSpPr>
-          <p:cNvPr id="2" name="讲课提示"/>
-          <p:cNvSpPr txBox="1"/>
-          <p:nvPr/>
-        </p:nvSpPr>
-        <p:spPr>
-          <a:xfrm>
-            <a:off x="457200" y="457200"/>
-            <a:ext cx="6858000" cy="4800600"/>
-          </a:xfrm>
-          <a:prstGeom prst="rect">
-            <a:avLst/>
-          </a:prstGeom>
-        </p:spPr>
-        <p:txBody>
-          <a:bodyPr wrap="square"/>
-          <a:lstStyle/>
-          <a:p>
-            <a:r>
-              <a:rPr lang="zh-CN" dirty="0"/>
-              <a:t>第 65 节 · 核心知识点：项目规划与安装 Pygame</a:t>
-            </a:r>
-          </a:p>
-          <a:p>
-            <a:r>
-              <a:rPr lang="zh-CN" dirty="0"/>
-              <a:t/>
-            </a:r>
-          </a:p>
-          <a:p>
-            <a:r>
-              <a:rPr lang="zh-CN" dirty="0"/>
-              <a:t>讲这一页时：先让学生说出上节课的结论，再逐块讲要点。</a:t>
-            </a:r>
-          </a:p>
-          <a:p>
-            <a:r>
-              <a:rPr lang="zh-CN" dirty="0"/>
-              <a:t>每讲完一块，问一句「这一步如果写错了，报错会长什么样？」——把错误提前讲。</a:t>
-            </a:r>
-          </a:p>
-          <a:p>
-            <a:r>
-              <a:rPr lang="zh-CN" dirty="0"/>
-              <a:t/>
-            </a:r>
-          </a:p>
-          <a:p>
-            <a:r>
-              <a:rPr lang="zh-CN" dirty="0"/>
-              <a:t>本节目标：知道为什么一个游戏要拆成三个文件；装好 Pygame 并跑出第一个窗口</a:t>
-            </a:r>
-          </a:p>
-          <a:p>
-            <a:r>
-              <a:rPr lang="zh-CN" dirty="0"/>
-              <a:t/>
-            </a:r>
-          </a:p>
-          <a:p>
-            <a:r>
-              <a:rPr lang="zh-CN" dirty="0"/>
-              <a:t>看不到懂的地方，回讲义对应小节读一遍，再回来对着这页复述一次——能讲出来才算真懂。</a:t>
-            </a:r>
-          </a:p>
-        </p:txBody>
-      </p:sp>
-      <p:sp>
-        <p:nvSpPr>
-          <p:cNvPr id="2" name="讲课提示"/>
-          <p:cNvSpPr txBox="1"/>
-          <p:nvPr/>
-        </p:nvSpPr>
-        <p:spPr>
-          <a:xfrm>
-            <a:off x="457200" y="457200"/>
-            <a:ext cx="6858000" cy="4800600"/>
-          </a:xfrm>
-          <a:prstGeom prst="rect">
-            <a:avLst/>
-          </a:prstGeom>
-        </p:spPr>
-        <p:txBody>
-          <a:bodyPr wrap="square"/>
-          <a:lstStyle/>
-          <a:p>
-            <a:r>
-              <a:rPr lang="zh-CN" dirty="0"/>
-              <a:t>第 65 节 · 核心知识点：项目规划与安装 Pygame</a:t>
-            </a:r>
-          </a:p>
-          <a:p>
-            <a:r>
-              <a:rPr lang="zh-CN" dirty="0"/>
-              <a:t/>
-            </a:r>
-          </a:p>
-          <a:p>
-            <a:r>
-              <a:rPr lang="zh-CN" dirty="0"/>
-              <a:t>讲这一页时：先让学生说出上节课的结论，再逐块讲要点。</a:t>
-            </a:r>
-          </a:p>
-          <a:p>
-            <a:r>
-              <a:rPr lang="zh-CN" dirty="0"/>
-              <a:t>每讲完一块，问一句「这一步如果写错了，报错会长什么样？」——把错误提前讲。</a:t>
-            </a:r>
-          </a:p>
-          <a:p>
-            <a:r>
-              <a:rPr lang="zh-CN" dirty="0"/>
-              <a:t/>
-            </a:r>
-          </a:p>
-          <a:p>
-            <a:r>
-              <a:rPr lang="zh-CN" dirty="0"/>
-              <a:t>本节目标：知道为什么一个游戏要拆成三个文件；装好 Pygame 并跑出第一个窗口</a:t>
-            </a:r>
-          </a:p>
-          <a:p>
-            <a:r>
-              <a:rPr lang="zh-CN" dirty="0"/>
-              <a:t/>
-            </a:r>
-          </a:p>
-          <a:p>
-            <a:r>
-              <a:rPr lang="zh-CN" dirty="0"/>
-              <a:t>看不到懂的地方，回讲义对应小节读一遍，再回来对着这页复述一次——能讲出来才算真懂。</a:t>
-            </a:r>
-          </a:p>
-        </p:txBody>
-      </p:sp>
-    </p:spTree>
-  </p:cSld>
-  <p:clrMapOvr>
-    <a:masterClrMapping/>
-  </p:clrMapOvr>
-</p:notes>
-</file>
-
-<file path=ppt/notesSlides/notesSlide4.xml><?xml version="1.0" encoding="utf-8"?>
-<p:notes xmlns:a="http://schemas.openxmlformats.org/drawingml/2006/main" xmlns:p="http://schemas.openxmlformats.org/presentationml/2006/main" xmlns:r="http://schemas.openxmlformats.org/officeDocument/2006/relationships">
-  <p:cSld>
-    <p:spTree>
-      <p:nvGrpSpPr>
-        <p:cNvPr id="1" name=""/>
-        <p:cNvGrpSpPr/>
-        <p:nvPr/>
-      </p:nvGrpSpPr>
-      <p:grpSpPr>
-        <a:xfrm>
-          <a:off x="0" y="0"/>
-          <a:ext cx="0" cy="0"/>
-          <a:chOff x="0" y="0"/>
-          <a:chExt cx="0" cy="0"/>
-        </a:xfrm>
-      </p:grpSpPr>
-      <p:sp>
-        <p:nvSpPr>
-          <p:cNvPr id="2" name="讲课提示"/>
-          <p:cNvSpPr txBox="1"/>
-          <p:nvPr/>
-        </p:nvSpPr>
-        <p:spPr>
-          <a:xfrm>
-            <a:off x="457200" y="457200"/>
-            <a:ext cx="6858000" cy="4800600"/>
-          </a:xfrm>
-          <a:prstGeom prst="rect">
-            <a:avLst/>
-          </a:prstGeom>
-        </p:spPr>
-        <p:txBody>
-          <a:bodyPr wrap="square"/>
-          <a:lstStyle/>
-          <a:p>
-            <a:r>
-              <a:rPr lang="zh-CN" dirty="0"/>
-              <a:t>第 66 节 · 主循环、帧率与事件驱动</a:t>
-            </a:r>
-          </a:p>
-          <a:p>
-            <a:r>
-              <a:rPr lang="zh-CN" dirty="0"/>
-              <a:t>单元 12 · Pygame 起步与飞船驾驶 · W14</a:t>
-            </a:r>
-          </a:p>
-          <a:p>
-            <a:r>
-              <a:rPr lang="zh-CN" dirty="0"/>
-              <a:t/>
-            </a:r>
-          </a:p>
-          <a:p>
-            <a:r>
-              <a:rPr lang="zh-CN" dirty="0"/>
-              <a:t>学习目标：理解 `while True` 主循环的四步；知道帧率为什么必须锁；看懂事件驱动模型</a:t>
-            </a:r>
-          </a:p>
-          <a:p>
-            <a:r>
-              <a:rPr lang="zh-CN" dirty="0"/>
-              <a:t/>
-            </a:r>
-          </a:p>
-          <a:p>
-            <a:r>
-              <a:rPr lang="zh-CN" dirty="0"/>
-              <a:t>课堂实操（40 分钟，不看答案）：</a:t>
-            </a:r>
-          </a:p>
-          <a:p>
-            <a:r>
-              <a:rPr lang="zh-CN" dirty="0"/>
-              <a:t>· 手画主循环四步并对照代码</a:t>
-            </a:r>
-          </a:p>
-          <a:p>
-            <a:r>
-              <a:rPr lang="zh-CN" dirty="0"/>
-              <a:t>· 把 tick(60) 改成 tick(5)，观察游戏变慢</a:t>
-            </a:r>
-          </a:p>
-          <a:p>
-            <a:r>
-              <a:rPr lang="zh-CN" dirty="0"/>
-              <a:t>· 故意让程序不处理退出事件，试着关不掉窗口</a:t>
-            </a:r>
-          </a:p>
-          <a:p>
-            <a:r>
-              <a:rPr lang="zh-CN" dirty="0"/>
-              <a:t/>
-            </a:r>
-          </a:p>
-          <a:p>
-            <a:r>
-              <a:rPr lang="zh-CN" dirty="0"/>
-              <a:t>课后作业：</a:t>
-            </a:r>
-          </a:p>
-          <a:p>
-            <a:r>
-              <a:rPr lang="zh-CN" dirty="0"/>
-              <a:t>· 产出：一个会响应按键和退出的窗口</a:t>
-            </a:r>
-          </a:p>
-          <a:p>
-            <a:r>
-              <a:rPr lang="zh-CN" dirty="0"/>
-              <a:t/>
-            </a:r>
-          </a:p>
-          <a:p>
-            <a:r>
-              <a:rPr lang="zh-CN" dirty="0"/>
-              <a:t>节奏：讲 20 分钟 → 学员自己敲 40 分钟（不看答案）→ 对讲评自查 20 分钟 → 写作业 10 分钟。</a:t>
-            </a:r>
-          </a:p>
-        </p:txBody>
-      </p:sp>
-      <p:sp>
-        <p:nvSpPr>
-          <p:cNvPr id="2" name="讲课提示"/>
-          <p:cNvSpPr txBox="1"/>
-          <p:nvPr/>
-        </p:nvSpPr>
-        <p:spPr>
-          <a:xfrm>
-            <a:off x="457200" y="457200"/>
-            <a:ext cx="6858000" cy="4800600"/>
-          </a:xfrm>
-          <a:prstGeom prst="rect">
-            <a:avLst/>
-          </a:prstGeom>
-        </p:spPr>
-        <p:txBody>
-          <a:bodyPr wrap="square"/>
-          <a:lstStyle/>
-          <a:p>
-            <a:r>
-              <a:rPr lang="zh-CN" dirty="0"/>
-              <a:t>第 66 节 · 主循环、帧率与事件驱动</a:t>
-            </a:r>
-          </a:p>
-          <a:p>
-            <a:r>
-              <a:rPr lang="zh-CN" dirty="0"/>
-              <a:t>单元 12 · Pygame 起步与飞船驾驶 · W14</a:t>
-            </a:r>
-          </a:p>
-          <a:p>
-            <a:r>
-              <a:rPr lang="zh-CN" dirty="0"/>
-              <a:t/>
-            </a:r>
-          </a:p>
-          <a:p>
-            <a:r>
-              <a:rPr lang="zh-CN" dirty="0"/>
-              <a:t>学习目标：理解 `while True` 主循环的四步；知道帧率为什么必须锁；看懂事件驱动模型</a:t>
-            </a:r>
-          </a:p>
-          <a:p>
-            <a:r>
-              <a:rPr lang="zh-CN" dirty="0"/>
-              <a:t/>
-            </a:r>
-          </a:p>
-          <a:p>
-            <a:r>
-              <a:rPr lang="zh-CN" dirty="0"/>
-              <a:t>课堂实操（40 分钟，不看答案）：</a:t>
-            </a:r>
-          </a:p>
-          <a:p>
-            <a:r>
-              <a:rPr lang="zh-CN" dirty="0"/>
-              <a:t>· 手画主循环四步并对照代码</a:t>
-            </a:r>
-          </a:p>
-          <a:p>
-            <a:r>
-              <a:rPr lang="zh-CN" dirty="0"/>
-              <a:t>· 把 tick(60) 改成 tick(5)，观察游戏变慢</a:t>
-            </a:r>
-          </a:p>
-          <a:p>
-            <a:r>
-              <a:rPr lang="zh-CN" dirty="0"/>
-              <a:t>· 故意让程序不处理退出事件，试着关不掉窗口</a:t>
-            </a:r>
-          </a:p>
-          <a:p>
-            <a:r>
-              <a:rPr lang="zh-CN" dirty="0"/>
-              <a:t/>
-            </a:r>
-          </a:p>
-          <a:p>
-            <a:r>
-              <a:rPr lang="zh-CN" dirty="0"/>
-              <a:t>课后作业：</a:t>
-            </a:r>
-          </a:p>
-          <a:p>
-            <a:r>
-              <a:rPr lang="zh-CN" dirty="0"/>
-              <a:t>· 产出：一个会响应按键和退出的窗口</a:t>
-            </a:r>
-          </a:p>
-          <a:p>
-            <a:r>
-              <a:rPr lang="zh-CN" dirty="0"/>
-              <a:t/>
-            </a:r>
-          </a:p>
-          <a:p>
-            <a:r>
-              <a:rPr lang="zh-CN" dirty="0"/>
-              <a:t>节奏：讲 20 分钟 → 学员自己敲 40 分钟（不看答案）→ 对讲评自查 20 分钟 → 写作业 10 分钟。</a:t>
-            </a:r>
-          </a:p>
-        </p:txBody>
-      </p:sp>
-    </p:spTree>
-  </p:cSld>
-  <p:clrMapOvr>
-    <a:masterClrMapping/>
-  </p:clrMapOvr>
-</p:notes>
-</file>
-
-<file path=ppt/notesSlides/notesSlide5.xml><?xml version="1.0" encoding="utf-8"?>
-<p:notes xmlns:a="http://schemas.openxmlformats.org/drawingml/2006/main" xmlns:p="http://schemas.openxmlformats.org/presentationml/2006/main" xmlns:r="http://schemas.openxmlformats.org/officeDocument/2006/relationships">
-  <p:cSld>
-    <p:spTree>
-      <p:nvGrpSpPr>
-        <p:cNvPr id="1" name=""/>
-        <p:cNvGrpSpPr/>
-        <p:nvPr/>
-      </p:nvGrpSpPr>
-      <p:grpSpPr>
-        <a:xfrm>
-          <a:off x="0" y="0"/>
-          <a:ext cx="0" cy="0"/>
-          <a:chOff x="0" y="0"/>
-          <a:chExt cx="0" cy="0"/>
-        </a:xfrm>
-      </p:grpSpPr>
-      <p:sp>
-        <p:nvSpPr>
-          <p:cNvPr id="2" name="讲课提示"/>
-          <p:cNvSpPr txBox="1"/>
-          <p:nvPr/>
-        </p:nvSpPr>
-        <p:spPr>
-          <a:xfrm>
-            <a:off x="457200" y="457200"/>
-            <a:ext cx="6858000" cy="4800600"/>
-          </a:xfrm>
-          <a:prstGeom prst="rect">
-            <a:avLst/>
-          </a:prstGeom>
-        </p:spPr>
-        <p:txBody>
-          <a:bodyPr wrap="square"/>
-          <a:lstStyle/>
-          <a:p>
-            <a:r>
-              <a:rPr lang="zh-CN" dirty="0"/>
-              <a:t>第 66 节 · 核心知识点：主循环、帧率与事件驱动</a:t>
-            </a:r>
-          </a:p>
-          <a:p>
-            <a:r>
-              <a:rPr lang="zh-CN" dirty="0"/>
-              <a:t/>
-            </a:r>
-          </a:p>
-          <a:p>
-            <a:r>
-              <a:rPr lang="zh-CN" dirty="0"/>
-              <a:t>讲这一页时：先让学生说出上节课的结论，再逐块讲要点。</a:t>
-            </a:r>
-          </a:p>
-          <a:p>
-            <a:r>
-              <a:rPr lang="zh-CN" dirty="0"/>
-              <a:t>每讲完一块，问一句「这一步如果写错了，报错会长什么样？」——把错误提前讲。</a:t>
-            </a:r>
-          </a:p>
-          <a:p>
-            <a:r>
-              <a:rPr lang="zh-CN" dirty="0"/>
-              <a:t/>
-            </a:r>
-          </a:p>
-          <a:p>
-            <a:r>
-              <a:rPr lang="zh-CN" dirty="0"/>
-              <a:t>本节目标：理解 `while True` 主循环的四步；知道帧率为什么必须锁；看懂事件驱动模型</a:t>
-            </a:r>
-          </a:p>
-          <a:p>
-            <a:r>
-              <a:rPr lang="zh-CN" dirty="0"/>
-              <a:t/>
-            </a:r>
-          </a:p>
-          <a:p>
-            <a:r>
-              <a:rPr lang="zh-CN" dirty="0"/>
-              <a:t>看不到懂的地方，回讲义对应小节读一遍，再回来对着这页复述一次——能讲出来才算真懂。</a:t>
-            </a:r>
-          </a:p>
-        </p:txBody>
-      </p:sp>
-      <p:sp>
-        <p:nvSpPr>
-          <p:cNvPr id="2" name="讲课提示"/>
-          <p:cNvSpPr txBox="1"/>
-          <p:nvPr/>
-        </p:nvSpPr>
-        <p:spPr>
-          <a:xfrm>
-            <a:off x="457200" y="457200"/>
-            <a:ext cx="6858000" cy="4800600"/>
-          </a:xfrm>
-          <a:prstGeom prst="rect">
-            <a:avLst/>
-          </a:prstGeom>
-        </p:spPr>
-        <p:txBody>
-          <a:bodyPr wrap="square"/>
-          <a:lstStyle/>
-          <a:p>
-            <a:r>
-              <a:rPr lang="zh-CN" dirty="0"/>
-              <a:t>第 66 节 · 核心知识点：主循环、帧率与事件驱动</a:t>
-            </a:r>
-          </a:p>
-          <a:p>
-            <a:r>
-              <a:rPr lang="zh-CN" dirty="0"/>
-              <a:t/>
-            </a:r>
-          </a:p>
-          <a:p>
-            <a:r>
-              <a:rPr lang="zh-CN" dirty="0"/>
-              <a:t>讲这一页时：先让学生说出上节课的结论，再逐块讲要点。</a:t>
-            </a:r>
-          </a:p>
-          <a:p>
-            <a:r>
-              <a:rPr lang="zh-CN" dirty="0"/>
-              <a:t>每讲完一块，问一句「这一步如果写错了，报错会长什么样？」——把错误提前讲。</a:t>
-            </a:r>
-          </a:p>
-          <a:p>
-            <a:r>
-              <a:rPr lang="zh-CN" dirty="0"/>
-              <a:t/>
-            </a:r>
-          </a:p>
-          <a:p>
-            <a:r>
-              <a:rPr lang="zh-CN" dirty="0"/>
-              <a:t>本节目标：理解 `while True` 主循环的四步；知道帧率为什么必须锁；看懂事件驱动模型</a:t>
-            </a:r>
-          </a:p>
-          <a:p>
-            <a:r>
-              <a:rPr lang="zh-CN" dirty="0"/>
-              <a:t/>
-            </a:r>
-          </a:p>
-          <a:p>
-            <a:r>
-              <a:rPr lang="zh-CN" dirty="0"/>
-              <a:t>看不到懂的地方，回讲义对应小节读一遍，再回来对着这页复述一次——能讲出来才算真懂。</a:t>
-            </a:r>
-          </a:p>
-        </p:txBody>
-      </p:sp>
-    </p:spTree>
-  </p:cSld>
-  <p:clrMapOvr>
-    <a:masterClrMapping/>
-  </p:clrMapOvr>
-</p:notes>
-</file>
-
-<file path=ppt/notesSlides/notesSlide6.xml><?xml version="1.0" encoding="utf-8"?>
-<p:notes xmlns:a="http://schemas.openxmlformats.org/drawingml/2006/main" xmlns:p="http://schemas.openxmlformats.org/presentationml/2006/main" xmlns:r="http://schemas.openxmlformats.org/officeDocument/2006/relationships">
-  <p:cSld>
-    <p:spTree>
-      <p:nvGrpSpPr>
-        <p:cNvPr id="1" name=""/>
-        <p:cNvGrpSpPr/>
-        <p:nvPr/>
-      </p:nvGrpSpPr>
-      <p:grpSpPr>
-        <a:xfrm>
-          <a:off x="0" y="0"/>
-          <a:ext cx="0" cy="0"/>
-          <a:chOff x="0" y="0"/>
-          <a:chExt cx="0" cy="0"/>
-        </a:xfrm>
-      </p:grpSpPr>
-      <p:sp>
-        <p:nvSpPr>
-          <p:cNvPr id="2" name="讲课提示"/>
-          <p:cNvSpPr txBox="1"/>
-          <p:nvPr/>
-        </p:nvSpPr>
-        <p:spPr>
-          <a:xfrm>
-            <a:off x="457200" y="457200"/>
-            <a:ext cx="6858000" cy="4800600"/>
-          </a:xfrm>
-          <a:prstGeom prst="rect">
-            <a:avLst/>
-          </a:prstGeom>
-        </p:spPr>
-        <p:txBody>
-          <a:bodyPr wrap="square"/>
-          <a:lstStyle/>
-          <a:p>
-            <a:r>
-              <a:rPr lang="zh-CN" dirty="0"/>
-              <a:t>第 67 节 · Settings 类与屏幕矩形</a:t>
-            </a:r>
-          </a:p>
-          <a:p>
-            <a:r>
-              <a:rPr lang="zh-CN" dirty="0"/>
-              <a:t>单元 12 · Pygame 起步与飞船驾驶 · W14</a:t>
-            </a:r>
-          </a:p>
-          <a:p>
-            <a:r>
-              <a:rPr lang="zh-CN" dirty="0"/>
-              <a:t/>
-            </a:r>
-          </a:p>
-          <a:p>
-            <a:r>
-              <a:rPr lang="zh-CN" dirty="0"/>
-              <a:t>学习目标：把所有会变的数值集中到 Settings；理解 screen_rect 的作用</a:t>
-            </a:r>
-          </a:p>
-          <a:p>
-            <a:r>
-              <a:rPr lang="zh-CN" dirty="0"/>
-              <a:t/>
-            </a:r>
-          </a:p>
-          <a:p>
-            <a:r>
-              <a:rPr lang="zh-CN" dirty="0"/>
-              <a:t>课堂实操（40 分钟，不看答案）：</a:t>
-            </a:r>
-          </a:p>
-          <a:p>
-            <a:r>
-              <a:rPr lang="zh-CN" dirty="0"/>
-              <a:t>· 把散落各处的数字全搬进 Settings</a:t>
-            </a:r>
-          </a:p>
-          <a:p>
-            <a:r>
-              <a:rPr lang="zh-CN" dirty="0"/>
-              <a:t>· 打印 screen_rect 四个属性</a:t>
-            </a:r>
-          </a:p>
-          <a:p>
-            <a:r>
-              <a:rPr lang="zh-CN" dirty="0"/>
-              <a:t>· 故意改错屏幕宽高，观察窗口变形</a:t>
-            </a:r>
-          </a:p>
-          <a:p>
-            <a:r>
-              <a:rPr lang="zh-CN" dirty="0"/>
-              <a:t/>
-            </a:r>
-          </a:p>
-          <a:p>
-            <a:r>
-              <a:rPr lang="zh-CN" dirty="0"/>
-              <a:t>课后作业：</a:t>
-            </a:r>
-          </a:p>
-          <a:p>
-            <a:r>
-              <a:rPr lang="zh-CN" dirty="0"/>
-              <a:t>· 产出：settings.py 定稿</a:t>
-            </a:r>
-          </a:p>
-          <a:p>
-            <a:r>
-              <a:rPr lang="zh-CN" dirty="0"/>
-              <a:t/>
-            </a:r>
-          </a:p>
-          <a:p>
-            <a:r>
-              <a:rPr lang="zh-CN" dirty="0"/>
-              <a:t>节奏：讲 20 分钟 → 学员自己敲 40 分钟（不看答案）→ 对讲评自查 20 分钟 → 写作业 10 分钟。</a:t>
-            </a:r>
-          </a:p>
-        </p:txBody>
-      </p:sp>
-      <p:sp>
-        <p:nvSpPr>
-          <p:cNvPr id="2" name="讲课提示"/>
-          <p:cNvSpPr txBox="1"/>
-          <p:nvPr/>
-        </p:nvSpPr>
-        <p:spPr>
-          <a:xfrm>
-            <a:off x="457200" y="457200"/>
-            <a:ext cx="6858000" cy="4800600"/>
-          </a:xfrm>
-          <a:prstGeom prst="rect">
-            <a:avLst/>
-          </a:prstGeom>
-        </p:spPr>
-        <p:txBody>
-          <a:bodyPr wrap="square"/>
-          <a:lstStyle/>
-          <a:p>
-            <a:r>
-              <a:rPr lang="zh-CN" dirty="0"/>
-              <a:t>第 67 节 · Settings 类与屏幕矩形</a:t>
-            </a:r>
-          </a:p>
-          <a:p>
-            <a:r>
-              <a:rPr lang="zh-CN" dirty="0"/>
-              <a:t>单元 12 · Pygame 起步与飞船驾驶 · W14</a:t>
-            </a:r>
-          </a:p>
-          <a:p>
-            <a:r>
-              <a:rPr lang="zh-CN" dirty="0"/>
-              <a:t/>
-            </a:r>
-          </a:p>
-          <a:p>
-            <a:r>
-              <a:rPr lang="zh-CN" dirty="0"/>
-              <a:t>学习目标：把所有会变的数值集中到 Settings；理解 screen_rect 的作用</a:t>
-            </a:r>
-          </a:p>
-          <a:p>
-            <a:r>
-              <a:rPr lang="zh-CN" dirty="0"/>
-              <a:t/>
-            </a:r>
-          </a:p>
-          <a:p>
-            <a:r>
-              <a:rPr lang="zh-CN" dirty="0"/>
-              <a:t>课堂实操（40 分钟，不看答案）：</a:t>
-            </a:r>
-          </a:p>
-          <a:p>
-            <a:r>
-              <a:rPr lang="zh-CN" dirty="0"/>
-              <a:t>· 把散落各处的数字全搬进 Settings</a:t>
-            </a:r>
-          </a:p>
-          <a:p>
-            <a:r>
-              <a:rPr lang="zh-CN" dirty="0"/>
-              <a:t>· 打印 screen_rect 四个属性</a:t>
-            </a:r>
-          </a:p>
-          <a:p>
-            <a:r>
-              <a:rPr lang="zh-CN" dirty="0"/>
-              <a:t>· 故意改错屏幕宽高，观察窗口变形</a:t>
-            </a:r>
-          </a:p>
-          <a:p>
-            <a:r>
-              <a:rPr lang="zh-CN" dirty="0"/>
-              <a:t/>
-            </a:r>
-          </a:p>
-          <a:p>
-            <a:r>
-              <a:rPr lang="zh-CN" dirty="0"/>
-              <a:t>课后作业：</a:t>
-            </a:r>
-          </a:p>
-          <a:p>
-            <a:r>
-              <a:rPr lang="zh-CN" dirty="0"/>
-              <a:t>· 产出：settings.py 定稿</a:t>
-            </a:r>
-          </a:p>
-          <a:p>
-            <a:r>
-              <a:rPr lang="zh-CN" dirty="0"/>
-              <a:t/>
-            </a:r>
-          </a:p>
-          <a:p>
-            <a:r>
-              <a:rPr lang="zh-CN" dirty="0"/>
-              <a:t>节奏：讲 20 分钟 → 学员自己敲 40 分钟（不看答案）→ 对讲评自查 20 分钟 → 写作业 10 分钟。</a:t>
-            </a:r>
-          </a:p>
-        </p:txBody>
-      </p:sp>
-    </p:spTree>
-  </p:cSld>
-  <p:clrMapOvr>
-    <a:masterClrMapping/>
-  </p:clrMapOvr>
-</p:notes>
-</file>
-
-<file path=ppt/notesSlides/notesSlide7.xml><?xml version="1.0" encoding="utf-8"?>
-<p:notes xmlns:a="http://schemas.openxmlformats.org/drawingml/2006/main" xmlns:p="http://schemas.openxmlformats.org/presentationml/2006/main" xmlns:r="http://schemas.openxmlformats.org/officeDocument/2006/relationships">
-  <p:cSld>
-    <p:spTree>
-      <p:nvGrpSpPr>
-        <p:cNvPr id="1" name=""/>
-        <p:cNvGrpSpPr/>
-        <p:nvPr/>
-      </p:nvGrpSpPr>
-      <p:grpSpPr>
-        <a:xfrm>
-          <a:off x="0" y="0"/>
-          <a:ext cx="0" cy="0"/>
-          <a:chOff x="0" y="0"/>
-          <a:chExt cx="0" cy="0"/>
-        </a:xfrm>
-      </p:grpSpPr>
-      <p:sp>
-        <p:nvSpPr>
-          <p:cNvPr id="2" name="讲课提示"/>
-          <p:cNvSpPr txBox="1"/>
-          <p:nvPr/>
-        </p:nvSpPr>
-        <p:spPr>
-          <a:xfrm>
-            <a:off x="457200" y="457200"/>
-            <a:ext cx="6858000" cy="4800600"/>
-          </a:xfrm>
-          <a:prstGeom prst="rect">
-            <a:avLst/>
-          </a:prstGeom>
-        </p:spPr>
-        <p:txBody>
-          <a:bodyPr wrap="square"/>
-          <a:lstStyle/>
-          <a:p>
-            <a:r>
-              <a:rPr lang="zh-CN" dirty="0"/>
-              <a:t>第 67 节 · 核心知识点：Settings 类与屏幕矩形</a:t>
-            </a:r>
-          </a:p>
-          <a:p>
-            <a:r>
-              <a:rPr lang="zh-CN" dirty="0"/>
-              <a:t/>
-            </a:r>
-          </a:p>
-          <a:p>
-            <a:r>
-              <a:rPr lang="zh-CN" dirty="0"/>
-              <a:t>讲这一页时：先让学生说出上节课的结论，再逐块讲要点。</a:t>
-            </a:r>
-          </a:p>
-          <a:p>
-            <a:r>
-              <a:rPr lang="zh-CN" dirty="0"/>
-              <a:t>每讲完一块，问一句「这一步如果写错了，报错会长什么样？」——把错误提前讲。</a:t>
-            </a:r>
-          </a:p>
-          <a:p>
-            <a:r>
-              <a:rPr lang="zh-CN" dirty="0"/>
-              <a:t/>
-            </a:r>
-          </a:p>
-          <a:p>
-            <a:r>
-              <a:rPr lang="zh-CN" dirty="0"/>
-              <a:t>本节目标：把所有会变的数值集中到 Settings；理解 screen_rect 的作用</a:t>
-            </a:r>
-          </a:p>
-          <a:p>
-            <a:r>
-              <a:rPr lang="zh-CN" dirty="0"/>
-              <a:t/>
-            </a:r>
-          </a:p>
-          <a:p>
-            <a:r>
-              <a:rPr lang="zh-CN" dirty="0"/>
-              <a:t>看不到懂的地方，回讲义对应小节读一遍，再回来对着这页复述一次——能讲出来才算真懂。</a:t>
-            </a:r>
-          </a:p>
-        </p:txBody>
-      </p:sp>
-      <p:sp>
-        <p:nvSpPr>
-          <p:cNvPr id="2" name="讲课提示"/>
-          <p:cNvSpPr txBox="1"/>
-          <p:nvPr/>
-        </p:nvSpPr>
-        <p:spPr>
-          <a:xfrm>
-            <a:off x="457200" y="457200"/>
-            <a:ext cx="6858000" cy="4800600"/>
-          </a:xfrm>
-          <a:prstGeom prst="rect">
-            <a:avLst/>
-          </a:prstGeom>
-        </p:spPr>
-        <p:txBody>
-          <a:bodyPr wrap="square"/>
-          <a:lstStyle/>
-          <a:p>
-            <a:r>
-              <a:rPr lang="zh-CN" dirty="0"/>
-              <a:t>第 67 节 · 核心知识点：Settings 类与屏幕矩形</a:t>
-            </a:r>
-          </a:p>
-          <a:p>
-            <a:r>
-              <a:rPr lang="zh-CN" dirty="0"/>
-              <a:t/>
-            </a:r>
-          </a:p>
-          <a:p>
-            <a:r>
-              <a:rPr lang="zh-CN" dirty="0"/>
-              <a:t>讲这一页时：先让学生说出上节课的结论，再逐块讲要点。</a:t>
-            </a:r>
-          </a:p>
-          <a:p>
-            <a:r>
-              <a:rPr lang="zh-CN" dirty="0"/>
-              <a:t>每讲完一块，问一句「这一步如果写错了，报错会长什么样？」——把错误提前讲。</a:t>
-            </a:r>
-          </a:p>
-          <a:p>
-            <a:r>
-              <a:rPr lang="zh-CN" dirty="0"/>
-              <a:t/>
-            </a:r>
-          </a:p>
-          <a:p>
-            <a:r>
-              <a:rPr lang="zh-CN" dirty="0"/>
-              <a:t>本节目标：把所有会变的数值集中到 Settings；理解 screen_rect 的作用</a:t>
-            </a:r>
-          </a:p>
-          <a:p>
-            <a:r>
-              <a:rPr lang="zh-CN" dirty="0"/>
-              <a:t/>
-            </a:r>
-          </a:p>
-          <a:p>
-            <a:r>
-              <a:rPr lang="zh-CN" dirty="0"/>
-              <a:t>看不到懂的地方，回讲义对应小节读一遍，再回来对着这页复述一次——能讲出来才算真懂。</a:t>
-            </a:r>
-          </a:p>
-        </p:txBody>
-      </p:sp>
-    </p:spTree>
-  </p:cSld>
-  <p:clrMapOvr>
-    <a:masterClrMapping/>
-  </p:clrMapOvr>
-</p:notes>
-</file>
-
-<file path=ppt/notesSlides/notesSlide8.xml><?xml version="1.0" encoding="utf-8"?>
-<p:notes xmlns:a="http://schemas.openxmlformats.org/drawingml/2006/main" xmlns:p="http://schemas.openxmlformats.org/presentationml/2006/main" xmlns:r="http://schemas.openxmlformats.org/officeDocument/2006/relationships">
-  <p:cSld>
-    <p:spTree>
-      <p:nvGrpSpPr>
-        <p:cNvPr id="1" name=""/>
-        <p:cNvGrpSpPr/>
-        <p:nvPr/>
-      </p:nvGrpSpPr>
-      <p:grpSpPr>
-        <a:xfrm>
-          <a:off x="0" y="0"/>
-          <a:ext cx="0" cy="0"/>
-          <a:chOff x="0" y="0"/>
-          <a:chExt cx="0" cy="0"/>
-        </a:xfrm>
-      </p:grpSpPr>
-      <p:sp>
-        <p:nvSpPr>
-          <p:cNvPr id="2" name="讲课提示"/>
-          <p:cNvSpPr txBox="1"/>
-          <p:nvPr/>
-        </p:nvSpPr>
-        <p:spPr>
-          <a:xfrm>
-            <a:off x="457200" y="457200"/>
-            <a:ext cx="6858000" cy="4800600"/>
-          </a:xfrm>
-          <a:prstGeom prst="rect">
-            <a:avLst/>
-          </a:prstGeom>
-        </p:spPr>
-        <p:txBody>
-          <a:bodyPr wrap="square"/>
-          <a:lstStyle/>
-          <a:p>
-            <a:r>
-              <a:rPr lang="zh-CN" dirty="0"/>
-              <a:t>第 68 节 · 驾驶飞船：标志位与边界</a:t>
-            </a:r>
-          </a:p>
-          <a:p>
-            <a:r>
-              <a:rPr lang="zh-CN" dirty="0"/>
-              <a:t>单元 12 · Pygame 起步与飞船驾驶 · W14–W15</a:t>
-            </a:r>
-          </a:p>
-          <a:p>
-            <a:r>
-              <a:rPr lang="zh-CN" dirty="0"/>
-              <a:t/>
-            </a:r>
-          </a:p>
-          <a:p>
-            <a:r>
-              <a:rPr lang="zh-CN" dirty="0"/>
-              <a:t>学习目标：用 moving_right 标志位实现持续移动；用 screen_rect 限制活动范围</a:t>
-            </a:r>
-          </a:p>
-          <a:p>
-            <a:r>
-              <a:rPr lang="zh-CN" dirty="0"/>
-              <a:t/>
-            </a:r>
-          </a:p>
-          <a:p>
-            <a:r>
-              <a:rPr lang="zh-CN" dirty="0"/>
-              <a:t>课堂实操（40 分钟，不看答案）：</a:t>
-            </a:r>
-          </a:p>
-          <a:p>
-            <a:r>
-              <a:rPr lang="zh-CN" dirty="0"/>
-              <a:t>· 现场实现左右移动（不许看答案）</a:t>
-            </a:r>
-          </a:p>
-          <a:p>
-            <a:r>
-              <a:rPr lang="zh-CN" dirty="0"/>
-              <a:t>· 故意删掉边界判断，看飞船飞出屏幕</a:t>
-            </a:r>
-          </a:p>
-          <a:p>
-            <a:r>
-              <a:rPr lang="zh-CN" dirty="0"/>
-              <a:t>· 把飞船速度改成 3，观察手感变化</a:t>
-            </a:r>
-          </a:p>
-          <a:p>
-            <a:r>
-              <a:rPr lang="zh-CN" dirty="0"/>
-              <a:t/>
-            </a:r>
-          </a:p>
-          <a:p>
-            <a:r>
-              <a:rPr lang="zh-CN" dirty="0"/>
-              <a:t>课后作业：</a:t>
-            </a:r>
-          </a:p>
-          <a:p>
-            <a:r>
-              <a:rPr lang="zh-CN" dirty="0"/>
-              <a:t>· 完成教材 12.6 全部动手练</a:t>
-            </a:r>
-          </a:p>
-          <a:p>
-            <a:r>
-              <a:rPr lang="zh-CN" dirty="0"/>
-              <a:t/>
-            </a:r>
-          </a:p>
-          <a:p>
-            <a:r>
-              <a:rPr lang="zh-CN" dirty="0"/>
-              <a:t>节奏：讲 20 分钟 → 学员自己敲 40 分钟（不看答案）→ 对讲评自查 20 分钟 → 写作业 10 分钟。</a:t>
-            </a:r>
-          </a:p>
-        </p:txBody>
-      </p:sp>
-      <p:sp>
-        <p:nvSpPr>
-          <p:cNvPr id="2" name="讲课提示"/>
-          <p:cNvSpPr txBox="1"/>
-          <p:nvPr/>
-        </p:nvSpPr>
-        <p:spPr>
-          <a:xfrm>
-            <a:off x="457200" y="457200"/>
-            <a:ext cx="6858000" cy="4800600"/>
-          </a:xfrm>
-          <a:prstGeom prst="rect">
-            <a:avLst/>
-          </a:prstGeom>
-        </p:spPr>
-        <p:txBody>
-          <a:bodyPr wrap="square"/>
-          <a:lstStyle/>
-          <a:p>
-            <a:r>
-              <a:rPr lang="zh-CN" dirty="0"/>
-              <a:t>第 68 节 · 驾驶飞船：标志位与边界</a:t>
-            </a:r>
-          </a:p>
-          <a:p>
-            <a:r>
-              <a:rPr lang="zh-CN" dirty="0"/>
-              <a:t>单元 12 · Pygame 起步与飞船驾驶 · W14–W15</a:t>
-            </a:r>
-          </a:p>
-          <a:p>
-            <a:r>
-              <a:rPr lang="zh-CN" dirty="0"/>
-              <a:t/>
-            </a:r>
-          </a:p>
-          <a:p>
-            <a:r>
-              <a:rPr lang="zh-CN" dirty="0"/>
-              <a:t>学习目标：用 moving_right 标志位实现持续移动；用 screen_rect 限制活动范围</a:t>
-            </a:r>
-          </a:p>
-          <a:p>
-            <a:r>
-              <a:rPr lang="zh-CN" dirty="0"/>
-              <a:t/>
-            </a:r>
-          </a:p>
-          <a:p>
-            <a:r>
-              <a:rPr lang="zh-CN" dirty="0"/>
-              <a:t>课堂实操（40 分钟，不看答案）：</a:t>
-            </a:r>
-          </a:p>
-          <a:p>
-            <a:r>
-              <a:rPr lang="zh-CN" dirty="0"/>
-              <a:t>· 现场实现左右移动（不许看答案）</a:t>
-            </a:r>
-          </a:p>
-          <a:p>
-            <a:r>
-              <a:rPr lang="zh-CN" dirty="0"/>
-              <a:t>· 故意删掉边界判断，看飞船飞出屏幕</a:t>
-            </a:r>
-          </a:p>
-          <a:p>
-            <a:r>
-              <a:rPr lang="zh-CN" dirty="0"/>
-              <a:t>· 把飞船速度改成 3，观察手感变化</a:t>
-            </a:r>
-          </a:p>
-          <a:p>
-            <a:r>
-              <a:rPr lang="zh-CN" dirty="0"/>
-              <a:t/>
-            </a:r>
-          </a:p>
-          <a:p>
-            <a:r>
-              <a:rPr lang="zh-CN" dirty="0"/>
-              <a:t>课后作业：</a:t>
-            </a:r>
-          </a:p>
-          <a:p>
-            <a:r>
-              <a:rPr lang="zh-CN" dirty="0"/>
-              <a:t>· 完成教材 12.6 全部动手练</a:t>
-            </a:r>
-          </a:p>
-          <a:p>
-            <a:r>
-              <a:rPr lang="zh-CN" dirty="0"/>
-              <a:t/>
-            </a:r>
-          </a:p>
-          <a:p>
-            <a:r>
-              <a:rPr lang="zh-CN" dirty="0"/>
-              <a:t>节奏：讲 20 分钟 → 学员自己敲 40 分钟（不看答案）→ 对讲评自查 20 分钟 → 写作业 10 分钟。</a:t>
-            </a:r>
-          </a:p>
-        </p:txBody>
-      </p:sp>
-    </p:spTree>
-  </p:cSld>
-  <p:clrMapOvr>
-    <a:masterClrMapping/>
-  </p:clrMapOvr>
-</p:notes>
-</file>
-
-<file path=ppt/notesSlides/notesSlide9.xml><?xml version="1.0" encoding="utf-8"?>
-<p:notes xmlns:a="http://schemas.openxmlformats.org/drawingml/2006/main" xmlns:p="http://schemas.openxmlformats.org/presentationml/2006/main" xmlns:r="http://schemas.openxmlformats.org/officeDocument/2006/relationships">
-  <p:cSld>
-    <p:spTree>
-      <p:nvGrpSpPr>
-        <p:cNvPr id="1" name=""/>
-        <p:cNvGrpSpPr/>
-        <p:nvPr/>
-      </p:nvGrpSpPr>
-      <p:grpSpPr>
-        <a:xfrm>
-          <a:off x="0" y="0"/>
-          <a:ext cx="0" cy="0"/>
-          <a:chOff x="0" y="0"/>
-          <a:chExt cx="0" cy="0"/>
-        </a:xfrm>
-      </p:grpSpPr>
-      <p:sp>
-        <p:nvSpPr>
-          <p:cNvPr id="2" name="讲课提示"/>
-          <p:cNvSpPr txBox="1"/>
-          <p:nvPr/>
-        </p:nvSpPr>
-        <p:spPr>
-          <a:xfrm>
-            <a:off x="457200" y="457200"/>
-            <a:ext cx="6858000" cy="4800600"/>
-          </a:xfrm>
-          <a:prstGeom prst="rect">
-            <a:avLst/>
-          </a:prstGeom>
-        </p:spPr>
-        <p:txBody>
-          <a:bodyPr wrap="square"/>
-          <a:lstStyle/>
-          <a:p>
-            <a:r>
-              <a:rPr lang="zh-CN" dirty="0"/>
-              <a:t>第 68 节 · 核心知识点：驾驶飞船：标志位与边界</a:t>
-            </a:r>
-          </a:p>
-          <a:p>
-            <a:r>
-              <a:rPr lang="zh-CN" dirty="0"/>
-              <a:t/>
-            </a:r>
-          </a:p>
-          <a:p>
-            <a:r>
-              <a:rPr lang="zh-CN" dirty="0"/>
-              <a:t>讲这一页时：先让学生说出上节课的结论，再逐块讲要点。</a:t>
-            </a:r>
-          </a:p>
-          <a:p>
-            <a:r>
-              <a:rPr lang="zh-CN" dirty="0"/>
-              <a:t>每讲完一块，问一句「这一步如果写错了，报错会长什么样？」——把错误提前讲。</a:t>
-            </a:r>
-          </a:p>
-          <a:p>
-            <a:r>
-              <a:rPr lang="zh-CN" dirty="0"/>
-              <a:t/>
-            </a:r>
-          </a:p>
-          <a:p>
-            <a:r>
-              <a:rPr lang="zh-CN" dirty="0"/>
-              <a:t>本节目标：用 moving_right 标志位实现持续移动；用 screen_rect 限制活动范围</a:t>
-            </a:r>
-          </a:p>
-          <a:p>
-            <a:r>
-              <a:rPr lang="zh-CN" dirty="0"/>
-              <a:t/>
-            </a:r>
-          </a:p>
-          <a:p>
-            <a:r>
-              <a:rPr lang="zh-CN" dirty="0"/>
-              <a:t>看不到懂的地方，回讲义对应小节读一遍，再回来对着这页复述一次——能讲出来才算真懂。</a:t>
-            </a:r>
-          </a:p>
-        </p:txBody>
-      </p:sp>
-      <p:sp>
-        <p:nvSpPr>
-          <p:cNvPr id="2" name="讲课提示"/>
-          <p:cNvSpPr txBox="1"/>
-          <p:nvPr/>
-        </p:nvSpPr>
-        <p:spPr>
-          <a:xfrm>
-            <a:off x="457200" y="457200"/>
-            <a:ext cx="6858000" cy="4800600"/>
-          </a:xfrm>
-          <a:prstGeom prst="rect">
-            <a:avLst/>
-          </a:prstGeom>
-        </p:spPr>
-        <p:txBody>
-          <a:bodyPr wrap="square"/>
-          <a:lstStyle/>
-          <a:p>
-            <a:r>
-              <a:rPr lang="zh-CN" dirty="0"/>
-              <a:t>第 68 节 · 核心知识点：驾驶飞船：标志位与边界</a:t>
-            </a:r>
-          </a:p>
-          <a:p>
-            <a:r>
-              <a:rPr lang="zh-CN" dirty="0"/>
-              <a:t/>
-            </a:r>
-          </a:p>
-          <a:p>
-            <a:r>
-              <a:rPr lang="zh-CN" dirty="0"/>
-              <a:t>讲这一页时：先让学生说出上节课的结论，再逐块讲要点。</a:t>
-            </a:r>
-          </a:p>
-          <a:p>
-            <a:r>
-              <a:rPr lang="zh-CN" dirty="0"/>
-              <a:t>每讲完一块，问一句「这一步如果写错了，报错会长什么样？」——把错误提前讲。</a:t>
-            </a:r>
-          </a:p>
-          <a:p>
-            <a:r>
-              <a:rPr lang="zh-CN" dirty="0"/>
-              <a:t/>
-            </a:r>
-          </a:p>
-          <a:p>
-            <a:r>
-              <a:rPr lang="zh-CN" dirty="0"/>
-              <a:t>本节目标：用 moving_right 标志位实现持续移动；用 screen_rect 限制活动范围</a:t>
-            </a:r>
-          </a:p>
-          <a:p>
-            <a:r>
-              <a:rPr lang="zh-CN" dirty="0"/>
-              <a:t/>
-            </a:r>
-          </a:p>
-          <a:p>
-            <a:r>
-              <a:rPr lang="zh-CN" dirty="0"/>
-              <a:t>看不到懂的地方，回讲义对应小节读一遍，再回来对着这页复述一次——能讲出来才算真懂。</a:t>
-            </a:r>
-          </a:p>
-        </p:txBody>
-      </p:sp>
-    </p:spTree>
-  </p:cSld>
-  <p:clrMapOvr>
-    <a:masterClrMapping/>
-  </p:clrMapOvr>
-</p:notes>
-</file>
-
 <file path=ppt/slideLayouts/slideLayout1.xml><?xml version="1.0" encoding="utf-8"?>
 <p:sldLayout xmlns:p="http://schemas.openxmlformats.org/presentationml/2006/main" xmlns:a="http://schemas.openxmlformats.org/drawingml/2006/main">
   <p:cSld name="DEFAULT">
@@ -2823,7 +555,7 @@
   <p:cSld>
     <p:spTree>
       <p:nvGrpSpPr>
-        <p:cNvPr id="1" name="" descr="&lt;Slide style={{ width: '1280px', height: '720px', backgroundColor: '#FAFCFE', padding: 0, position: 'relative', overflow: 'hidden' }}&gt;&#13;&#10;    &lt;Box style={{ position: 'absolute', left: 0, top: 0, width: '1280px', height: '150px', background: '#1F5FA8' }} /&gt;&#13;&#10;    &lt;Box style={{ position: 'absolute', left: 64, top: 34, width: '1152px', flexDirection: 'column' }}&gt;&#13;&#10;        &lt;Text style={{ fontSize: 15, fontWeight: 'bold', color: '#BFD9F2', letterSpacing: 2 }}&gt;阶段 2 · 单元 12&lt;/Text&gt;&#13;&#10;        &lt;Text style={{ fontSize: 38, fontWeight: 'bold', color: '#FFFFFF', marginTop: 6 }}&gt;Pygame 起步与飞船驾驶&lt;/Text&gt;&#13;&#10;    &lt;/Box&gt;&#13;&#10;    &lt;Box style={{ position: 'absolute', left: 64, top: 168, width: '1152px', height: 470 }}&gt;&#13;&#10;        &lt;svg width='1152' height='470' viewBox='0 0 1152 470'&gt;&#13;&#10;            &lt;text x='0' y='18' fontSize='15' fontWeight='bold' fill='#16232E' fontFamily='Microsoft YaHei'&gt;本单元共 5 节课&lt;/text&gt;&#13;&#10;            &lt;rect x='0' y='196' width='1152' height='38' rx='7' fill='#FFFFFF' /&gt;&lt;text x='16' y='221' fontSize='15' fontWeight='bold' fill='#1F5FA8' fontFamily='Microsoft YaHei'&gt;第 65 节&lt;/text&gt;&lt;text x='96' y='221' fontSize='15' fill='#16232E' fontFamily='Microsoft YaHei'&gt;项目规划与安装 Pygame&lt;/text&gt;&lt;text x='1080' y='221' fontSize='13' fill='#5A6B7A' textAnchor='end' fontFamily='Microsoft YaHei'&gt;W14&lt;/text&gt;&lt;rect x='0' y='238' width='1152' height='38' rx='7' fill='#F2F7FD' /&gt;&lt;text x='16' y='263' fontSize='15' fontWeight='bold' fill='#1F5FA8' fontFamily='Microsoft YaHei'&gt;第 66 节&lt;/text&gt;&lt;text x='96' y='263' fontSize='15' fill='#16232E' fontFamily='Microsoft YaHei'&gt;主循环、帧率与事件驱动&lt;/text&gt;&lt;text x='1080' y='263' fontSize='13' fill='#5A6B7A' textAnchor='end' fontFamily='Microsoft YaHei'&gt;W14&lt;/text&gt;&lt;rect x='0' y='280' width='1152' height='38' rx='7' fill='#FFFFFF' /&gt;&lt;text x='16' y='305' fontSize='15' fontWeight='bold' fill='#1F5FA8' fontFamily='Microsoft YaHei'&gt;第 67 节&lt;/text&gt;&lt;text x='96' y='305' fontSize='15' fill='#16232E' fontFamily='Microsoft YaHei'&gt;Settings 类与屏幕矩形&lt;/text&gt;&lt;text x='1080' y='305' fontSize='13' fill='#5A6B7A' textAnchor='end' fontFamily='Microsoft YaHei'&gt;W14&lt;/text&gt;&lt;rect x='0' y='322' width='1152' height='38' rx='7' fill='#F2F7FD' /&gt;&lt;text x='16' y='347' fontSize='15' fontWeight='bold' fill='#1F5FA8' fontFamily='Microsoft YaHei'&gt;第 68 节&lt;/text&gt;&lt;text x='96' y='347' fontSize='15' fill='#16232E' fontFamily='Microsoft YaHei'&gt;驾驶飞船：标志位与边界&lt;/text&gt;&lt;text x='1080' y='347' fontSize='13' fill='#5A6B7A' textAnchor='end' fontFamily='Microsoft YaHei'&gt;W14&lt;/text&gt;&lt;rect x='0' y='364' width='1152' height='38' rx='7' fill='#FFFFFF' /&gt;&lt;text x='16' y='389' fontSize='15' fontWeight='bold' fill='#1F5FA8' fontFamily='Microsoft YaHei'&gt;第 69 节&lt;/text&gt;&lt;text x='96' y='389' fontSize='15' fill='#16232E' fontFamily='Microsoft YaHei'&gt;重构、错误自查与验收&lt;/text&gt;&lt;text x='1080' y='389' fontSize='13' fill='#5A6B7A' textAnchor='end' fontFamily='Microsoft YaHei'&gt;W14&lt;/text&gt;&#13;&#10;        &lt;/svg&gt;&#13;&#10;    &lt;/Box&gt;&#13;&#10;    &lt;Box style={{ position: 'absolute', left: 64, bottom: 22, width: '1152px', flexDirection: 'row', justifyContent: 'space-between' }}&gt;&#13;&#10;        &lt;Text style={{ fontSize: 13, color: '#8A9AAA' }}&gt;Python 讲授课件 · 逐节版&lt;/Text&gt;&#13;&#10;        &lt;Text style={{ fontSize: 13, color: '#8A9AAA' }}&gt;单元 12 · 封面&lt;/Text&gt;&#13;&#10;    &lt;/Box&gt;&#13;&#10;&lt;/Slide&gt;&#13;&#10;"/>
+        <p:cNvPr id="1" name="" descr="&lt;Slide style={{ width: '1280px', height: '720px', backgroundColor: '#FAFCFE', padding: 0, position: 'relative', overflow: 'hidden' }}&gt;&#13;&#10;    &lt;Box style={{ position: 'absolute', left: 0, top: 0, width: '1280px', height: '150px', background: '#1F5FA8' }} /&gt;&#13;&#10;    &lt;Box style={{ position: 'absolute', left: 64, top: 34, width: '1152px', flexDirection: 'column' }}&gt;&#13;&#10;        &lt;Text style={{ fontSize: 15, fontWeight: 'bold', color: '#BFD9F2', letterSpacing: 2 }}&gt;阶段 2 · 单元 12&lt;/Text&gt;&#13;&#10;        &lt;Text style={{ fontSize: 38, fontWeight: 'bold', color: '#FFFFFF', marginTop: 6 }}&gt;Pygame 起步与飞船驾驶&lt;/Text&gt;&#13;&#10;    &lt;/Box&gt;&#13;&#10;    &lt;Box style={{ position: 'absolute', left: 64, top: 168, width: '1152px', height: 470 }}&gt;&#13;&#10;        &lt;svg width='1152' height='470' viewBox='0 0 1152 470'&gt;&#13;&#10;            &lt;text x='0' y='18' fontSize='15' fontWeight='bold' fill='#16232E' fontFamily='Microsoft YaHei'&gt;本单元共 5 节课&lt;/text&gt;&#13;&#10;            &lt;rect x='0' y='56.0' width='1152' height='48.0' rx='7' fill='#FFFFFF' /&gt;&lt;text x='16' y='85.0' fontSize='15' fontWeight='bold' fill='#1F5FA8' fontFamily='Microsoft YaHei'&gt;第 65 节&lt;/text&gt;&lt;text x='96' y='85.0' fontSize='15' fill='#16232E' fontFamily='Microsoft YaHei'&gt;项目规划与安装 Pygame&lt;/text&gt;&lt;text x='1080' y='85.0' fontSize='13' fill='#5A6B7A' textAnchor='end' fontFamily='Microsoft YaHei'&gt;W14&lt;/text&gt;&lt;rect x='0' y='135.2' width='1152' height='48.0' rx='7' fill='#F2F7FD' /&gt;&lt;text x='16' y='164.2' fontSize='15' fontWeight='bold' fill='#1F5FA8' fontFamily='Microsoft YaHei'&gt;第 66 节&lt;/text&gt;&lt;text x='96' y='164.2' fontSize='15' fill='#16232E' fontFamily='Microsoft YaHei'&gt;主循环、帧率与事件驱动&lt;/text&gt;&lt;text x='1080' y='164.2' fontSize='13' fill='#5A6B7A' textAnchor='end' fontFamily='Microsoft YaHei'&gt;W14&lt;/text&gt;&lt;rect x='0' y='214.4' width='1152' height='48.0' rx='7' fill='#FFFFFF' /&gt;&lt;text x='16' y='243.4' fontSize='15' fontWeight='bold' fill='#1F5FA8' fontFamily='Microsoft YaHei'&gt;第 67 节&lt;/text&gt;&lt;text x='96' y='243.4' fontSize='15' fill='#16232E' fontFamily='Microsoft YaHei'&gt;Settings 类与屏幕矩形&lt;/text&gt;&lt;text x='1080' y='243.4' fontSize='13' fill='#5A6B7A' textAnchor='end' fontFamily='Microsoft YaHei'&gt;W14&lt;/text&gt;&lt;rect x='0' y='293.6' width='1152' height='48.0' rx='7' fill='#F2F7FD' /&gt;&lt;text x='16' y='322.6' fontSize='15' fontWeight='bold' fill='#1F5FA8' fontFamily='Microsoft YaHei'&gt;第 68 节&lt;/text&gt;&lt;text x='96' y='322.6' fontSize='15' fill='#16232E' fontFamily='Microsoft YaHei'&gt;驾驶飞船：标志位与边界&lt;/text&gt;&lt;text x='1080' y='322.6' fontSize='13' fill='#5A6B7A' textAnchor='end' fontFamily='Microsoft YaHei'&gt;W14&lt;/text&gt;&lt;rect x='0' y='372.8' width='1152' height='48.0' rx='7' fill='#FFFFFF' /&gt;&lt;text x='16' y='401.8' fontSize='15' fontWeight='bold' fill='#1F5FA8' fontFamily='Microsoft YaHei'&gt;第 69 节&lt;/text&gt;&lt;text x='96' y='401.8' fontSize='15' fill='#16232E' fontFamily='Microsoft YaHei'&gt;重构、错误自查与验收&lt;/text&gt;&lt;text x='1080' y='401.8' fontSize='13' fill='#5A6B7A' textAnchor='end' fontFamily='Microsoft YaHei'&gt;W14&lt;/text&gt;&#13;&#10;        &lt;/svg&gt;&#13;&#10;    &lt;/Box&gt;&#13;&#10;    &lt;Box style={{ position: 'absolute', left: 64, bottom: 22, width: '1152px', flexDirection: 'row', justifyContent: 'space-between' }}&gt;&#13;&#10;        &lt;Text style={{ fontSize: 13, color: '#8A9AAA' }}&gt;Python 讲授课件 · 逐节版&lt;/Text&gt;&#13;&#10;        &lt;Text style={{ fontSize: 13, color: '#8A9AAA' }}&gt;单元 12 · 封面&lt;/Text&gt;&#13;&#10;    &lt;/Box&gt;&#13;&#10;&lt;/Slide&gt;&#13;&#10;"/>
         <p:cNvGrpSpPr/>
         <p:nvPr/>
       </p:nvGrpSpPr>
@@ -3347,7 +1079,7 @@
   <p:cSld>
     <p:spTree>
       <p:nvGrpSpPr>
-        <p:cNvPr id="15" name="" descr="&lt;Slide style={{ width: '1280px', height: '720px', backgroundColor: '#FAFCFE', padding: 0, position: 'relative', overflow: 'hidden' }}&gt;&#13;&#10;    &lt;Box style={{ position: 'absolute', left: 64, top: 36, width: '1152px', flexDirection: 'row', alignItems: 'center', gap: 12 }}&gt;&#13;&#10;        &lt;Box style={{ background: '#0E9B78', borderRadius: 5, padding: '3px 11px' }}&gt;&#13;&#10;            &lt;Text style={{ fontSize: 14, fontWeight: 'bold', color: '#FFFFFF' }}&gt;第 69 节&lt;/Text&gt;&#13;&#10;        &lt;/Box&gt;&#13;&#10;        &lt;Text style={{ fontSize: 30, fontWeight: 'bold', color: '#16232E' }}&gt;核心知识点&lt;/Text&gt;&#13;&#10;        &lt;Text style={{ fontSize: 15, color: '#5A6B7A', marginTop: 10 }}&gt;· 重构、错误自查与验收&lt;/Text&gt;&#13;&#10;    &lt;/Box&gt;&#13;&#10;    &lt;Box style={{ position: 'absolute', left: 0, top: 0, width: '1280px', height: '720px' }}&gt;&#13;&#10;        &lt;svg width='1280' height='720' viewBox='0 0 1280 720'&gt;&#13;&#10;            &lt;rect x='64' y='96' width='368' height='330' rx='12' fill='#FFFFFF' stroke='#D8E3EE' /&gt;&lt;rect x='64' y='96' width='368' height='4' rx='2' fill='#1F5FA8' /&gt;&lt;text x='82' y='130' fontSize='15.5' fontWeight='bold' fill='#1F5FA8' textAnchor='start' fontFamily='Microsoft YaHei'&gt;基础档&lt;/text&gt;&lt;text x='82' y='169.0' fontSize='13' fill='#3A4A58' textAnchor='start' fontFamily='Microsoft YaHei'&gt;· 练习 12-1【给 Settings 增加两组设置】&lt;/text&gt;&lt;text x='82' y='197.5' fontSize='13' fill='#3A4A58' textAnchor='start' fontFamily='Microsoft YaHei'&gt;· 练习 12-2【按键切换背景色】&lt;/text&gt;&lt;text x='82' y='226.0' fontSize='13' fill='#3A4A58' textAnchor='start' fontFamily='Microsoft YaHei'&gt;· 练习 12-3【飞船撞墙就停】&lt;/text&gt;&lt;rect x='468' y='96' width='368' height='330' rx='12' fill='#FFFFFF' stroke='#D8E3EE' /&gt;&lt;rect x='468' y='96' width='368' height='4' rx='2' fill='#1F5FA8' /&gt;&lt;text x='486' y='130' fontSize='15.5' fontWeight='bold' fill='#1F5FA8' textAnchor='start' fontFamily='Microsoft YaHei'&gt;进阶档&lt;/text&gt;&lt;text x='486' y='169.0' fontSize='13' fill='#3A4A58' textAnchor='start' fontFamily='Microsoft YaHei'&gt;· 练习 12-4【让飞船也能上下移动】（教材未涉及，补充&lt;/text&gt;&lt;text x='486' y='188.5' fontSize='13' fill='#3A4A58' textAnchor='start' fontFamily='Microsoft YaHei'&gt;说明）&lt;/text&gt;&lt;text x='486' y='217.0' fontSize='13' fill='#3A4A58' textAnchor='start' fontFamily='Microsoft YaHei'&gt;· 练习 12-5【写一个帧率观察器】&lt;/text&gt;&lt;text x='486' y='245.5' fontSize='13' fill='#3A4A58' textAnchor='start' fontFamily='Microsoft YaHei'&gt;· 练习 12-6【把臃肿的主循环重构成两个辅助方法】&lt;/text&gt;&lt;rect x='872' y='96' width='368' height='330' rx='12' fill='#FFFFFF' stroke='#D8E3EE' /&gt;&lt;rect x='872' y='96' width='368' height='4' rx='2' fill='#1F5FA8' /&gt;&lt;text x='890' y='130' fontSize='15.5' fontWeight='bold' fill='#1F5FA8' textAnchor='start' fontFamily='Microsoft YaHei'&gt;参考答案 12-1&lt;/text&gt;&lt;text x='890' y='169.0' fontSize='13' fill='#3A4A58' textAnchor='start' fontFamily='Microsoft YaHei'&gt;· class Settings:&lt;/text&gt;&lt;text x='64' y='470' fontSize='14.5' fontWeight='bold' fill='#0E9B78' textAnchor='start' fontFamily='Microsoft YaHei'&gt;本节的代码示例&lt;/text&gt;&lt;text x='64' y='500' fontSize='13' fill='#3A4A58' textAnchor='start' fontFamily='Microsoft YaHei'&gt;· settings.py——把会变的数值集中管理&lt;/text&gt;&lt;text x='468' y='500' fontSize='13' fill='#3A4A58' textAnchor='start' fontFamily='Microsoft YaHei'&gt;· alien_invasion.py——最小窗口骨架&lt;/text&gt;&lt;text x='872' y='500' fontSize='13' fill='#3A4A58' textAnchor='start' fontFamily='Microsoft YaHei'&gt;· event_observer.py——亲眼看看「事件队列」里有…&lt;/text&gt;&lt;rect x='64' y='574' width='1152' height='66' rx='12' fill='#EEF5FB' /&gt;&lt;text x='84' y='616' fontSize='14' fill='#243444' textAnchor='start' fontFamily='Microsoft YaHei'&gt;看不懂的地方先回讲义对应小节读一遍，再回来对着这页复述一次——能讲出来才算真懂。&lt;/text&gt;&#13;&#10;            &lt;text x='64' y='684' fontSize='13' fill='#8A9AAA' fontFamily='Microsoft YaHei'&gt;Python 讲授课件 · 逐节版&lt;/text&gt;&#13;&#10;            &lt;text x='1216' y='684' fontSize='13' fill='#8A9AAA' textAnchor='end' fontFamily='Microsoft YaHei'&gt;单元 12 · 第 69 节&lt;/text&gt;&#13;&#10;        &lt;/svg&gt;&#13;&#10;    &lt;/Box&gt;&#13;&#10;&lt;/Slide&gt;&#13;&#10;"/>
+        <p:cNvPr id="15" name="" descr="&lt;Slide style={{ width: '1280px', height: '720px', backgroundColor: '#FAFCFE', padding: 0, position: 'relative', overflow: 'hidden' }}&gt;&#13;&#10;    &lt;Box style={{ position: 'absolute', left: 64, top: 36, width: '1152px', flexDirection: 'row', alignItems: 'center', gap: 12 }}&gt;&#13;&#10;        &lt;Box style={{ background: '#0E9B78', borderRadius: 5, padding: '3px 11px' }}&gt;&#13;&#10;            &lt;Text style={{ fontSize: 14, fontWeight: 'bold', color: '#FFFFFF' }}&gt;第 69 节&lt;/Text&gt;&#13;&#10;        &lt;/Box&gt;&#13;&#10;        &lt;Text style={{ fontSize: 30, fontWeight: 'bold', color: '#16232E' }}&gt;核心知识点&lt;/Text&gt;&#13;&#10;        &lt;Text style={{ fontSize: 15, color: '#5A6B7A', marginTop: 10 }}&gt;· 重构、错误自查与验收&lt;/Text&gt;&#13;&#10;    &lt;/Box&gt;&#13;&#10;    &lt;Box style={{ position: 'absolute', left: 0, top: 0, width: '1280px', height: '720px' }}&gt;&#13;&#10;        &lt;svg width='1280' height='720' viewBox='0 0 1280 720'&gt;&#13;&#10;            &lt;rect x='64' y='96' width='368' height='330' rx='12' fill='#FFFFFF' stroke='#D8E3EE' /&gt;&lt;rect x='64' y='96' width='368' height='4' rx='2' fill='#1F5FA8' /&gt;&lt;text x='82' y='130' fontSize='15.5' fontWeight='bold' fill='#1F5FA8' textAnchor='start' fontFamily='Microsoft YaHei'&gt;基础档&lt;/text&gt;&lt;text x='82' y='169.0' fontSize='13' fill='#3A4A58' textAnchor='start' fontFamily='Microsoft YaHei'&gt;· 练习 12-1【给 Settings 增加两组设置】&lt;/text&gt;&lt;text x='82' y='197.5' fontSize='13' fill='#3A4A58' textAnchor='start' fontFamily='Microsoft YaHei'&gt;· 练习 12-2【按键切换背景色】&lt;/text&gt;&lt;text x='82' y='226.0' fontSize='13' fill='#3A4A58' textAnchor='start' fontFamily='Microsoft YaHei'&gt;· 练习 12-3【飞船撞墙就停】&lt;/text&gt;&lt;rect x='468' y='96' width='368' height='330' rx='12' fill='#FFFFFF' stroke='#D8E3EE' /&gt;&lt;rect x='468' y='96' width='368' height='4' rx='2' fill='#1F5FA8' /&gt;&lt;text x='486' y='130' fontSize='15.5' fontWeight='bold' fill='#1F5FA8' textAnchor='start' fontFamily='Microsoft YaHei'&gt;进阶档&lt;/text&gt;&lt;text x='486' y='169.0' fontSize='13' fill='#3A4A58' textAnchor='start' fontFamily='Microsoft YaHei'&gt;· 练习 12-4【让飞船也能上下移动】（教材未涉及，&lt;/text&gt;&lt;text x='486' y='188.5' fontSize='13' fill='#3A4A58' textAnchor='start' fontFamily='Microsoft YaHei'&gt;补充说明）&lt;/text&gt;&lt;text x='486' y='217.0' fontSize='13' fill='#3A4A58' textAnchor='start' fontFamily='Microsoft YaHei'&gt;· 练习 12-5【写一个帧率观察器】&lt;/text&gt;&lt;text x='486' y='245.5' fontSize='13' fill='#3A4A58' textAnchor='start' fontFamily='Microsoft YaHei'&gt;· 练习 12-6【把臃肿的主循环重构成两个辅助方法】&lt;/text&gt;&lt;rect x='872' y='96' width='368' height='330' rx='12' fill='#FFFFFF' stroke='#D8E3EE' /&gt;&lt;rect x='872' y='96' width='368' height='4' rx='2' fill='#1F5FA8' /&gt;&lt;text x='890' y='130' fontSize='15.5' fontWeight='bold' fill='#1F5FA8' textAnchor='start' fontFamily='Microsoft YaHei'&gt;参考答案 12-1&lt;/text&gt;&lt;text x='890' y='169.0' fontSize='13' fill='#3A4A58' textAnchor='start' fontFamily='Microsoft YaHei'&gt;· 这两组设置现在虽然还没被用到，但第 13&lt;/text&gt;&lt;text x='890' y='188.5' fontSize='13' fill='#3A4A58' textAnchor='start' fontFamily='Microsoft YaHei'&gt;章会原样接手——这就是提前规划的回报。&lt;/text&gt;&lt;text x='64' y='470' fontSize='14.5' fontWeight='bold' fill='#0E9B78' textAnchor='start' fontFamily='Microsoft YaHei'&gt;本节的代码示例&lt;/text&gt;&lt;text x='64' y='500' fontSize='13' fill='#3A4A58' textAnchor='start' fontFamily='Microsoft YaHei'&gt;· settings.py——把会变的数值集中管理&lt;/text&gt;&lt;text x='468' y='500' fontSize='13' fill='#3A4A58' textAnchor='start' fontFamily='Microsoft YaHei'&gt;· alien_invasion.py——最小窗口骨架&lt;/text&gt;&lt;text x='872' y='500' fontSize='13' fill='#3A4A58' textAnchor='start' fontFamily='Microsoft YaHei'&gt;· event_observer.py——亲眼看看「事件队列」里有…&lt;/text&gt;&lt;rect x='64' y='574' width='1152' height='66' rx='12' fill='#EEF5FB' /&gt;&lt;text x='84' y='616' fontSize='14' fill='#243444' textAnchor='start' fontFamily='Microsoft YaHei'&gt;看不懂的地方先回讲义对应小节读一遍，再回来对着这页复述一次——能讲出来才算真懂。&lt;/text&gt;&#13;&#10;            &lt;text x='64' y='684' fontSize='13' fill='#8A9AAA' fontFamily='Microsoft YaHei'&gt;Python 讲授课件 · 逐节版&lt;/text&gt;&#13;&#10;            &lt;text x='1216' y='684' fontSize='13' fill='#8A9AAA' textAnchor='end' fontFamily='Microsoft YaHei'&gt;单元 12 · 第 69 节&lt;/text&gt;&#13;&#10;        &lt;/svg&gt;&#13;&#10;    &lt;/Box&gt;&#13;&#10;&lt;/Slide&gt;&#13;&#10;"/>
         <p:cNvGrpSpPr/>
         <p:nvPr/>
       </p:nvGrpSpPr>
@@ -4388,7 +2120,7 @@
   <p:cSld>
     <p:spTree>
       <p:nvGrpSpPr>
-        <p:cNvPr id="42" name="" descr="&lt;Slide style={{ width: '1280px', height: '720px', backgroundColor: '#FAFCFE', padding: 0, position: 'relative', overflow: 'hidden' }}&gt;&#13;&#10;    &lt;Box style={{ position: 'absolute', left: 64, top: 36, width: '1152px', flexDirection: 'row', alignItems: 'center', gap: 12 }}&gt;&#13;&#10;        &lt;Box style={{ background: '#0E9B78', borderRadius: 5, padding: '3px 11px' }}&gt;&#13;&#10;            &lt;Text style={{ fontSize: 14, fontWeight: 'bold', color: '#FFFFFF' }}&gt;第 65 节&lt;/Text&gt;&#13;&#10;        &lt;/Box&gt;&#13;&#10;        &lt;Text style={{ fontSize: 30, fontWeight: 'bold', color: '#16232E' }}&gt;核心知识点&lt;/Text&gt;&#13;&#10;        &lt;Text style={{ fontSize: 15, color: '#5A6B7A', marginTop: 10 }}&gt;· 项目规划与安装 Pygame&lt;/Text&gt;&#13;&#10;    &lt;/Box&gt;&#13;&#10;    &lt;Box style={{ position: 'absolute', left: 0, top: 0, width: '1280px', height: '720px' }}&gt;&#13;&#10;        &lt;svg width='1280' height='720' viewBox='0 0 1280 720'&gt;&#13;&#10;            &lt;rect x='64' y='96' width='548' height='330' rx='12' fill='#FFFFFF' stroke='#D8E3EE' /&gt;&lt;rect x='64' y='96' width='548' height='4' rx='2' fill='#1F5FA8' /&gt;&lt;text x='82' y='130' fontSize='15.5' fontWeight='bold' fill='#1F5FA8' textAnchor='start' fontFamily='Microsoft YaHei'&gt;2.1 规划项目：为什么一个游戏要拆成三个文件&lt;/text&gt;&lt;text x='82' y='169.0' fontSize='13' fill='#3A4A58' textAnchor='start' fontFamily='Microsoft YaHei'&gt;· 这条分工原则是整个项目的地基：主循环保持「薄」，逻辑下沉到各个类。第 13 章加&lt;/text&gt;&lt;text x='82' y='188.5' fontSize='13' fill='#3A4A58' textAnchor='start' fontFamily='Microsoft YaHei'&gt;入子弹和外星人时，只要…&lt;/text&gt;&lt;rect x='668' y='96' width='548' height='330' rx='12' fill='#FFFFFF' stroke='#D8E3EE' /&gt;&lt;rect x='668' y='96' width='548' height='4' rx='2' fill='#1F5FA8' /&gt;&lt;text x='686' y='130' fontSize='15.5' fontWeight='bold' fill='#1F5FA8' textAnchor='start' fontFamily='Microsoft YaHei'&gt;2.2 安装 Pygame 与一个重要的环境提醒&lt;/text&gt;&lt;text x='686' y='169.0' fontSize='13' fill='#3A4A58' textAnchor='start' fontFamily='Microsoft YaHei'&gt;· 教材用的是 pygame，装它就行。社区有个更新更勤的分支 pygame-ce，API 完全一致&lt;/text&gt;&lt;text x='686' y='188.5' fontSize='13' fill='#3A4A58' textAnchor='start' fontFamily='Microsoft YaHei'&gt;，任选…&lt;/text&gt;&lt;text x='686' y='217.0' fontSize='13' fill='#3A4A58' textAnchor='start' fontFamily='Microsoft YaHei'&gt;· 验证安装：python -c &quot;import pygame; print(pygame.ver)&quot;，能…&lt;/text&gt;&lt;text x='686' y='245.5' fontSize='13' fill='#3A4A58' textAnchor='start' fontFamily='Microsoft YaHei'&gt;· 环境提醒（重要，先看再跑代码）：Pygame 要打开真正的操作系统窗口。在服务器、SS&lt;/text&gt;&lt;text x='686' y='265.0' fontSize='13' fill='#3A4A58' textAnchor='start' fontFamily='Microsoft YaHei'&gt;H 或某些虚拟环…&lt;/text&gt;&lt;rect x='64' y='574' width='1152' height='66' rx='12' fill='#EEF5FB' /&gt;&lt;text x='84' y='616' fontSize='14' fill='#243444' textAnchor='start' fontFamily='Microsoft YaHei'&gt;看不懂的地方先回讲义对应小节读一遍，再回来对着这页复述一次——能讲出来才算真懂。&lt;/text&gt;&#13;&#10;            &lt;text x='64' y='684' fontSize='13' fill='#8A9AAA' fontFamily='Microsoft YaHei'&gt;Python 讲授课件 · 逐节版&lt;/text&gt;&#13;&#10;            &lt;text x='1216' y='684' fontSize='13' fill='#8A9AAA' textAnchor='end' fontFamily='Microsoft YaHei'&gt;单元 12 · 第 65 节&lt;/text&gt;&#13;&#10;        &lt;/svg&gt;&#13;&#10;    &lt;/Box&gt;&#13;&#10;&lt;/Slide&gt;&#13;&#10;"/>
+        <p:cNvPr id="42" name="" descr="&lt;Slide style={{ width: '1280px', height: '720px', backgroundColor: '#FAFCFE', padding: 0, position: 'relative', overflow: 'hidden' }}&gt;&#13;&#10;    &lt;Box style={{ position: 'absolute', left: 64, top: 36, width: '1152px', flexDirection: 'row', alignItems: 'center', gap: 12 }}&gt;&#13;&#10;        &lt;Box style={{ background: '#0E9B78', borderRadius: 5, padding: '3px 11px' }}&gt;&#13;&#10;            &lt;Text style={{ fontSize: 14, fontWeight: 'bold', color: '#FFFFFF' }}&gt;第 65 节&lt;/Text&gt;&#13;&#10;        &lt;/Box&gt;&#13;&#10;        &lt;Text style={{ fontSize: 30, fontWeight: 'bold', color: '#16232E' }}&gt;核心知识点&lt;/Text&gt;&#13;&#10;        &lt;Text style={{ fontSize: 15, color: '#5A6B7A', marginTop: 10 }}&gt;· 项目规划与安装 Pygame&lt;/Text&gt;&#13;&#10;    &lt;/Box&gt;&#13;&#10;    &lt;Box style={{ position: 'absolute', left: 0, top: 0, width: '1280px', height: '720px' }}&gt;&#13;&#10;        &lt;svg width='1280' height='720' viewBox='0 0 1280 720'&gt;&#13;&#10;            &lt;rect x='64' y='96' width='548' height='330' rx='12' fill='#FFFFFF' stroke='#D8E3EE' /&gt;&lt;rect x='64' y='96' width='548' height='4' rx='2' fill='#1F5FA8' /&gt;&lt;text x='82' y='130' fontSize='15.5' fontWeight='bold' fill='#1F5FA8' textAnchor='start' fontFamily='Microsoft YaHei'&gt;2.1 规划项目：为什么一个游戏要拆成三个文件&lt;/text&gt;&lt;text x='82' y='169.0' fontSize='13' fill='#3A4A58' textAnchor='start' fontFamily='Microsoft YaHei'&gt;· 这条分工原则是整个项目的地基&lt;/text&gt;&lt;rect x='668' y='96' width='548' height='330' rx='12' fill='#FFFFFF' stroke='#D8E3EE' /&gt;&lt;rect x='668' y='96' width='548' height='4' rx='2' fill='#1F5FA8' /&gt;&lt;text x='686' y='130' fontSize='15.5' fontWeight='bold' fill='#1F5FA8' textAnchor='start' fontFamily='Microsoft YaHei'&gt;2.2 安装 Pygame 与一个重要的环境提醒&lt;/text&gt;&lt;text x='686' y='169.0' fontSize='13' fill='#3A4A58' textAnchor='start' fontFamily='Microsoft YaHei'&gt;· 教材用的是 pygame，装它就行。社区有个更新更勤的分支 pygame-ce，API&lt;/text&gt;&lt;text x='686' y='188.5' fontSize='13' fill='#3A4A58' textAnchor='start' fontFamily='Microsoft YaHei'&gt;完全一致…&lt;/text&gt;&lt;text x='686' y='217.0' fontSize='13' fill='#3A4A58' textAnchor='start' fontFamily='Microsoft YaHei'&gt;· 验证安装：python -c &quot;import pygame; print(pygame.ver)&quot;…&lt;/text&gt;&lt;text x='686' y='245.5' fontSize='13' fill='#3A4A58' textAnchor='start' fontFamily='Microsoft YaHei'&gt;· 环境提醒（重要，先看再跑代码）&lt;/text&gt;&lt;rect x='64' y='574' width='1152' height='66' rx='12' fill='#EEF5FB' /&gt;&lt;text x='84' y='616' fontSize='14' fill='#243444' textAnchor='start' fontFamily='Microsoft YaHei'&gt;看不懂的地方先回讲义对应小节读一遍，再回来对着这页复述一次——能讲出来才算真懂。&lt;/text&gt;&#13;&#10;            &lt;text x='64' y='684' fontSize='13' fill='#8A9AAA' fontFamily='Microsoft YaHei'&gt;Python 讲授课件 · 逐节版&lt;/text&gt;&#13;&#10;            &lt;text x='1216' y='684' fontSize='13' fill='#8A9AAA' textAnchor='end' fontFamily='Microsoft YaHei'&gt;单元 12 · 第 65 节&lt;/text&gt;&#13;&#10;        &lt;/svg&gt;&#13;&#10;    &lt;/Box&gt;&#13;&#10;&lt;/Slide&gt;&#13;&#10;"/>
         <p:cNvGrpSpPr/>
         <p:nvPr/>
       </p:nvGrpSpPr>
@@ -4829,7 +2561,7 @@
   <p:cSld>
     <p:spTree>
       <p:nvGrpSpPr>
-        <p:cNvPr id="55" name="" descr="&lt;Slide style={{ width: '1280px', height: '720px', backgroundColor: '#FAFCFE', padding: 0, position: 'relative', overflow: 'hidden' }}&gt;&#13;&#10;    &lt;Box style={{ position: 'absolute', left: 64, top: 36, width: '1152px', flexDirection: 'row', alignItems: 'center', gap: 12 }}&gt;&#13;&#10;        &lt;Box style={{ background: '#0E9B78', borderRadius: 5, padding: '3px 11px' }}&gt;&#13;&#10;            &lt;Text style={{ fontSize: 14, fontWeight: 'bold', color: '#FFFFFF' }}&gt;第 66 节&lt;/Text&gt;&#13;&#10;        &lt;/Box&gt;&#13;&#10;        &lt;Text style={{ fontSize: 30, fontWeight: 'bold', color: '#16232E' }}&gt;核心知识点&lt;/Text&gt;&#13;&#10;        &lt;Text style={{ fontSize: 15, color: '#5A6B7A', marginTop: 10 }}&gt;· 主循环、帧率与事件驱动&lt;/Text&gt;&#13;&#10;    &lt;/Box&gt;&#13;&#10;    &lt;Box style={{ position: 'absolute', left: 0, top: 0, width: '1280px', height: '720px' }}&gt;&#13;&#10;        &lt;svg width='1280' height='720' viewBox='0 0 1280 720'&gt;&#13;&#10;            &lt;rect x='64' y='96' width='368' height='330' rx='12' fill='#FFFFFF' stroke='#D8E3EE' /&gt;&lt;rect x='64' y='96' width='368' height='4' rx='2' fill='#1F5FA8' /&gt;&lt;text x='82' y='130' fontSize='15.5' fontWeight='bold' fill='#1F5FA8' textAnchor='start' fontFamily='Microsoft YaHei'&gt;2.3 游戏主循环：while True 里的四步&lt;/text&gt;&lt;text x='82' y='169.0' fontSize='13' fill='#3A4A58' textAnchor='start' fontFamily='Microsoft YaHei'&gt;· 普通程序「从头跑到尾就结束」；游戏要一直待在原地响&lt;/text&gt;&lt;text x='82' y='188.5' fontSize='13' fill='#3A4A58' textAnchor='start' fontFamily='Microsoft YaHei'&gt;应你。实现方式就是一个死循环，教材叫它主循环（mai&lt;/text&gt;&lt;text x='82' y='208.0' fontSize='13' fill='#3A4A58' textAnchor='start' fontFamily='Microsoft YaHei'&gt;…&lt;/text&gt;&lt;rect x='468' y='96' width='368' height='330' rx='12' fill='#FFFFFF' stroke='#D8E3EE' /&gt;&lt;rect x='468' y='96' width='368' height='4' rx='2' fill='#1F5FA8' /&gt;&lt;text x='486' y='130' fontSize='15.5' fontWeight='bold' fill='#1F5FA8' textAnchor='start' fontFamily='Microsoft YaHei'&gt;2.4 帧率：为什么你的游戏在别人电脑上会「&lt;/text&gt;&lt;text x='486' y='153' fontSize='15.5' fontWeight='bold' fill='#1F5FA8' textAnchor='start' fontFamily='Microsoft YaHei'&gt;加速」&lt;/text&gt;&lt;text x='486' y='192.0' fontSize='13' fill='#3A4A58' textAnchor='start' fontFamily='Microsoft YaHei'&gt;· while True 有个隐藏问题：它转多快，完全由电脑的 &lt;/text&gt;&lt;text x='486' y='211.5' fontSize='13' fill='#3A4A58' textAnchor='start' fontFamily='Microsoft YaHei'&gt;CPU 和显卡决定。同一份代码，在你的游戏…&lt;/text&gt;&lt;rect x='872' y='96' width='368' height='330' rx='12' fill='#FFFFFF' stroke='#D8E3EE' /&gt;&lt;rect x='872' y='96' width='368' height='4' rx='2' fill='#1F5FA8' /&gt;&lt;text x='890' y='130' fontSize='15.5' fontWeight='bold' fill='#1F5FA8' textAnchor='start' fontFamily='Microsoft YaHei'&gt;2.5 事件驱动：游戏像一个前台接待&lt;/text&gt;&lt;text x='890' y='169.0' fontSize='13' fill='#3A4A58' textAnchor='start' fontFamily='Microsoft YaHei'&gt;· pygame.event.get() 取的是「积压的所有事件」，不&lt;/text&gt;&lt;text x='890' y='188.5' fontSize='13' fill='#3A4A58' textAnchor='start' fontFamily='Microsoft YaHei'&gt;是「刚刚发生的那一个」。你 1 秒没…&lt;/text&gt;&lt;text x='890' y='217.0' fontSize='13' fill='#3A4A58' textAnchor='start' fontFamily='Microsoft YaHei'&gt;· 每张表有类型：event.type。最常用的几种：&lt;/text&gt;&lt;text x='890' y='245.5' fontSize='13' fill='#3A4A58' textAnchor='start' fontFamily='Microsoft YaHei'&gt;· 同一次按键，还带细节：event.key 告诉你具体是哪个&lt;/text&gt;&lt;text x='890' y='265.0' fontSize='13' fill='#3A4A58' textAnchor='start' fontFamily='Microsoft YaHei'&gt;键，比如 pygame.K_RIGHT（右方…&lt;/text&gt;&lt;rect x='64' y='574' width='1152' height='66' rx='12' fill='#EEF5FB' /&gt;&lt;text x='84' y='616' fontSize='14' fill='#243444' textAnchor='start' fontFamily='Microsoft YaHei'&gt;看不懂的地方先回讲义对应小节读一遍，再回来对着这页复述一次——能讲出来才算真懂。&lt;/text&gt;&#13;&#10;            &lt;text x='64' y='684' fontSize='13' fill='#8A9AAA' fontFamily='Microsoft YaHei'&gt;Python 讲授课件 · 逐节版&lt;/text&gt;&#13;&#10;            &lt;text x='1216' y='684' fontSize='13' fill='#8A9AAA' textAnchor='end' fontFamily='Microsoft YaHei'&gt;单元 12 · 第 66 节&lt;/text&gt;&#13;&#10;        &lt;/svg&gt;&#13;&#10;    &lt;/Box&gt;&#13;&#10;&lt;/Slide&gt;&#13;&#10;"/>
+        <p:cNvPr id="55" name="" descr="&lt;Slide style={{ width: '1280px', height: '720px', backgroundColor: '#FAFCFE', padding: 0, position: 'relative', overflow: 'hidden' }}&gt;&#13;&#10;    &lt;Box style={{ position: 'absolute', left: 64, top: 36, width: '1152px', flexDirection: 'row', alignItems: 'center', gap: 12 }}&gt;&#13;&#10;        &lt;Box style={{ background: '#0E9B78', borderRadius: 5, padding: '3px 11px' }}&gt;&#13;&#10;            &lt;Text style={{ fontSize: 14, fontWeight: 'bold', color: '#FFFFFF' }}&gt;第 66 节&lt;/Text&gt;&#13;&#10;        &lt;/Box&gt;&#13;&#10;        &lt;Text style={{ fontSize: 30, fontWeight: 'bold', color: '#16232E' }}&gt;核心知识点&lt;/Text&gt;&#13;&#10;        &lt;Text style={{ fontSize: 15, color: '#5A6B7A', marginTop: 10 }}&gt;· 主循环、帧率与事件驱动&lt;/Text&gt;&#13;&#10;    &lt;/Box&gt;&#13;&#10;    &lt;Box style={{ position: 'absolute', left: 0, top: 0, width: '1280px', height: '720px' }}&gt;&#13;&#10;        &lt;svg width='1280' height='720' viewBox='0 0 1280 720'&gt;&#13;&#10;            &lt;rect x='64' y='96' width='548' height='330' rx='12' fill='#FFFFFF' stroke='#D8E3EE' /&gt;&lt;rect x='64' y='96' width='548' height='4' rx='2' fill='#1F5FA8' /&gt;&lt;text x='82' y='130' fontSize='15.5' fontWeight='bold' fill='#1F5FA8' textAnchor='start' fontFamily='Microsoft YaHei'&gt;2.4 帧率：为什么你的游戏在别人电脑上会「加速」&lt;/text&gt;&lt;text x='82' y='169.0' fontSize='13' fill='#3A4A58' textAnchor='start' fontFamily='Microsoft YaHei'&gt;· while True 有个隐藏问题：它转多快，完全由电脑的 CPU 和显卡决定。&lt;/text&gt;&lt;text x='82' y='197.5' fontSize='13' fill='#3A4A58' textAnchor='start' fontFamily='Microsoft YaHei'&gt;· tick(60) 的意思是：这一圈的活儿 5 毫秒就干完了，就主动睡大约 11.67 毫秒…&lt;/text&gt;&lt;rect x='668' y='96' width='548' height='330' rx='12' fill='#FFFFFF' stroke='#D8E3EE' /&gt;&lt;rect x='668' y='96' width='548' height='4' rx='2' fill='#1F5FA8' /&gt;&lt;text x='686' y='130' fontSize='15.5' fontWeight='bold' fill='#1F5FA8' textAnchor='start' fontFamily='Microsoft YaHei'&gt;2.5 事件驱动：游戏像一个前台接待&lt;/text&gt;&lt;text x='686' y='169.0' fontSize='13' fill='#3A4A58' textAnchor='start' fontFamily='Microsoft YaHei'&gt;· pygame.event.get() 取的是「积压的所有事件」，不是「刚刚发生的那一个」…&lt;/text&gt;&lt;text x='686' y='197.5' fontSize='13' fill='#3A4A58' textAnchor='start' fontFamily='Microsoft YaHei'&gt;· 每张表有类型：event.type。最常用的几种：&lt;/text&gt;&lt;text x='686' y='226.0' fontSize='13' fill='#3A4A58' textAnchor='start' fontFamily='Microsoft YaHei'&gt;· 同一次按键，还带细节：event.key 告诉你具体是哪个键…&lt;/text&gt;&lt;rect x='64' y='574' width='1152' height='66' rx='12' fill='#EEF5FB' /&gt;&lt;text x='84' y='616' fontSize='14' fill='#243444' textAnchor='start' fontFamily='Microsoft YaHei'&gt;看不懂的地方先回讲义对应小节读一遍，再回来对着这页复述一次——能讲出来才算真懂。&lt;/text&gt;&#13;&#10;            &lt;text x='64' y='684' fontSize='13' fill='#8A9AAA' fontFamily='Microsoft YaHei'&gt;Python 讲授课件 · 逐节版&lt;/text&gt;&#13;&#10;            &lt;text x='1216' y='684' fontSize='13' fill='#8A9AAA' textAnchor='end' fontFamily='Microsoft YaHei'&gt;单元 12 · 第 66 节&lt;/text&gt;&#13;&#10;        &lt;/svg&gt;&#13;&#10;    &lt;/Box&gt;&#13;&#10;&lt;/Slide&gt;&#13;&#10;"/>
         <p:cNvGrpSpPr/>
         <p:nvPr/>
       </p:nvGrpSpPr>
@@ -5270,7 +3002,7 @@
   <p:cSld>
     <p:spTree>
       <p:nvGrpSpPr>
-        <p:cNvPr id="68" name="" descr="&lt;Slide style={{ width: '1280px', height: '720px', backgroundColor: '#FAFCFE', padding: 0, position: 'relative', overflow: 'hidden' }}&gt;&#13;&#10;    &lt;Box style={{ position: 'absolute', left: 64, top: 36, width: '1152px', flexDirection: 'row', alignItems: 'center', gap: 12 }}&gt;&#13;&#10;        &lt;Box style={{ background: '#0E9B78', borderRadius: 5, padding: '3px 11px' }}&gt;&#13;&#10;            &lt;Text style={{ fontSize: 14, fontWeight: 'bold', color: '#FFFFFF' }}&gt;第 67 节&lt;/Text&gt;&#13;&#10;        &lt;/Box&gt;&#13;&#10;        &lt;Text style={{ fontSize: 30, fontWeight: 'bold', color: '#16232E' }}&gt;核心知识点&lt;/Text&gt;&#13;&#10;        &lt;Text style={{ fontSize: 15, color: '#5A6B7A', marginTop: 10 }}&gt;· Settings 类与屏幕矩形&lt;/Text&gt;&#13;&#10;    &lt;/Box&gt;&#13;&#10;    &lt;Box style={{ position: 'absolute', left: 0, top: 0, width: '1280px', height: '720px' }}&gt;&#13;&#10;        &lt;svg width='1280' height='720' viewBox='0 0 1280 720'&gt;&#13;&#10;            &lt;rect x='64' y='96' width='548' height='330' rx='12' fill='#FFFFFF' stroke='#D8E3EE' /&gt;&lt;rect x='64' y='96' width='548' height='4' rx='2' fill='#1F5FA8' /&gt;&lt;text x='82' y='130' fontSize='15.5' fontWeight='bold' fill='#1F5FA8' textAnchor='start' fontFamily='Microsoft YaHei'&gt;2.6 Settings 类：把「会变的数值」集中管理&lt;/text&gt;&lt;text x='82' y='169.0' fontSize='13' fill='#3A4A58' textAnchor='start' fontFamily='Microsoft YaHei'&gt;· 游戏里有一类数天生善变：窗口尺寸、背景色、飞船速度。如果把它们写成「散落各处的&lt;/text&gt;&lt;text x='82' y='188.5' fontSize='13' fill='#3A4A58' textAnchor='start' fontFamily='Microsoft YaHei'&gt;小数字」（术语叫魔数）…&lt;/text&gt;&lt;rect x='668' y='96' width='548' height='330' rx='12' fill='#FFFFFF' stroke='#D8E3EE' /&gt;&lt;rect x='668' y='96' width='548' height='4' rx='2' fill='#1F5FA8' /&gt;&lt;text x='686' y='130' fontSize='15.5' fontWeight='bold' fill='#1F5FA8' textAnchor='start' fontFamily='Microsoft YaHei'&gt;2.7 screen_rect：让飞船知道自己「站在哪」&lt;/text&gt;&lt;text x='686' y='169.0' fontSize='13' fill='#3A4A58' textAnchor='start' fontFamily='Microsoft YaHei'&gt;· Pygame 里所有可见元素都用一个矩形（rect）描述位置和大小——可以把它理解成快&lt;/text&gt;&lt;text x='686' y='188.5' fontSize='13' fill='#3A4A58' textAnchor='start' fontFamily='Microsoft YaHei'&gt;递单：写着包裹在…&lt;/text&gt;&lt;rect x='64' y='574' width='1152' height='66' rx='12' fill='#EEF5FB' /&gt;&lt;text x='84' y='616' fontSize='14' fill='#243444' textAnchor='start' fontFamily='Microsoft YaHei'&gt;看不懂的地方先回讲义对应小节读一遍，再回来对着这页复述一次——能讲出来才算真懂。&lt;/text&gt;&#13;&#10;            &lt;text x='64' y='684' fontSize='13' fill='#8A9AAA' fontFamily='Microsoft YaHei'&gt;Python 讲授课件 · 逐节版&lt;/text&gt;&#13;&#10;            &lt;text x='1216' y='684' fontSize='13' fill='#8A9AAA' textAnchor='end' fontFamily='Microsoft YaHei'&gt;单元 12 · 第 67 节&lt;/text&gt;&#13;&#10;        &lt;/svg&gt;&#13;&#10;    &lt;/Box&gt;&#13;&#10;&lt;/Slide&gt;&#13;&#10;"/>
+        <p:cNvPr id="68" name="" descr="&lt;Slide style={{ width: '1280px', height: '720px', backgroundColor: '#FAFCFE', padding: 0, position: 'relative', overflow: 'hidden' }}&gt;&#13;&#10;    &lt;Box style={{ position: 'absolute', left: 64, top: 36, width: '1152px', flexDirection: 'row', alignItems: 'center', gap: 12 }}&gt;&#13;&#10;        &lt;Box style={{ background: '#0E9B78', borderRadius: 5, padding: '3px 11px' }}&gt;&#13;&#10;            &lt;Text style={{ fontSize: 14, fontWeight: 'bold', color: '#FFFFFF' }}&gt;第 67 节&lt;/Text&gt;&#13;&#10;        &lt;/Box&gt;&#13;&#10;        &lt;Text style={{ fontSize: 30, fontWeight: 'bold', color: '#16232E' }}&gt;核心知识点&lt;/Text&gt;&#13;&#10;        &lt;Text style={{ fontSize: 15, color: '#5A6B7A', marginTop: 10 }}&gt;· Settings 类与屏幕矩形&lt;/Text&gt;&#13;&#10;    &lt;/Box&gt;&#13;&#10;    &lt;Box style={{ position: 'absolute', left: 0, top: 0, width: '1280px', height: '720px' }}&gt;&#13;&#10;        &lt;svg width='1280' height='720' viewBox='0 0 1280 720'&gt;&#13;&#10;            &lt;rect x='64' y='96' width='548' height='330' rx='12' fill='#FFFFFF' stroke='#D8E3EE' /&gt;&lt;rect x='64' y='96' width='548' height='4' rx='2' fill='#1F5FA8' /&gt;&lt;text x='82' y='130' fontSize='15.5' fontWeight='bold' fill='#1F5FA8' textAnchor='start' fontFamily='Microsoft YaHei'&gt;2.6 Settings 类：把「会变的数值」集中管理&lt;/text&gt;&lt;text x='82' y='169.0' fontSize='13' fill='#3A4A58' textAnchor='start' fontFamily='Microsoft YaHei'&gt;· 游戏里有一类数天生善变：窗口尺寸、背景色、飞船速度。&lt;/text&gt;&lt;text x='82' y='197.5' fontSize='13' fill='#3A4A58' textAnchor='start' fontFamily='Microsoft YaHei'&gt;· 想换黑色背景、想把飞船速度从 1.5 调到 3，只改 settings.py 一处，&lt;/text&gt;&lt;text x='82' y='217.0' fontSize='13' fill='#3A4A58' textAnchor='start' fontFamily='Microsoft YaHei'&gt;全游戏生效。&lt;/text&gt;&lt;text x='82' y='245.5' fontSize='13' fill='#3A4A58' textAnchor='start' fontFamily='Microsoft YaHei'&gt;· Settings 就像空调遥控器——没有它，调温度得爬进墙里拨码盘；有了它，温度、&lt;/text&gt;&lt;text x='82' y='265.0' fontSize='13' fill='#3A4A58' textAnchor='start' fontFamily='Microsoft YaHei'&gt;模式…&lt;/text&gt;&lt;rect x='668' y='96' width='548' height='330' rx='12' fill='#FFFFFF' stroke='#D8E3EE' /&gt;&lt;rect x='668' y='96' width='548' height='4' rx='2' fill='#1F5FA8' /&gt;&lt;text x='686' y='130' fontSize='15.5' fontWeight='bold' fill='#1F5FA8' textAnchor='start' fontFamily='Microsoft YaHei'&gt;2.7 screen_rect：让飞船知道自己「站在哪」&lt;/text&gt;&lt;text x='686' y='169.0' fontSize='13' fill='#3A4A58' textAnchor='start' fontFamily='Microsoft YaHei'&gt;· rect.x、rect.y 以及四个边缘坐标只能存整数…&lt;/text&gt;&lt;rect x='64' y='574' width='1152' height='66' rx='12' fill='#EEF5FB' /&gt;&lt;text x='84' y='616' fontSize='14' fill='#243444' textAnchor='start' fontFamily='Microsoft YaHei'&gt;看不懂的地方先回讲义对应小节读一遍，再回来对着这页复述一次——能讲出来才算真懂。&lt;/text&gt;&#13;&#10;            &lt;text x='64' y='684' fontSize='13' fill='#8A9AAA' fontFamily='Microsoft YaHei'&gt;Python 讲授课件 · 逐节版&lt;/text&gt;&#13;&#10;            &lt;text x='1216' y='684' fontSize='13' fill='#8A9AAA' textAnchor='end' fontFamily='Microsoft YaHei'&gt;单元 12 · 第 67 节&lt;/text&gt;&#13;&#10;        &lt;/svg&gt;&#13;&#10;    &lt;/Box&gt;&#13;&#10;&lt;/Slide&gt;&#13;&#10;"/>
         <p:cNvGrpSpPr/>
         <p:nvPr/>
       </p:nvGrpSpPr>
@@ -5701,7 +3433,7 @@
   <p:cSld>
     <p:spTree>
       <p:nvGrpSpPr>
-        <p:cNvPr id="81" name="" descr="&lt;Slide style={{ width: '1280px', height: '720px', backgroundColor: '#FAFCFE', padding: 0, position: 'relative', overflow: 'hidden' }}&gt;&#13;&#10;    &lt;Box style={{ position: 'absolute', left: 64, top: 36, width: '1152px', flexDirection: 'row', alignItems: 'center', gap: 12 }}&gt;&#13;&#10;        &lt;Box style={{ background: '#0E9B78', borderRadius: 5, padding: '3px 11px' }}&gt;&#13;&#10;            &lt;Text style={{ fontSize: 14, fontWeight: 'bold', color: '#FFFFFF' }}&gt;第 68 节&lt;/Text&gt;&#13;&#10;        &lt;/Box&gt;&#13;&#10;        &lt;Text style={{ fontSize: 30, fontWeight: 'bold', color: '#16232E' }}&gt;核心知识点&lt;/Text&gt;&#13;&#10;        &lt;Text style={{ fontSize: 15, color: '#5A6B7A', marginTop: 10 }}&gt;· 驾驶飞船：标志位与边界&lt;/Text&gt;&#13;&#10;    &lt;/Box&gt;&#13;&#10;    &lt;Box style={{ position: 'absolute', left: 0, top: 0, width: '1280px', height: '720px' }}&gt;&#13;&#10;        &lt;svg width='1280' height='720' viewBox='0 0 1280 720'&gt;&#13;&#10;            &lt;rect x='64' y='96' width='548' height='330' rx='12' fill='#FFFFFF' stroke='#D8E3EE' /&gt;&lt;rect x='64' y='96' width='548' height='4' rx='2' fill='#1F5FA8' /&gt;&lt;text x='82' y='130' fontSize='15.5' fontWeight='bold' fill='#1F5FA8' textAnchor='start' fontFamily='Microsoft YaHei'&gt;2.8 驾驶飞船：moving_right 标志位与持续移动&lt;/text&gt;&lt;text x='82' y='169.0' fontSize='13' fill='#3A4A58' textAnchor='start' fontFamily='Microsoft YaHei'&gt;· 为什么用 self.x 浮点记账？ pygame.Rect 的坐标只能存整数，赋小数会被取整。把&lt;/text&gt;&lt;text x='82' y='188.5' fontSize='13' fill='#3A4A58' textAnchor='start' fontFamily='Microsoft YaHei'&gt; sh…&lt;/text&gt;&lt;rect x='668' y='96' width='548' height='330' rx='12' fill='#FFFFFF' stroke='#D8E3EE' /&gt;&lt;rect x='668' y='96' width='548' height='4' rx='2' fill='#1F5FA8' /&gt;&lt;text x='686' y='130' fontSize='15.5' fontWeight='bold' fill='#1F5FA8' textAnchor='start' fontFamily='Microsoft YaHei'&gt;2.9 重构 _check_events() 和 _upd…&lt;/text&gt;&lt;text x='686' y='169.0' fontSize='13' fill='#3A4A58' textAnchor='start' fontFamily='Microsoft YaHei'&gt;· 写到 12.6 节，主循环里已经同时躺着事件处理、飞船更新、屏幕绘制三段代码。教材&lt;/text&gt;&lt;text x='686' y='188.5' fontSize='13' fill='#3A4A58' textAnchor='start' fontFamily='Microsoft YaHei'&gt;此时又做了一次重构…&lt;/text&gt;&lt;rect x='64' y='574' width='1152' height='66' rx='12' fill='#EEF5FB' /&gt;&lt;text x='84' y='616' fontSize='14' fill='#243444' textAnchor='start' fontFamily='Microsoft YaHei'&gt;看不懂的地方先回讲义对应小节读一遍，再回来对着这页复述一次——能讲出来才算真懂。&lt;/text&gt;&#13;&#10;            &lt;text x='64' y='684' fontSize='13' fill='#8A9AAA' fontFamily='Microsoft YaHei'&gt;Python 讲授课件 · 逐节版&lt;/text&gt;&#13;&#10;            &lt;text x='1216' y='684' fontSize='13' fill='#8A9AAA' textAnchor='end' fontFamily='Microsoft YaHei'&gt;单元 12 · 第 68 节&lt;/text&gt;&#13;&#10;        &lt;/svg&gt;&#13;&#10;    &lt;/Box&gt;&#13;&#10;&lt;/Slide&gt;&#13;&#10;"/>
+        <p:cNvPr id="81" name="" descr="&lt;Slide style={{ width: '1280px', height: '720px', backgroundColor: '#FAFCFE', padding: 0, position: 'relative', overflow: 'hidden' }}&gt;&#13;&#10;    &lt;Box style={{ position: 'absolute', left: 64, top: 36, width: '1152px', flexDirection: 'row', alignItems: 'center', gap: 12 }}&gt;&#13;&#10;        &lt;Box style={{ background: '#0E9B78', borderRadius: 5, padding: '3px 11px' }}&gt;&#13;&#10;            &lt;Text style={{ fontSize: 14, fontWeight: 'bold', color: '#FFFFFF' }}&gt;第 68 节&lt;/Text&gt;&#13;&#10;        &lt;/Box&gt;&#13;&#10;        &lt;Text style={{ fontSize: 30, fontWeight: 'bold', color: '#16232E' }}&gt;核心知识点&lt;/Text&gt;&#13;&#10;        &lt;Text style={{ fontSize: 15, color: '#5A6B7A', marginTop: 10 }}&gt;· 驾驶飞船：标志位与边界&lt;/Text&gt;&#13;&#10;    &lt;/Box&gt;&#13;&#10;    &lt;Box style={{ position: 'absolute', left: 0, top: 0, width: '1280px', height: '720px' }}&gt;&#13;&#10;        &lt;svg width='1280' height='720' viewBox='0 0 1280 720'&gt;&#13;&#10;            &lt;rect x='64' y='96' width='548' height='330' rx='12' fill='#FFFFFF' stroke='#D8E3EE' /&gt;&lt;rect x='64' y='96' width='548' height='4' rx='2' fill='#1F5FA8' /&gt;&lt;text x='82' y='130' fontSize='15.5' fontWeight='bold' fill='#1F5FA8' textAnchor='start' fontFamily='Microsoft YaHei'&gt;2.8 驾驶飞船：moving_right 标志位与持续移动&lt;/text&gt;&lt;text x='82' y='169.0' fontSize='13' fill='#3A4A58' textAnchor='start' fontFamily='Microsoft YaHei'&gt;· 为什么用 self.x 浮点记账？&lt;/text&gt;&lt;rect x='668' y='96' width='548' height='330' rx='12' fill='#FFFFFF' stroke='#D8E3EE' /&gt;&lt;rect x='668' y='96' width='548' height='4' rx='2' fill='#1F5FA8' /&gt;&lt;text x='686' y='130' fontSize='15.5' fontWeight='bold' fill='#1F5FA8' textAnchor='start' fontFamily='Microsoft YaHei'&gt;2.9 重构 _check_events() 和 _upd…&lt;/text&gt;&lt;text x='686' y='169.0' fontSize='13' fill='#3A4A58' textAnchor='start' fontFamily='Microsoft YaHei'&gt;· 店长不用知道每道菜怎么炒，他只管四点名——「听客人点单、让厨师做菜、上菜、&lt;/text&gt;&lt;text x='686' y='188.5' fontSize='13' fill='#3A4A58' textAnchor='start' fontFamily='Microsoft YaHei'&gt;控制上菜节奏」。&lt;/text&gt;&lt;rect x='64' y='574' width='1152' height='66' rx='12' fill='#EEF5FB' /&gt;&lt;text x='84' y='616' fontSize='14' fill='#243444' textAnchor='start' fontFamily='Microsoft YaHei'&gt;看不懂的地方先回讲义对应小节读一遍，再回来对着这页复述一次——能讲出来才算真懂。&lt;/text&gt;&#13;&#10;            &lt;text x='64' y='684' fontSize='13' fill='#8A9AAA' fontFamily='Microsoft YaHei'&gt;Python 讲授课件 · 逐节版&lt;/text&gt;&#13;&#10;            &lt;text x='1216' y='684' fontSize='13' fill='#8A9AAA' textAnchor='end' fontFamily='Microsoft YaHei'&gt;单元 12 · 第 68 节&lt;/text&gt;&#13;&#10;        &lt;/svg&gt;&#13;&#10;    &lt;/Box&gt;&#13;&#10;&lt;/Slide&gt;&#13;&#10;"/>
         <p:cNvGrpSpPr/>
         <p:nvPr/>
       </p:nvGrpSpPr>

--- a/python-course-ppt/逐节课件/Python讲授课件-单元12.pptx
+++ b/python-course-ppt/逐节课件/Python讲授课件-单元12.pptx
@@ -236,6 +236,1290 @@
     </a:lvl9pPr>
   </p:notesStyle>
 </p:notesMaster>
+</file>
+
+<file path=ppt/notesSlides/notesSlide1.xml><?xml version="1.0" encoding="utf-8"?>
+<p:notes xmlns:a="http://schemas.openxmlformats.org/drawingml/2006/main" xmlns:p="http://schemas.openxmlformats.org/presentationml/2006/main" xmlns:r="http://schemas.openxmlformats.org/officeDocument/2006/relationships">
+  <p:cSld>
+    <p:spTree>
+      <p:nvGrpSpPr>
+        <p:cNvPr id="1" name=""/>
+        <p:cNvGrpSpPr/>
+        <p:nvPr/>
+      </p:nvGrpSpPr>
+      <p:grpSpPr>
+        <a:xfrm>
+          <a:off x="0" y="0"/>
+          <a:ext cx="0" cy="0"/>
+          <a:chOff x="0" y="0"/>
+          <a:chExt cx="0" cy="0"/>
+        </a:xfrm>
+      </p:grpSpPr>
+      <p:sp>
+        <p:nvSpPr>
+          <p:cNvPr id="2" name="讲课提示"/>
+          <p:cNvSpPr txBox="1"/>
+          <p:nvPr/>
+        </p:nvSpPr>
+        <p:spPr>
+          <a:xfrm>
+            <a:off x="457200" y="457200"/>
+            <a:ext cx="6858000" cy="4800600"/>
+          </a:xfrm>
+          <a:prstGeom prst="rect">
+            <a:avLst/>
+          </a:prstGeom>
+        </p:spPr>
+        <p:txBody>
+          <a:bodyPr wrap="square"/>
+          <a:lstStyle/>
+          <a:p>
+            <a:r>
+              <a:rPr lang="zh-CN" dirty="0"/>
+              <a:t>单元 12 · 单元 12 · Pygame 起步与飞船驾驶</a:t>
+            </a:r>
+          </a:p>
+          <a:p>
+            <a:r>
+              <a:rPr lang="zh-CN" dirty="0"/>
+              <a:t/>
+            </a:r>
+          </a:p>
+          <a:p>
+            <a:r>
+              <a:rPr lang="zh-CN" dirty="0"/>
+              <a:t>本单元包含以下课节：</a:t>
+            </a:r>
+          </a:p>
+          <a:p>
+            <a:r>
+              <a:rPr lang="zh-CN" dirty="0"/>
+              <a:t>· 第 65 节 项目规划与安装 Pygame</a:t>
+            </a:r>
+          </a:p>
+          <a:p>
+            <a:r>
+              <a:rPr lang="zh-CN" dirty="0"/>
+              <a:t>· 第 66 节 主循环、帧率与事件驱动</a:t>
+            </a:r>
+          </a:p>
+          <a:p>
+            <a:r>
+              <a:rPr lang="zh-CN" dirty="0"/>
+              <a:t>· 第 67 节 Settings 类与屏幕矩形</a:t>
+            </a:r>
+          </a:p>
+          <a:p>
+            <a:r>
+              <a:rPr lang="zh-CN" dirty="0"/>
+              <a:t>· 第 68 节 驾驶飞船：标志位与边界</a:t>
+            </a:r>
+          </a:p>
+          <a:p>
+            <a:r>
+              <a:rPr lang="zh-CN" dirty="0"/>
+              <a:t>· 第 69 节 重构、错误自查与验收</a:t>
+            </a:r>
+          </a:p>
+          <a:p>
+            <a:r>
+              <a:rPr lang="zh-CN" dirty="0"/>
+              <a:t/>
+            </a:r>
+          </a:p>
+          <a:p>
+            <a:r>
+              <a:rPr lang="zh-CN" dirty="0"/>
+              <a:t>开场用 3 分钟讲清：这个单元学完能做出什么，最后会被关卡怎么验。</a:t>
+            </a:r>
+          </a:p>
+        </p:txBody>
+      </p:sp>
+    </p:spTree>
+  </p:cSld>
+  <p:clrMapOvr>
+    <a:masterClrMapping/>
+  </p:clrMapOvr>
+</p:notes>
+</file>
+
+<file path=ppt/notesSlides/notesSlide10.xml><?xml version="1.0" encoding="utf-8"?>
+<p:notes xmlns:a="http://schemas.openxmlformats.org/drawingml/2006/main" xmlns:p="http://schemas.openxmlformats.org/presentationml/2006/main" xmlns:r="http://schemas.openxmlformats.org/officeDocument/2006/relationships">
+  <p:cSld>
+    <p:spTree>
+      <p:nvGrpSpPr>
+        <p:cNvPr id="1" name=""/>
+        <p:cNvGrpSpPr/>
+        <p:nvPr/>
+      </p:nvGrpSpPr>
+      <p:grpSpPr>
+        <a:xfrm>
+          <a:off x="0" y="0"/>
+          <a:ext cx="0" cy="0"/>
+          <a:chOff x="0" y="0"/>
+          <a:chExt cx="0" cy="0"/>
+        </a:xfrm>
+      </p:grpSpPr>
+      <p:sp>
+        <p:nvSpPr>
+          <p:cNvPr id="2" name="讲课提示"/>
+          <p:cNvSpPr txBox="1"/>
+          <p:nvPr/>
+        </p:nvSpPr>
+        <p:spPr>
+          <a:xfrm>
+            <a:off x="457200" y="457200"/>
+            <a:ext cx="6858000" cy="4800600"/>
+          </a:xfrm>
+          <a:prstGeom prst="rect">
+            <a:avLst/>
+          </a:prstGeom>
+        </p:spPr>
+        <p:txBody>
+          <a:bodyPr wrap="square"/>
+          <a:lstStyle/>
+          <a:p>
+            <a:r>
+              <a:rPr lang="zh-CN" dirty="0"/>
+              <a:t>第 69 节 · 重构、错误自查与验收</a:t>
+            </a:r>
+          </a:p>
+          <a:p>
+            <a:r>
+              <a:rPr lang="zh-CN" dirty="0"/>
+              <a:t>单元 12 · Pygame 起步与飞船驾驶 · W15</a:t>
+            </a:r>
+          </a:p>
+          <a:p>
+            <a:r>
+              <a:rPr lang="zh-CN" dirty="0"/>
+              <a:t/>
+            </a:r>
+          </a:p>
+          <a:p>
+            <a:r>
+              <a:rPr lang="zh-CN" dirty="0"/>
+              <a:t>学习目标：把主循环里的逻辑下沉到 `_check_events()` / `_update_screen()`；逐条自查常见错误</a:t>
+            </a:r>
+          </a:p>
+          <a:p>
+            <a:r>
+              <a:rPr lang="zh-CN" dirty="0"/>
+              <a:t/>
+            </a:r>
+          </a:p>
+          <a:p>
+            <a:r>
+              <a:rPr lang="zh-CN" dirty="0"/>
+              <a:t>课堂实操（40 分钟，不看答案）：</a:t>
+            </a:r>
+          </a:p>
+          <a:p>
+            <a:r>
+              <a:rPr lang="zh-CN" dirty="0"/>
+              <a:t>· 把主循环拆成两个方法</a:t>
+            </a:r>
+          </a:p>
+          <a:p>
+            <a:r>
+              <a:rPr lang="zh-CN" dirty="0"/>
+              <a:t>· 逐条演示六、里的每个错误并修复</a:t>
+            </a:r>
+          </a:p>
+          <a:p>
+            <a:r>
+              <a:rPr lang="zh-CN" dirty="0"/>
+              <a:t/>
+            </a:r>
+          </a:p>
+          <a:p>
+            <a:r>
+              <a:rPr lang="zh-CN" dirty="0"/>
+              <a:t>课后作业：</a:t>
+            </a:r>
+          </a:p>
+          <a:p>
+            <a:r>
+              <a:rPr lang="zh-CN" dirty="0"/>
+              <a:t>· ★ 产出：能驾驶、能退出的 alien_invasion 雏形</a:t>
+            </a:r>
+          </a:p>
+          <a:p>
+            <a:r>
+              <a:rPr lang="zh-CN" dirty="0"/>
+              <a:t/>
+            </a:r>
+          </a:p>
+          <a:p>
+            <a:r>
+              <a:rPr lang="zh-CN" dirty="0"/>
+              <a:t>节奏：讲 20 分钟 → 学员自己敲 40 分钟（不看答案）→ 对讲评自查 20 分钟 → 写作业 10 分钟。</a:t>
+            </a:r>
+          </a:p>
+        </p:txBody>
+      </p:sp>
+    </p:spTree>
+  </p:cSld>
+  <p:clrMapOvr>
+    <a:masterClrMapping/>
+  </p:clrMapOvr>
+</p:notes>
+</file>
+
+<file path=ppt/notesSlides/notesSlide11.xml><?xml version="1.0" encoding="utf-8"?>
+<p:notes xmlns:a="http://schemas.openxmlformats.org/drawingml/2006/main" xmlns:p="http://schemas.openxmlformats.org/presentationml/2006/main" xmlns:r="http://schemas.openxmlformats.org/officeDocument/2006/relationships">
+  <p:cSld>
+    <p:spTree>
+      <p:nvGrpSpPr>
+        <p:cNvPr id="1" name=""/>
+        <p:cNvGrpSpPr/>
+        <p:nvPr/>
+      </p:nvGrpSpPr>
+      <p:grpSpPr>
+        <a:xfrm>
+          <a:off x="0" y="0"/>
+          <a:ext cx="0" cy="0"/>
+          <a:chOff x="0" y="0"/>
+          <a:chExt cx="0" cy="0"/>
+        </a:xfrm>
+      </p:grpSpPr>
+      <p:sp>
+        <p:nvSpPr>
+          <p:cNvPr id="2" name="讲课提示"/>
+          <p:cNvSpPr txBox="1"/>
+          <p:nvPr/>
+        </p:nvSpPr>
+        <p:spPr>
+          <a:xfrm>
+            <a:off x="457200" y="457200"/>
+            <a:ext cx="6858000" cy="4800600"/>
+          </a:xfrm>
+          <a:prstGeom prst="rect">
+            <a:avLst/>
+          </a:prstGeom>
+        </p:spPr>
+        <p:txBody>
+          <a:bodyPr wrap="square"/>
+          <a:lstStyle/>
+          <a:p>
+            <a:r>
+              <a:rPr lang="zh-CN" dirty="0"/>
+              <a:t>第 69 节 · 核心知识点：重构、错误自查与验收</a:t>
+            </a:r>
+          </a:p>
+          <a:p>
+            <a:r>
+              <a:rPr lang="zh-CN" dirty="0"/>
+              <a:t/>
+            </a:r>
+          </a:p>
+          <a:p>
+            <a:r>
+              <a:rPr lang="zh-CN" dirty="0"/>
+              <a:t>讲这一页时：先让学生说出上节课的结论，再逐块讲要点。</a:t>
+            </a:r>
+          </a:p>
+          <a:p>
+            <a:r>
+              <a:rPr lang="zh-CN" dirty="0"/>
+              <a:t>每讲完一块，问一句「这一步如果写错了，报错会长什么样？」——把错误提前讲。</a:t>
+            </a:r>
+          </a:p>
+          <a:p>
+            <a:r>
+              <a:rPr lang="zh-CN" dirty="0"/>
+              <a:t/>
+            </a:r>
+          </a:p>
+          <a:p>
+            <a:r>
+              <a:rPr lang="zh-CN" dirty="0"/>
+              <a:t>本节目标：把主循环里的逻辑下沉到 `_check_events()` / `_update_screen()`；逐条自查常见错误</a:t>
+            </a:r>
+          </a:p>
+          <a:p>
+            <a:r>
+              <a:rPr lang="zh-CN" dirty="0"/>
+              <a:t/>
+            </a:r>
+          </a:p>
+          <a:p>
+            <a:r>
+              <a:rPr lang="zh-CN" dirty="0"/>
+              <a:t>看不到懂的地方，回讲义对应小节读一遍，再回来对着这页复述一次——能讲出来才算真懂。</a:t>
+            </a:r>
+          </a:p>
+        </p:txBody>
+      </p:sp>
+    </p:spTree>
+  </p:cSld>
+  <p:clrMapOvr>
+    <a:masterClrMapping/>
+  </p:clrMapOvr>
+</p:notes>
+</file>
+
+<file path=ppt/notesSlides/notesSlide12.xml><?xml version="1.0" encoding="utf-8"?>
+<p:notes xmlns:a="http://schemas.openxmlformats.org/drawingml/2006/main" xmlns:p="http://schemas.openxmlformats.org/presentationml/2006/main" xmlns:r="http://schemas.openxmlformats.org/officeDocument/2006/relationships">
+  <p:cSld>
+    <p:spTree>
+      <p:nvGrpSpPr>
+        <p:cNvPr id="1" name=""/>
+        <p:cNvGrpSpPr/>
+        <p:nvPr/>
+      </p:nvGrpSpPr>
+      <p:grpSpPr>
+        <a:xfrm>
+          <a:off x="0" y="0"/>
+          <a:ext cx="0" cy="0"/>
+          <a:chOff x="0" y="0"/>
+          <a:chExt cx="0" cy="0"/>
+        </a:xfrm>
+      </p:grpSpPr>
+      <p:sp>
+        <p:nvSpPr>
+          <p:cNvPr id="2" name="讲课提示"/>
+          <p:cNvSpPr txBox="1"/>
+          <p:nvPr/>
+        </p:nvSpPr>
+        <p:spPr>
+          <a:xfrm>
+            <a:off x="457200" y="457200"/>
+            <a:ext cx="6858000" cy="4800600"/>
+          </a:xfrm>
+          <a:prstGeom prst="rect">
+            <a:avLst/>
+          </a:prstGeom>
+        </p:spPr>
+        <p:txBody>
+          <a:bodyPr wrap="square"/>
+          <a:lstStyle/>
+          <a:p>
+            <a:r>
+              <a:rPr lang="zh-CN" dirty="0"/>
+              <a:t>单元 12 小结 · 单元 12 · 小结</a:t>
+            </a:r>
+          </a:p>
+          <a:p>
+            <a:r>
+              <a:rPr lang="zh-CN" dirty="0"/>
+              <a:t/>
+            </a:r>
+          </a:p>
+          <a:p>
+            <a:r>
+              <a:rPr lang="zh-CN" dirty="0"/>
+              <a:t>收尾动作：让学生合上讲义，口述本单元三个最重要的结论；说不出来的，回对应课节。</a:t>
+            </a:r>
+          </a:p>
+          <a:p>
+            <a:r>
+              <a:rPr lang="zh-CN" dirty="0"/>
+              <a:t>然后当场勾一遍本单元课节的「已完成」，没打勾的进下一单元前补掉。</a:t>
+            </a:r>
+          </a:p>
+        </p:txBody>
+      </p:sp>
+    </p:spTree>
+  </p:cSld>
+  <p:clrMapOvr>
+    <a:masterClrMapping/>
+  </p:clrMapOvr>
+</p:notes>
+</file>
+
+<file path=ppt/notesSlides/notesSlide2.xml><?xml version="1.0" encoding="utf-8"?>
+<p:notes xmlns:a="http://schemas.openxmlformats.org/drawingml/2006/main" xmlns:p="http://schemas.openxmlformats.org/presentationml/2006/main" xmlns:r="http://schemas.openxmlformats.org/officeDocument/2006/relationships">
+  <p:cSld>
+    <p:spTree>
+      <p:nvGrpSpPr>
+        <p:cNvPr id="1" name=""/>
+        <p:cNvGrpSpPr/>
+        <p:nvPr/>
+      </p:nvGrpSpPr>
+      <p:grpSpPr>
+        <a:xfrm>
+          <a:off x="0" y="0"/>
+          <a:ext cx="0" cy="0"/>
+          <a:chOff x="0" y="0"/>
+          <a:chExt cx="0" cy="0"/>
+        </a:xfrm>
+      </p:grpSpPr>
+      <p:sp>
+        <p:nvSpPr>
+          <p:cNvPr id="2" name="讲课提示"/>
+          <p:cNvSpPr txBox="1"/>
+          <p:nvPr/>
+        </p:nvSpPr>
+        <p:spPr>
+          <a:xfrm>
+            <a:off x="457200" y="457200"/>
+            <a:ext cx="6858000" cy="4800600"/>
+          </a:xfrm>
+          <a:prstGeom prst="rect">
+            <a:avLst/>
+          </a:prstGeom>
+        </p:spPr>
+        <p:txBody>
+          <a:bodyPr wrap="square"/>
+          <a:lstStyle/>
+          <a:p>
+            <a:r>
+              <a:rPr lang="zh-CN" dirty="0"/>
+              <a:t>第 65 节 · 项目规划与安装 Pygame</a:t>
+            </a:r>
+          </a:p>
+          <a:p>
+            <a:r>
+              <a:rPr lang="zh-CN" dirty="0"/>
+              <a:t>单元 12 · Pygame 起步与飞船驾驶 · W14</a:t>
+            </a:r>
+          </a:p>
+          <a:p>
+            <a:r>
+              <a:rPr lang="zh-CN" dirty="0"/>
+              <a:t/>
+            </a:r>
+          </a:p>
+          <a:p>
+            <a:r>
+              <a:rPr lang="zh-CN" dirty="0"/>
+              <a:t>学习目标：知道为什么一个游戏要拆成三个文件；装好 Pygame 并跑出第一个窗口</a:t>
+            </a:r>
+          </a:p>
+          <a:p>
+            <a:r>
+              <a:rPr lang="zh-CN" dirty="0"/>
+              <a:t/>
+            </a:r>
+          </a:p>
+          <a:p>
+            <a:r>
+              <a:rPr lang="zh-CN" dirty="0"/>
+              <a:t>课堂实操（40 分钟，不看答案）：</a:t>
+            </a:r>
+          </a:p>
+          <a:p>
+            <a:r>
+              <a:rPr lang="zh-CN" dirty="0"/>
+              <a:t>· 跑通 SDL_VIDEODRIVER=dummy 验证环境</a:t>
+            </a:r>
+          </a:p>
+          <a:p>
+            <a:r>
+              <a:rPr lang="zh-CN" dirty="0"/>
+              <a:t>· 画出自己项目的三个文件结构</a:t>
+            </a:r>
+          </a:p>
+          <a:p>
+            <a:r>
+              <a:rPr lang="zh-CN" dirty="0"/>
+              <a:t>· 把 hello_world 改成自己的项目骨架</a:t>
+            </a:r>
+          </a:p>
+          <a:p>
+            <a:r>
+              <a:rPr lang="zh-CN" dirty="0"/>
+              <a:t/>
+            </a:r>
+          </a:p>
+          <a:p>
+            <a:r>
+              <a:rPr lang="zh-CN" dirty="0"/>
+              <a:t>课后作业：</a:t>
+            </a:r>
+          </a:p>
+          <a:p>
+            <a:r>
+              <a:rPr lang="zh-CN" dirty="0"/>
+              <a:t>· 建立 alien_invasion 仓库并首次 commit</a:t>
+            </a:r>
+          </a:p>
+          <a:p>
+            <a:r>
+              <a:rPr lang="zh-CN" dirty="0"/>
+              <a:t>· 产出：能弹出窗口的空项目</a:t>
+            </a:r>
+          </a:p>
+          <a:p>
+            <a:r>
+              <a:rPr lang="zh-CN" dirty="0"/>
+              <a:t/>
+            </a:r>
+          </a:p>
+          <a:p>
+            <a:r>
+              <a:rPr lang="zh-CN" dirty="0"/>
+              <a:t>节奏：讲 20 分钟 → 学员自己敲 40 分钟（不看答案）→ 对讲评自查 20 分钟 → 写作业 10 分钟。</a:t>
+            </a:r>
+          </a:p>
+        </p:txBody>
+      </p:sp>
+    </p:spTree>
+  </p:cSld>
+  <p:clrMapOvr>
+    <a:masterClrMapping/>
+  </p:clrMapOvr>
+</p:notes>
+</file>
+
+<file path=ppt/notesSlides/notesSlide3.xml><?xml version="1.0" encoding="utf-8"?>
+<p:notes xmlns:a="http://schemas.openxmlformats.org/drawingml/2006/main" xmlns:p="http://schemas.openxmlformats.org/presentationml/2006/main" xmlns:r="http://schemas.openxmlformats.org/officeDocument/2006/relationships">
+  <p:cSld>
+    <p:spTree>
+      <p:nvGrpSpPr>
+        <p:cNvPr id="1" name=""/>
+        <p:cNvGrpSpPr/>
+        <p:nvPr/>
+      </p:nvGrpSpPr>
+      <p:grpSpPr>
+        <a:xfrm>
+          <a:off x="0" y="0"/>
+          <a:ext cx="0" cy="0"/>
+          <a:chOff x="0" y="0"/>
+          <a:chExt cx="0" cy="0"/>
+        </a:xfrm>
+      </p:grpSpPr>
+      <p:sp>
+        <p:nvSpPr>
+          <p:cNvPr id="2" name="讲课提示"/>
+          <p:cNvSpPr txBox="1"/>
+          <p:nvPr/>
+        </p:nvSpPr>
+        <p:spPr>
+          <a:xfrm>
+            <a:off x="457200" y="457200"/>
+            <a:ext cx="6858000" cy="4800600"/>
+          </a:xfrm>
+          <a:prstGeom prst="rect">
+            <a:avLst/>
+          </a:prstGeom>
+        </p:spPr>
+        <p:txBody>
+          <a:bodyPr wrap="square"/>
+          <a:lstStyle/>
+          <a:p>
+            <a:r>
+              <a:rPr lang="zh-CN" dirty="0"/>
+              <a:t>第 65 节 · 核心知识点：项目规划与安装 Pygame</a:t>
+            </a:r>
+          </a:p>
+          <a:p>
+            <a:r>
+              <a:rPr lang="zh-CN" dirty="0"/>
+              <a:t/>
+            </a:r>
+          </a:p>
+          <a:p>
+            <a:r>
+              <a:rPr lang="zh-CN" dirty="0"/>
+              <a:t>讲这一页时：先让学生说出上节课的结论，再逐块讲要点。</a:t>
+            </a:r>
+          </a:p>
+          <a:p>
+            <a:r>
+              <a:rPr lang="zh-CN" dirty="0"/>
+              <a:t>每讲完一块，问一句「这一步如果写错了，报错会长什么样？」——把错误提前讲。</a:t>
+            </a:r>
+          </a:p>
+          <a:p>
+            <a:r>
+              <a:rPr lang="zh-CN" dirty="0"/>
+              <a:t/>
+            </a:r>
+          </a:p>
+          <a:p>
+            <a:r>
+              <a:rPr lang="zh-CN" dirty="0"/>
+              <a:t>本节目标：知道为什么一个游戏要拆成三个文件；装好 Pygame 并跑出第一个窗口</a:t>
+            </a:r>
+          </a:p>
+          <a:p>
+            <a:r>
+              <a:rPr lang="zh-CN" dirty="0"/>
+              <a:t/>
+            </a:r>
+          </a:p>
+          <a:p>
+            <a:r>
+              <a:rPr lang="zh-CN" dirty="0"/>
+              <a:t>看不到懂的地方，回讲义对应小节读一遍，再回来对着这页复述一次——能讲出来才算真懂。</a:t>
+            </a:r>
+          </a:p>
+        </p:txBody>
+      </p:sp>
+    </p:spTree>
+  </p:cSld>
+  <p:clrMapOvr>
+    <a:masterClrMapping/>
+  </p:clrMapOvr>
+</p:notes>
+</file>
+
+<file path=ppt/notesSlides/notesSlide4.xml><?xml version="1.0" encoding="utf-8"?>
+<p:notes xmlns:a="http://schemas.openxmlformats.org/drawingml/2006/main" xmlns:p="http://schemas.openxmlformats.org/presentationml/2006/main" xmlns:r="http://schemas.openxmlformats.org/officeDocument/2006/relationships">
+  <p:cSld>
+    <p:spTree>
+      <p:nvGrpSpPr>
+        <p:cNvPr id="1" name=""/>
+        <p:cNvGrpSpPr/>
+        <p:nvPr/>
+      </p:nvGrpSpPr>
+      <p:grpSpPr>
+        <a:xfrm>
+          <a:off x="0" y="0"/>
+          <a:ext cx="0" cy="0"/>
+          <a:chOff x="0" y="0"/>
+          <a:chExt cx="0" cy="0"/>
+        </a:xfrm>
+      </p:grpSpPr>
+      <p:sp>
+        <p:nvSpPr>
+          <p:cNvPr id="2" name="讲课提示"/>
+          <p:cNvSpPr txBox="1"/>
+          <p:nvPr/>
+        </p:nvSpPr>
+        <p:spPr>
+          <a:xfrm>
+            <a:off x="457200" y="457200"/>
+            <a:ext cx="6858000" cy="4800600"/>
+          </a:xfrm>
+          <a:prstGeom prst="rect">
+            <a:avLst/>
+          </a:prstGeom>
+        </p:spPr>
+        <p:txBody>
+          <a:bodyPr wrap="square"/>
+          <a:lstStyle/>
+          <a:p>
+            <a:r>
+              <a:rPr lang="zh-CN" dirty="0"/>
+              <a:t>第 66 节 · 主循环、帧率与事件驱动</a:t>
+            </a:r>
+          </a:p>
+          <a:p>
+            <a:r>
+              <a:rPr lang="zh-CN" dirty="0"/>
+              <a:t>单元 12 · Pygame 起步与飞船驾驶 · W14</a:t>
+            </a:r>
+          </a:p>
+          <a:p>
+            <a:r>
+              <a:rPr lang="zh-CN" dirty="0"/>
+              <a:t/>
+            </a:r>
+          </a:p>
+          <a:p>
+            <a:r>
+              <a:rPr lang="zh-CN" dirty="0"/>
+              <a:t>学习目标：理解 `while True` 主循环的四步；知道帧率为什么必须锁；看懂事件驱动模型</a:t>
+            </a:r>
+          </a:p>
+          <a:p>
+            <a:r>
+              <a:rPr lang="zh-CN" dirty="0"/>
+              <a:t/>
+            </a:r>
+          </a:p>
+          <a:p>
+            <a:r>
+              <a:rPr lang="zh-CN" dirty="0"/>
+              <a:t>课堂实操（40 分钟，不看答案）：</a:t>
+            </a:r>
+          </a:p>
+          <a:p>
+            <a:r>
+              <a:rPr lang="zh-CN" dirty="0"/>
+              <a:t>· 手画主循环四步并对照代码</a:t>
+            </a:r>
+          </a:p>
+          <a:p>
+            <a:r>
+              <a:rPr lang="zh-CN" dirty="0"/>
+              <a:t>· 把 tick(60) 改成 tick(5)，观察游戏变慢</a:t>
+            </a:r>
+          </a:p>
+          <a:p>
+            <a:r>
+              <a:rPr lang="zh-CN" dirty="0"/>
+              <a:t>· 故意让程序不处理退出事件，试着关不掉窗口</a:t>
+            </a:r>
+          </a:p>
+          <a:p>
+            <a:r>
+              <a:rPr lang="zh-CN" dirty="0"/>
+              <a:t/>
+            </a:r>
+          </a:p>
+          <a:p>
+            <a:r>
+              <a:rPr lang="zh-CN" dirty="0"/>
+              <a:t>课后作业：</a:t>
+            </a:r>
+          </a:p>
+          <a:p>
+            <a:r>
+              <a:rPr lang="zh-CN" dirty="0"/>
+              <a:t>· 产出：一个会响应按键和退出的窗口</a:t>
+            </a:r>
+          </a:p>
+          <a:p>
+            <a:r>
+              <a:rPr lang="zh-CN" dirty="0"/>
+              <a:t/>
+            </a:r>
+          </a:p>
+          <a:p>
+            <a:r>
+              <a:rPr lang="zh-CN" dirty="0"/>
+              <a:t>节奏：讲 20 分钟 → 学员自己敲 40 分钟（不看答案）→ 对讲评自查 20 分钟 → 写作业 10 分钟。</a:t>
+            </a:r>
+          </a:p>
+        </p:txBody>
+      </p:sp>
+    </p:spTree>
+  </p:cSld>
+  <p:clrMapOvr>
+    <a:masterClrMapping/>
+  </p:clrMapOvr>
+</p:notes>
+</file>
+
+<file path=ppt/notesSlides/notesSlide5.xml><?xml version="1.0" encoding="utf-8"?>
+<p:notes xmlns:a="http://schemas.openxmlformats.org/drawingml/2006/main" xmlns:p="http://schemas.openxmlformats.org/presentationml/2006/main" xmlns:r="http://schemas.openxmlformats.org/officeDocument/2006/relationships">
+  <p:cSld>
+    <p:spTree>
+      <p:nvGrpSpPr>
+        <p:cNvPr id="1" name=""/>
+        <p:cNvGrpSpPr/>
+        <p:nvPr/>
+      </p:nvGrpSpPr>
+      <p:grpSpPr>
+        <a:xfrm>
+          <a:off x="0" y="0"/>
+          <a:ext cx="0" cy="0"/>
+          <a:chOff x="0" y="0"/>
+          <a:chExt cx="0" cy="0"/>
+        </a:xfrm>
+      </p:grpSpPr>
+      <p:sp>
+        <p:nvSpPr>
+          <p:cNvPr id="2" name="讲课提示"/>
+          <p:cNvSpPr txBox="1"/>
+          <p:nvPr/>
+        </p:nvSpPr>
+        <p:spPr>
+          <a:xfrm>
+            <a:off x="457200" y="457200"/>
+            <a:ext cx="6858000" cy="4800600"/>
+          </a:xfrm>
+          <a:prstGeom prst="rect">
+            <a:avLst/>
+          </a:prstGeom>
+        </p:spPr>
+        <p:txBody>
+          <a:bodyPr wrap="square"/>
+          <a:lstStyle/>
+          <a:p>
+            <a:r>
+              <a:rPr lang="zh-CN" dirty="0"/>
+              <a:t>第 66 节 · 核心知识点：主循环、帧率与事件驱动</a:t>
+            </a:r>
+          </a:p>
+          <a:p>
+            <a:r>
+              <a:rPr lang="zh-CN" dirty="0"/>
+              <a:t/>
+            </a:r>
+          </a:p>
+          <a:p>
+            <a:r>
+              <a:rPr lang="zh-CN" dirty="0"/>
+              <a:t>讲这一页时：先让学生说出上节课的结论，再逐块讲要点。</a:t>
+            </a:r>
+          </a:p>
+          <a:p>
+            <a:r>
+              <a:rPr lang="zh-CN" dirty="0"/>
+              <a:t>每讲完一块，问一句「这一步如果写错了，报错会长什么样？」——把错误提前讲。</a:t>
+            </a:r>
+          </a:p>
+          <a:p>
+            <a:r>
+              <a:rPr lang="zh-CN" dirty="0"/>
+              <a:t/>
+            </a:r>
+          </a:p>
+          <a:p>
+            <a:r>
+              <a:rPr lang="zh-CN" dirty="0"/>
+              <a:t>本节目标：理解 `while True` 主循环的四步；知道帧率为什么必须锁；看懂事件驱动模型</a:t>
+            </a:r>
+          </a:p>
+          <a:p>
+            <a:r>
+              <a:rPr lang="zh-CN" dirty="0"/>
+              <a:t/>
+            </a:r>
+          </a:p>
+          <a:p>
+            <a:r>
+              <a:rPr lang="zh-CN" dirty="0"/>
+              <a:t>看不到懂的地方，回讲义对应小节读一遍，再回来对着这页复述一次——能讲出来才算真懂。</a:t>
+            </a:r>
+          </a:p>
+        </p:txBody>
+      </p:sp>
+    </p:spTree>
+  </p:cSld>
+  <p:clrMapOvr>
+    <a:masterClrMapping/>
+  </p:clrMapOvr>
+</p:notes>
+</file>
+
+<file path=ppt/notesSlides/notesSlide6.xml><?xml version="1.0" encoding="utf-8"?>
+<p:notes xmlns:a="http://schemas.openxmlformats.org/drawingml/2006/main" xmlns:p="http://schemas.openxmlformats.org/presentationml/2006/main" xmlns:r="http://schemas.openxmlformats.org/officeDocument/2006/relationships">
+  <p:cSld>
+    <p:spTree>
+      <p:nvGrpSpPr>
+        <p:cNvPr id="1" name=""/>
+        <p:cNvGrpSpPr/>
+        <p:nvPr/>
+      </p:nvGrpSpPr>
+      <p:grpSpPr>
+        <a:xfrm>
+          <a:off x="0" y="0"/>
+          <a:ext cx="0" cy="0"/>
+          <a:chOff x="0" y="0"/>
+          <a:chExt cx="0" cy="0"/>
+        </a:xfrm>
+      </p:grpSpPr>
+      <p:sp>
+        <p:nvSpPr>
+          <p:cNvPr id="2" name="讲课提示"/>
+          <p:cNvSpPr txBox="1"/>
+          <p:nvPr/>
+        </p:nvSpPr>
+        <p:spPr>
+          <a:xfrm>
+            <a:off x="457200" y="457200"/>
+            <a:ext cx="6858000" cy="4800600"/>
+          </a:xfrm>
+          <a:prstGeom prst="rect">
+            <a:avLst/>
+          </a:prstGeom>
+        </p:spPr>
+        <p:txBody>
+          <a:bodyPr wrap="square"/>
+          <a:lstStyle/>
+          <a:p>
+            <a:r>
+              <a:rPr lang="zh-CN" dirty="0"/>
+              <a:t>第 67 节 · Settings 类与屏幕矩形</a:t>
+            </a:r>
+          </a:p>
+          <a:p>
+            <a:r>
+              <a:rPr lang="zh-CN" dirty="0"/>
+              <a:t>单元 12 · Pygame 起步与飞船驾驶 · W14</a:t>
+            </a:r>
+          </a:p>
+          <a:p>
+            <a:r>
+              <a:rPr lang="zh-CN" dirty="0"/>
+              <a:t/>
+            </a:r>
+          </a:p>
+          <a:p>
+            <a:r>
+              <a:rPr lang="zh-CN" dirty="0"/>
+              <a:t>学习目标：把所有会变的数值集中到 Settings；理解 screen_rect 的作用</a:t>
+            </a:r>
+          </a:p>
+          <a:p>
+            <a:r>
+              <a:rPr lang="zh-CN" dirty="0"/>
+              <a:t/>
+            </a:r>
+          </a:p>
+          <a:p>
+            <a:r>
+              <a:rPr lang="zh-CN" dirty="0"/>
+              <a:t>课堂实操（40 分钟，不看答案）：</a:t>
+            </a:r>
+          </a:p>
+          <a:p>
+            <a:r>
+              <a:rPr lang="zh-CN" dirty="0"/>
+              <a:t>· 把散落各处的数字全搬进 Settings</a:t>
+            </a:r>
+          </a:p>
+          <a:p>
+            <a:r>
+              <a:rPr lang="zh-CN" dirty="0"/>
+              <a:t>· 打印 screen_rect 四个属性</a:t>
+            </a:r>
+          </a:p>
+          <a:p>
+            <a:r>
+              <a:rPr lang="zh-CN" dirty="0"/>
+              <a:t>· 故意改错屏幕宽高，观察窗口变形</a:t>
+            </a:r>
+          </a:p>
+          <a:p>
+            <a:r>
+              <a:rPr lang="zh-CN" dirty="0"/>
+              <a:t/>
+            </a:r>
+          </a:p>
+          <a:p>
+            <a:r>
+              <a:rPr lang="zh-CN" dirty="0"/>
+              <a:t>课后作业：</a:t>
+            </a:r>
+          </a:p>
+          <a:p>
+            <a:r>
+              <a:rPr lang="zh-CN" dirty="0"/>
+              <a:t>· 产出：settings.py 定稿</a:t>
+            </a:r>
+          </a:p>
+          <a:p>
+            <a:r>
+              <a:rPr lang="zh-CN" dirty="0"/>
+              <a:t/>
+            </a:r>
+          </a:p>
+          <a:p>
+            <a:r>
+              <a:rPr lang="zh-CN" dirty="0"/>
+              <a:t>节奏：讲 20 分钟 → 学员自己敲 40 分钟（不看答案）→ 对讲评自查 20 分钟 → 写作业 10 分钟。</a:t>
+            </a:r>
+          </a:p>
+        </p:txBody>
+      </p:sp>
+    </p:spTree>
+  </p:cSld>
+  <p:clrMapOvr>
+    <a:masterClrMapping/>
+  </p:clrMapOvr>
+</p:notes>
+</file>
+
+<file path=ppt/notesSlides/notesSlide7.xml><?xml version="1.0" encoding="utf-8"?>
+<p:notes xmlns:a="http://schemas.openxmlformats.org/drawingml/2006/main" xmlns:p="http://schemas.openxmlformats.org/presentationml/2006/main" xmlns:r="http://schemas.openxmlformats.org/officeDocument/2006/relationships">
+  <p:cSld>
+    <p:spTree>
+      <p:nvGrpSpPr>
+        <p:cNvPr id="1" name=""/>
+        <p:cNvGrpSpPr/>
+        <p:nvPr/>
+      </p:nvGrpSpPr>
+      <p:grpSpPr>
+        <a:xfrm>
+          <a:off x="0" y="0"/>
+          <a:ext cx="0" cy="0"/>
+          <a:chOff x="0" y="0"/>
+          <a:chExt cx="0" cy="0"/>
+        </a:xfrm>
+      </p:grpSpPr>
+      <p:sp>
+        <p:nvSpPr>
+          <p:cNvPr id="2" name="讲课提示"/>
+          <p:cNvSpPr txBox="1"/>
+          <p:nvPr/>
+        </p:nvSpPr>
+        <p:spPr>
+          <a:xfrm>
+            <a:off x="457200" y="457200"/>
+            <a:ext cx="6858000" cy="4800600"/>
+          </a:xfrm>
+          <a:prstGeom prst="rect">
+            <a:avLst/>
+          </a:prstGeom>
+        </p:spPr>
+        <p:txBody>
+          <a:bodyPr wrap="square"/>
+          <a:lstStyle/>
+          <a:p>
+            <a:r>
+              <a:rPr lang="zh-CN" dirty="0"/>
+              <a:t>第 67 节 · 核心知识点：Settings 类与屏幕矩形</a:t>
+            </a:r>
+          </a:p>
+          <a:p>
+            <a:r>
+              <a:rPr lang="zh-CN" dirty="0"/>
+              <a:t/>
+            </a:r>
+          </a:p>
+          <a:p>
+            <a:r>
+              <a:rPr lang="zh-CN" dirty="0"/>
+              <a:t>讲这一页时：先让学生说出上节课的结论，再逐块讲要点。</a:t>
+            </a:r>
+          </a:p>
+          <a:p>
+            <a:r>
+              <a:rPr lang="zh-CN" dirty="0"/>
+              <a:t>每讲完一块，问一句「这一步如果写错了，报错会长什么样？」——把错误提前讲。</a:t>
+            </a:r>
+          </a:p>
+          <a:p>
+            <a:r>
+              <a:rPr lang="zh-CN" dirty="0"/>
+              <a:t/>
+            </a:r>
+          </a:p>
+          <a:p>
+            <a:r>
+              <a:rPr lang="zh-CN" dirty="0"/>
+              <a:t>本节目标：把所有会变的数值集中到 Settings；理解 screen_rect 的作用</a:t>
+            </a:r>
+          </a:p>
+          <a:p>
+            <a:r>
+              <a:rPr lang="zh-CN" dirty="0"/>
+              <a:t/>
+            </a:r>
+          </a:p>
+          <a:p>
+            <a:r>
+              <a:rPr lang="zh-CN" dirty="0"/>
+              <a:t>看不到懂的地方，回讲义对应小节读一遍，再回来对着这页复述一次——能讲出来才算真懂。</a:t>
+            </a:r>
+          </a:p>
+        </p:txBody>
+      </p:sp>
+    </p:spTree>
+  </p:cSld>
+  <p:clrMapOvr>
+    <a:masterClrMapping/>
+  </p:clrMapOvr>
+</p:notes>
+</file>
+
+<file path=ppt/notesSlides/notesSlide8.xml><?xml version="1.0" encoding="utf-8"?>
+<p:notes xmlns:a="http://schemas.openxmlformats.org/drawingml/2006/main" xmlns:p="http://schemas.openxmlformats.org/presentationml/2006/main" xmlns:r="http://schemas.openxmlformats.org/officeDocument/2006/relationships">
+  <p:cSld>
+    <p:spTree>
+      <p:nvGrpSpPr>
+        <p:cNvPr id="1" name=""/>
+        <p:cNvGrpSpPr/>
+        <p:nvPr/>
+      </p:nvGrpSpPr>
+      <p:grpSpPr>
+        <a:xfrm>
+          <a:off x="0" y="0"/>
+          <a:ext cx="0" cy="0"/>
+          <a:chOff x="0" y="0"/>
+          <a:chExt cx="0" cy="0"/>
+        </a:xfrm>
+      </p:grpSpPr>
+      <p:sp>
+        <p:nvSpPr>
+          <p:cNvPr id="2" name="讲课提示"/>
+          <p:cNvSpPr txBox="1"/>
+          <p:nvPr/>
+        </p:nvSpPr>
+        <p:spPr>
+          <a:xfrm>
+            <a:off x="457200" y="457200"/>
+            <a:ext cx="6858000" cy="4800600"/>
+          </a:xfrm>
+          <a:prstGeom prst="rect">
+            <a:avLst/>
+          </a:prstGeom>
+        </p:spPr>
+        <p:txBody>
+          <a:bodyPr wrap="square"/>
+          <a:lstStyle/>
+          <a:p>
+            <a:r>
+              <a:rPr lang="zh-CN" dirty="0"/>
+              <a:t>第 68 节 · 驾驶飞船：标志位与边界</a:t>
+            </a:r>
+          </a:p>
+          <a:p>
+            <a:r>
+              <a:rPr lang="zh-CN" dirty="0"/>
+              <a:t>单元 12 · Pygame 起步与飞船驾驶 · W14–W15</a:t>
+            </a:r>
+          </a:p>
+          <a:p>
+            <a:r>
+              <a:rPr lang="zh-CN" dirty="0"/>
+              <a:t/>
+            </a:r>
+          </a:p>
+          <a:p>
+            <a:r>
+              <a:rPr lang="zh-CN" dirty="0"/>
+              <a:t>学习目标：用 moving_right 标志位实现持续移动；用 screen_rect 限制活动范围</a:t>
+            </a:r>
+          </a:p>
+          <a:p>
+            <a:r>
+              <a:rPr lang="zh-CN" dirty="0"/>
+              <a:t/>
+            </a:r>
+          </a:p>
+          <a:p>
+            <a:r>
+              <a:rPr lang="zh-CN" dirty="0"/>
+              <a:t>课堂实操（40 分钟，不看答案）：</a:t>
+            </a:r>
+          </a:p>
+          <a:p>
+            <a:r>
+              <a:rPr lang="zh-CN" dirty="0"/>
+              <a:t>· 现场实现左右移动（不许看答案）</a:t>
+            </a:r>
+          </a:p>
+          <a:p>
+            <a:r>
+              <a:rPr lang="zh-CN" dirty="0"/>
+              <a:t>· 故意删掉边界判断，看飞船飞出屏幕</a:t>
+            </a:r>
+          </a:p>
+          <a:p>
+            <a:r>
+              <a:rPr lang="zh-CN" dirty="0"/>
+              <a:t>· 把飞船速度改成 3，观察手感变化</a:t>
+            </a:r>
+          </a:p>
+          <a:p>
+            <a:r>
+              <a:rPr lang="zh-CN" dirty="0"/>
+              <a:t/>
+            </a:r>
+          </a:p>
+          <a:p>
+            <a:r>
+              <a:rPr lang="zh-CN" dirty="0"/>
+              <a:t>课后作业：</a:t>
+            </a:r>
+          </a:p>
+          <a:p>
+            <a:r>
+              <a:rPr lang="zh-CN" dirty="0"/>
+              <a:t>· 完成教材 12.6 全部动手练</a:t>
+            </a:r>
+          </a:p>
+          <a:p>
+            <a:r>
+              <a:rPr lang="zh-CN" dirty="0"/>
+              <a:t/>
+            </a:r>
+          </a:p>
+          <a:p>
+            <a:r>
+              <a:rPr lang="zh-CN" dirty="0"/>
+              <a:t>节奏：讲 20 分钟 → 学员自己敲 40 分钟（不看答案）→ 对讲评自查 20 分钟 → 写作业 10 分钟。</a:t>
+            </a:r>
+          </a:p>
+        </p:txBody>
+      </p:sp>
+    </p:spTree>
+  </p:cSld>
+  <p:clrMapOvr>
+    <a:masterClrMapping/>
+  </p:clrMapOvr>
+</p:notes>
+</file>
+
+<file path=ppt/notesSlides/notesSlide9.xml><?xml version="1.0" encoding="utf-8"?>
+<p:notes xmlns:a="http://schemas.openxmlformats.org/drawingml/2006/main" xmlns:p="http://schemas.openxmlformats.org/presentationml/2006/main" xmlns:r="http://schemas.openxmlformats.org/officeDocument/2006/relationships">
+  <p:cSld>
+    <p:spTree>
+      <p:nvGrpSpPr>
+        <p:cNvPr id="1" name=""/>
+        <p:cNvGrpSpPr/>
+        <p:nvPr/>
+      </p:nvGrpSpPr>
+      <p:grpSpPr>
+        <a:xfrm>
+          <a:off x="0" y="0"/>
+          <a:ext cx="0" cy="0"/>
+          <a:chOff x="0" y="0"/>
+          <a:chExt cx="0" cy="0"/>
+        </a:xfrm>
+      </p:grpSpPr>
+      <p:sp>
+        <p:nvSpPr>
+          <p:cNvPr id="2" name="讲课提示"/>
+          <p:cNvSpPr txBox="1"/>
+          <p:nvPr/>
+        </p:nvSpPr>
+        <p:spPr>
+          <a:xfrm>
+            <a:off x="457200" y="457200"/>
+            <a:ext cx="6858000" cy="4800600"/>
+          </a:xfrm>
+          <a:prstGeom prst="rect">
+            <a:avLst/>
+          </a:prstGeom>
+        </p:spPr>
+        <p:txBody>
+          <a:bodyPr wrap="square"/>
+          <a:lstStyle/>
+          <a:p>
+            <a:r>
+              <a:rPr lang="zh-CN" dirty="0"/>
+              <a:t>第 68 节 · 核心知识点：驾驶飞船：标志位与边界</a:t>
+            </a:r>
+          </a:p>
+          <a:p>
+            <a:r>
+              <a:rPr lang="zh-CN" dirty="0"/>
+              <a:t/>
+            </a:r>
+          </a:p>
+          <a:p>
+            <a:r>
+              <a:rPr lang="zh-CN" dirty="0"/>
+              <a:t>讲这一页时：先让学生说出上节课的结论，再逐块讲要点。</a:t>
+            </a:r>
+          </a:p>
+          <a:p>
+            <a:r>
+              <a:rPr lang="zh-CN" dirty="0"/>
+              <a:t>每讲完一块，问一句「这一步如果写错了，报错会长什么样？」——把错误提前讲。</a:t>
+            </a:r>
+          </a:p>
+          <a:p>
+            <a:r>
+              <a:rPr lang="zh-CN" dirty="0"/>
+              <a:t/>
+            </a:r>
+          </a:p>
+          <a:p>
+            <a:r>
+              <a:rPr lang="zh-CN" dirty="0"/>
+              <a:t>本节目标：用 moving_right 标志位实现持续移动；用 screen_rect 限制活动范围</a:t>
+            </a:r>
+          </a:p>
+          <a:p>
+            <a:r>
+              <a:rPr lang="zh-CN" dirty="0"/>
+              <a:t/>
+            </a:r>
+          </a:p>
+          <a:p>
+            <a:r>
+              <a:rPr lang="zh-CN" dirty="0"/>
+              <a:t>看不到懂的地方，回讲义对应小节读一遍，再回来对着这页复述一次——能讲出来才算真懂。</a:t>
+            </a:r>
+          </a:p>
+        </p:txBody>
+      </p:sp>
+    </p:spTree>
+  </p:cSld>
+  <p:clrMapOvr>
+    <a:masterClrMapping/>
+  </p:clrMapOvr>
+</p:notes>
 </file>
 
 <file path=ppt/slideLayouts/slideLayout1.xml><?xml version="1.0" encoding="utf-8"?>
